--- a/tests/corpus/pptx/generated/lines.pptx
+++ b/tests/corpus/pptx/generated/lines.pptx
@@ -131,7 +131,7 @@
           <p:cNvPr id="2" name="Titel 1">
             <a:extLst>
               <a:ext uri="{FF2B5EF4-FFF2-40B4-BE49-F238E27FC236}">
-                <a16:creationId xmlns:a16="http://schemas.microsoft.com/office/drawing/2014/main" id="{933CE082-DA2C-1751-5932-B191B8967BB2}"/>
+                <a16:creationId xmlns:a16="http://schemas.microsoft.com/office/drawing/2014/main" id="{E0C90C23-F114-9007-8C73-E9957B41D44B}"/>
               </a:ext>
             </a:extLst>
           </p:cNvPr>
@@ -168,7 +168,7 @@
           <p:cNvPr id="3" name="Untertitel 2">
             <a:extLst>
               <a:ext uri="{FF2B5EF4-FFF2-40B4-BE49-F238E27FC236}">
-                <a16:creationId xmlns:a16="http://schemas.microsoft.com/office/drawing/2014/main" id="{3956E64F-C5C5-17A6-227A-4C8976DFE78E}"/>
+                <a16:creationId xmlns:a16="http://schemas.microsoft.com/office/drawing/2014/main" id="{5525753C-03CD-C097-A460-8139D7DA0B7D}"/>
               </a:ext>
             </a:extLst>
           </p:cNvPr>
@@ -238,7 +238,7 @@
           <p:cNvPr id="4" name="Datumsplatzhalter 3">
             <a:extLst>
               <a:ext uri="{FF2B5EF4-FFF2-40B4-BE49-F238E27FC236}">
-                <a16:creationId xmlns:a16="http://schemas.microsoft.com/office/drawing/2014/main" id="{3658229A-2945-9E2B-A065-BA0D6476D238}"/>
+                <a16:creationId xmlns:a16="http://schemas.microsoft.com/office/drawing/2014/main" id="{44232DE2-55CE-33C2-D6DE-A85381F9BBD2}"/>
               </a:ext>
             </a:extLst>
           </p:cNvPr>
@@ -254,7 +254,7 @@
           <a:bodyPr/>
           <a:lstStyle/>
           <a:p>
-            <a:fld id="{D6E6ABCC-063A-4998-9989-DB1D869DE6E1}" type="datetimeFigureOut">
+            <a:fld id="{CBD3FF2F-EDBE-492A-A584-95FBA04BCDF8}" type="datetimeFigureOut">
               <a:rPr lang="de-DE" smtClean="0"/>
               <a:t>08.10.2026</a:t>
             </a:fld>
@@ -267,7 +267,7 @@
           <p:cNvPr id="5" name="Fußzeilenplatzhalter 4">
             <a:extLst>
               <a:ext uri="{FF2B5EF4-FFF2-40B4-BE49-F238E27FC236}">
-                <a16:creationId xmlns:a16="http://schemas.microsoft.com/office/drawing/2014/main" id="{75E0983C-5646-B8E5-C09E-E158D5AD9B99}"/>
+                <a16:creationId xmlns:a16="http://schemas.microsoft.com/office/drawing/2014/main" id="{0E87EFEE-D893-EA36-E98B-42BD0C80AAAE}"/>
               </a:ext>
             </a:extLst>
           </p:cNvPr>
@@ -292,7 +292,7 @@
           <p:cNvPr id="6" name="Foliennummernplatzhalter 5">
             <a:extLst>
               <a:ext uri="{FF2B5EF4-FFF2-40B4-BE49-F238E27FC236}">
-                <a16:creationId xmlns:a16="http://schemas.microsoft.com/office/drawing/2014/main" id="{1C185B13-25B2-2D8D-2354-8A6F58148F91}"/>
+                <a16:creationId xmlns:a16="http://schemas.microsoft.com/office/drawing/2014/main" id="{F18733E9-5D64-E360-4470-80EB447D6DA3}"/>
               </a:ext>
             </a:extLst>
           </p:cNvPr>
@@ -308,7 +308,7 @@
           <a:bodyPr/>
           <a:lstStyle/>
           <a:p>
-            <a:fld id="{ED2E5961-9FAF-4670-9204-37F7C3A49C13}" type="slidenum">
+            <a:fld id="{75777C61-E1AF-4C89-9528-70FBF0304E59}" type="slidenum">
               <a:rPr lang="de-DE" smtClean="0"/>
               <a:t>‹Nr.›</a:t>
             </a:fld>
@@ -319,7 +319,7 @@
     </p:spTree>
     <p:extLst>
       <p:ext uri="{BB962C8B-B14F-4D97-AF65-F5344CB8AC3E}">
-        <p14:creationId xmlns:p14="http://schemas.microsoft.com/office/powerpoint/2010/main" val="2745529444"/>
+        <p14:creationId xmlns:p14="http://schemas.microsoft.com/office/powerpoint/2010/main" val="279641927"/>
       </p:ext>
     </p:extLst>
   </p:cSld>
@@ -351,7 +351,7 @@
           <p:cNvPr id="2" name="Titel 1">
             <a:extLst>
               <a:ext uri="{FF2B5EF4-FFF2-40B4-BE49-F238E27FC236}">
-                <a16:creationId xmlns:a16="http://schemas.microsoft.com/office/drawing/2014/main" id="{82ADE666-4875-267A-5C86-2E5E39168798}"/>
+                <a16:creationId xmlns:a16="http://schemas.microsoft.com/office/drawing/2014/main" id="{A5D9A3CE-B16A-51A4-8B4C-890493DF181D}"/>
               </a:ext>
             </a:extLst>
           </p:cNvPr>
@@ -379,7 +379,7 @@
           <p:cNvPr id="3" name="Vertikaler Textplatzhalter 2">
             <a:extLst>
               <a:ext uri="{FF2B5EF4-FFF2-40B4-BE49-F238E27FC236}">
-                <a16:creationId xmlns:a16="http://schemas.microsoft.com/office/drawing/2014/main" id="{F15BF862-0A60-AA58-22BF-99CEF2D2F87B}"/>
+                <a16:creationId xmlns:a16="http://schemas.microsoft.com/office/drawing/2014/main" id="{BA7AA913-7ECE-C745-175B-C349A9CFEDB2}"/>
               </a:ext>
             </a:extLst>
           </p:cNvPr>
@@ -436,7 +436,7 @@
           <p:cNvPr id="4" name="Datumsplatzhalter 3">
             <a:extLst>
               <a:ext uri="{FF2B5EF4-FFF2-40B4-BE49-F238E27FC236}">
-                <a16:creationId xmlns:a16="http://schemas.microsoft.com/office/drawing/2014/main" id="{15FAB15D-F17D-D369-B811-B876E7056ADB}"/>
+                <a16:creationId xmlns:a16="http://schemas.microsoft.com/office/drawing/2014/main" id="{06C6D953-6323-C195-347A-2742DF111B04}"/>
               </a:ext>
             </a:extLst>
           </p:cNvPr>
@@ -452,7 +452,7 @@
           <a:bodyPr/>
           <a:lstStyle/>
           <a:p>
-            <a:fld id="{D6E6ABCC-063A-4998-9989-DB1D869DE6E1}" type="datetimeFigureOut">
+            <a:fld id="{CBD3FF2F-EDBE-492A-A584-95FBA04BCDF8}" type="datetimeFigureOut">
               <a:rPr lang="de-DE" smtClean="0"/>
               <a:t>08.10.2026</a:t>
             </a:fld>
@@ -465,7 +465,7 @@
           <p:cNvPr id="5" name="Fußzeilenplatzhalter 4">
             <a:extLst>
               <a:ext uri="{FF2B5EF4-FFF2-40B4-BE49-F238E27FC236}">
-                <a16:creationId xmlns:a16="http://schemas.microsoft.com/office/drawing/2014/main" id="{6DF7D0B4-4EC6-5855-6172-15028EC33296}"/>
+                <a16:creationId xmlns:a16="http://schemas.microsoft.com/office/drawing/2014/main" id="{73770055-D5CF-C98E-D804-8DF7B52A81EA}"/>
               </a:ext>
             </a:extLst>
           </p:cNvPr>
@@ -490,7 +490,7 @@
           <p:cNvPr id="6" name="Foliennummernplatzhalter 5">
             <a:extLst>
               <a:ext uri="{FF2B5EF4-FFF2-40B4-BE49-F238E27FC236}">
-                <a16:creationId xmlns:a16="http://schemas.microsoft.com/office/drawing/2014/main" id="{B9F67415-F606-CE21-73C0-E2D74525A1CC}"/>
+                <a16:creationId xmlns:a16="http://schemas.microsoft.com/office/drawing/2014/main" id="{A75E3BB0-18BE-60F3-5F92-D088E99B5385}"/>
               </a:ext>
             </a:extLst>
           </p:cNvPr>
@@ -506,7 +506,7 @@
           <a:bodyPr/>
           <a:lstStyle/>
           <a:p>
-            <a:fld id="{ED2E5961-9FAF-4670-9204-37F7C3A49C13}" type="slidenum">
+            <a:fld id="{75777C61-E1AF-4C89-9528-70FBF0304E59}" type="slidenum">
               <a:rPr lang="de-DE" smtClean="0"/>
               <a:t>‹Nr.›</a:t>
             </a:fld>
@@ -517,7 +517,7 @@
     </p:spTree>
     <p:extLst>
       <p:ext uri="{BB962C8B-B14F-4D97-AF65-F5344CB8AC3E}">
-        <p14:creationId xmlns:p14="http://schemas.microsoft.com/office/powerpoint/2010/main" val="1191273458"/>
+        <p14:creationId xmlns:p14="http://schemas.microsoft.com/office/powerpoint/2010/main" val="3276535825"/>
       </p:ext>
     </p:extLst>
   </p:cSld>
@@ -549,7 +549,7 @@
           <p:cNvPr id="2" name="Vertikaler Titel 1">
             <a:extLst>
               <a:ext uri="{FF2B5EF4-FFF2-40B4-BE49-F238E27FC236}">
-                <a16:creationId xmlns:a16="http://schemas.microsoft.com/office/drawing/2014/main" id="{F50841E9-B5B0-C0D6-C08D-67161F66C1E4}"/>
+                <a16:creationId xmlns:a16="http://schemas.microsoft.com/office/drawing/2014/main" id="{0394CFEE-F34E-364E-730C-0A7F79B4FC57}"/>
               </a:ext>
             </a:extLst>
           </p:cNvPr>
@@ -582,7 +582,7 @@
           <p:cNvPr id="3" name="Vertikaler Textplatzhalter 2">
             <a:extLst>
               <a:ext uri="{FF2B5EF4-FFF2-40B4-BE49-F238E27FC236}">
-                <a16:creationId xmlns:a16="http://schemas.microsoft.com/office/drawing/2014/main" id="{EEE90EC3-1471-E1B3-932D-2D040C564E53}"/>
+                <a16:creationId xmlns:a16="http://schemas.microsoft.com/office/drawing/2014/main" id="{C2D78D98-F143-7DE2-3D84-F0EDDB22F6CE}"/>
               </a:ext>
             </a:extLst>
           </p:cNvPr>
@@ -644,7 +644,7 @@
           <p:cNvPr id="4" name="Datumsplatzhalter 3">
             <a:extLst>
               <a:ext uri="{FF2B5EF4-FFF2-40B4-BE49-F238E27FC236}">
-                <a16:creationId xmlns:a16="http://schemas.microsoft.com/office/drawing/2014/main" id="{5AACC70B-54C2-B9DF-8F76-FF0F68E8CD83}"/>
+                <a16:creationId xmlns:a16="http://schemas.microsoft.com/office/drawing/2014/main" id="{9DF4E1F4-3F91-7AB3-FDD3-F5A09F74A97B}"/>
               </a:ext>
             </a:extLst>
           </p:cNvPr>
@@ -660,7 +660,7 @@
           <a:bodyPr/>
           <a:lstStyle/>
           <a:p>
-            <a:fld id="{D6E6ABCC-063A-4998-9989-DB1D869DE6E1}" type="datetimeFigureOut">
+            <a:fld id="{CBD3FF2F-EDBE-492A-A584-95FBA04BCDF8}" type="datetimeFigureOut">
               <a:rPr lang="de-DE" smtClean="0"/>
               <a:t>08.10.2026</a:t>
             </a:fld>
@@ -673,7 +673,7 @@
           <p:cNvPr id="5" name="Fußzeilenplatzhalter 4">
             <a:extLst>
               <a:ext uri="{FF2B5EF4-FFF2-40B4-BE49-F238E27FC236}">
-                <a16:creationId xmlns:a16="http://schemas.microsoft.com/office/drawing/2014/main" id="{A6989525-717E-CFC2-01EC-A20356FA9DD7}"/>
+                <a16:creationId xmlns:a16="http://schemas.microsoft.com/office/drawing/2014/main" id="{90DB3A79-5917-FBAB-640B-DF6F80A8B475}"/>
               </a:ext>
             </a:extLst>
           </p:cNvPr>
@@ -698,7 +698,7 @@
           <p:cNvPr id="6" name="Foliennummernplatzhalter 5">
             <a:extLst>
               <a:ext uri="{FF2B5EF4-FFF2-40B4-BE49-F238E27FC236}">
-                <a16:creationId xmlns:a16="http://schemas.microsoft.com/office/drawing/2014/main" id="{A2DE0483-A463-1ABF-A9D1-B5B3717A65CF}"/>
+                <a16:creationId xmlns:a16="http://schemas.microsoft.com/office/drawing/2014/main" id="{F1AB8219-0C16-514A-9C15-62E8ADBE0727}"/>
               </a:ext>
             </a:extLst>
           </p:cNvPr>
@@ -714,7 +714,7 @@
           <a:bodyPr/>
           <a:lstStyle/>
           <a:p>
-            <a:fld id="{ED2E5961-9FAF-4670-9204-37F7C3A49C13}" type="slidenum">
+            <a:fld id="{75777C61-E1AF-4C89-9528-70FBF0304E59}" type="slidenum">
               <a:rPr lang="de-DE" smtClean="0"/>
               <a:t>‹Nr.›</a:t>
             </a:fld>
@@ -725,7 +725,7 @@
     </p:spTree>
     <p:extLst>
       <p:ext uri="{BB962C8B-B14F-4D97-AF65-F5344CB8AC3E}">
-        <p14:creationId xmlns:p14="http://schemas.microsoft.com/office/powerpoint/2010/main" val="1838536972"/>
+        <p14:creationId xmlns:p14="http://schemas.microsoft.com/office/powerpoint/2010/main" val="382509123"/>
       </p:ext>
     </p:extLst>
   </p:cSld>
@@ -757,7 +757,7 @@
           <p:cNvPr id="2" name="Titel 1">
             <a:extLst>
               <a:ext uri="{FF2B5EF4-FFF2-40B4-BE49-F238E27FC236}">
-                <a16:creationId xmlns:a16="http://schemas.microsoft.com/office/drawing/2014/main" id="{C5BB4CC4-62C9-3A4C-5E2B-ED11FE84B5C0}"/>
+                <a16:creationId xmlns:a16="http://schemas.microsoft.com/office/drawing/2014/main" id="{4B18056D-B345-1EDB-FF61-6D78B0854A57}"/>
               </a:ext>
             </a:extLst>
           </p:cNvPr>
@@ -785,7 +785,7 @@
           <p:cNvPr id="3" name="Inhaltsplatzhalter 2">
             <a:extLst>
               <a:ext uri="{FF2B5EF4-FFF2-40B4-BE49-F238E27FC236}">
-                <a16:creationId xmlns:a16="http://schemas.microsoft.com/office/drawing/2014/main" id="{AFE13589-959A-EAE1-73BE-BF19B07F0E62}"/>
+                <a16:creationId xmlns:a16="http://schemas.microsoft.com/office/drawing/2014/main" id="{32A1DE60-D9DF-B292-80B6-1D2BF1A97045}"/>
               </a:ext>
             </a:extLst>
           </p:cNvPr>
@@ -842,7 +842,7 @@
           <p:cNvPr id="4" name="Datumsplatzhalter 3">
             <a:extLst>
               <a:ext uri="{FF2B5EF4-FFF2-40B4-BE49-F238E27FC236}">
-                <a16:creationId xmlns:a16="http://schemas.microsoft.com/office/drawing/2014/main" id="{F095CE4E-B264-BCDC-177D-89B03208D13B}"/>
+                <a16:creationId xmlns:a16="http://schemas.microsoft.com/office/drawing/2014/main" id="{D551976C-F325-6AA3-500F-6CBAF3F2B9D7}"/>
               </a:ext>
             </a:extLst>
           </p:cNvPr>
@@ -858,7 +858,7 @@
           <a:bodyPr/>
           <a:lstStyle/>
           <a:p>
-            <a:fld id="{D6E6ABCC-063A-4998-9989-DB1D869DE6E1}" type="datetimeFigureOut">
+            <a:fld id="{CBD3FF2F-EDBE-492A-A584-95FBA04BCDF8}" type="datetimeFigureOut">
               <a:rPr lang="de-DE" smtClean="0"/>
               <a:t>08.10.2026</a:t>
             </a:fld>
@@ -871,7 +871,7 @@
           <p:cNvPr id="5" name="Fußzeilenplatzhalter 4">
             <a:extLst>
               <a:ext uri="{FF2B5EF4-FFF2-40B4-BE49-F238E27FC236}">
-                <a16:creationId xmlns:a16="http://schemas.microsoft.com/office/drawing/2014/main" id="{E81AEE01-DAB6-8D9D-E885-49653F73DB65}"/>
+                <a16:creationId xmlns:a16="http://schemas.microsoft.com/office/drawing/2014/main" id="{50E44259-B0D5-6B6A-B67E-20CC26C33DBB}"/>
               </a:ext>
             </a:extLst>
           </p:cNvPr>
@@ -896,7 +896,7 @@
           <p:cNvPr id="6" name="Foliennummernplatzhalter 5">
             <a:extLst>
               <a:ext uri="{FF2B5EF4-FFF2-40B4-BE49-F238E27FC236}">
-                <a16:creationId xmlns:a16="http://schemas.microsoft.com/office/drawing/2014/main" id="{BBBBE21F-1FB1-69F1-D5EF-A35603017F47}"/>
+                <a16:creationId xmlns:a16="http://schemas.microsoft.com/office/drawing/2014/main" id="{17BE8AAB-98CF-DA97-D242-87A4177F6BDF}"/>
               </a:ext>
             </a:extLst>
           </p:cNvPr>
@@ -912,7 +912,7 @@
           <a:bodyPr/>
           <a:lstStyle/>
           <a:p>
-            <a:fld id="{ED2E5961-9FAF-4670-9204-37F7C3A49C13}" type="slidenum">
+            <a:fld id="{75777C61-E1AF-4C89-9528-70FBF0304E59}" type="slidenum">
               <a:rPr lang="de-DE" smtClean="0"/>
               <a:t>‹Nr.›</a:t>
             </a:fld>
@@ -923,7 +923,7 @@
     </p:spTree>
     <p:extLst>
       <p:ext uri="{BB962C8B-B14F-4D97-AF65-F5344CB8AC3E}">
-        <p14:creationId xmlns:p14="http://schemas.microsoft.com/office/powerpoint/2010/main" val="86972195"/>
+        <p14:creationId xmlns:p14="http://schemas.microsoft.com/office/powerpoint/2010/main" val="863458425"/>
       </p:ext>
     </p:extLst>
   </p:cSld>
@@ -955,7 +955,7 @@
           <p:cNvPr id="2" name="Titel 1">
             <a:extLst>
               <a:ext uri="{FF2B5EF4-FFF2-40B4-BE49-F238E27FC236}">
-                <a16:creationId xmlns:a16="http://schemas.microsoft.com/office/drawing/2014/main" id="{BAC89A14-7B80-FF11-FFEA-8CDC36BC85BB}"/>
+                <a16:creationId xmlns:a16="http://schemas.microsoft.com/office/drawing/2014/main" id="{B24CF56F-72B8-4C86-2CD9-7A9561FFD97C}"/>
               </a:ext>
             </a:extLst>
           </p:cNvPr>
@@ -992,7 +992,7 @@
           <p:cNvPr id="3" name="Textplatzhalter 2">
             <a:extLst>
               <a:ext uri="{FF2B5EF4-FFF2-40B4-BE49-F238E27FC236}">
-                <a16:creationId xmlns:a16="http://schemas.microsoft.com/office/drawing/2014/main" id="{A5CCDFDF-3E22-0417-1ED8-C5C4BA336607}"/>
+                <a16:creationId xmlns:a16="http://schemas.microsoft.com/office/drawing/2014/main" id="{39055340-6F1A-3C22-AB05-C5AFDDD1FF2E}"/>
               </a:ext>
             </a:extLst>
           </p:cNvPr>
@@ -1117,7 +1117,7 @@
           <p:cNvPr id="4" name="Datumsplatzhalter 3">
             <a:extLst>
               <a:ext uri="{FF2B5EF4-FFF2-40B4-BE49-F238E27FC236}">
-                <a16:creationId xmlns:a16="http://schemas.microsoft.com/office/drawing/2014/main" id="{D74AFCAB-455B-14C7-164C-0625F05366CE}"/>
+                <a16:creationId xmlns:a16="http://schemas.microsoft.com/office/drawing/2014/main" id="{FFC5D256-6B24-E1EC-A3A6-78F662CAB5D0}"/>
               </a:ext>
             </a:extLst>
           </p:cNvPr>
@@ -1133,7 +1133,7 @@
           <a:bodyPr/>
           <a:lstStyle/>
           <a:p>
-            <a:fld id="{D6E6ABCC-063A-4998-9989-DB1D869DE6E1}" type="datetimeFigureOut">
+            <a:fld id="{CBD3FF2F-EDBE-492A-A584-95FBA04BCDF8}" type="datetimeFigureOut">
               <a:rPr lang="de-DE" smtClean="0"/>
               <a:t>08.10.2026</a:t>
             </a:fld>
@@ -1146,7 +1146,7 @@
           <p:cNvPr id="5" name="Fußzeilenplatzhalter 4">
             <a:extLst>
               <a:ext uri="{FF2B5EF4-FFF2-40B4-BE49-F238E27FC236}">
-                <a16:creationId xmlns:a16="http://schemas.microsoft.com/office/drawing/2014/main" id="{C9176AB9-DA19-F231-1B4E-B5D33AD386FD}"/>
+                <a16:creationId xmlns:a16="http://schemas.microsoft.com/office/drawing/2014/main" id="{7AECEBAD-4F4B-A7BA-7235-5CFE2A7C5423}"/>
               </a:ext>
             </a:extLst>
           </p:cNvPr>
@@ -1171,7 +1171,7 @@
           <p:cNvPr id="6" name="Foliennummernplatzhalter 5">
             <a:extLst>
               <a:ext uri="{FF2B5EF4-FFF2-40B4-BE49-F238E27FC236}">
-                <a16:creationId xmlns:a16="http://schemas.microsoft.com/office/drawing/2014/main" id="{5B8E05E9-99C0-B9EF-B9DD-1E7E77D49F09}"/>
+                <a16:creationId xmlns:a16="http://schemas.microsoft.com/office/drawing/2014/main" id="{71866269-0CC5-7417-0A41-ACA5C0E884BC}"/>
               </a:ext>
             </a:extLst>
           </p:cNvPr>
@@ -1187,7 +1187,7 @@
           <a:bodyPr/>
           <a:lstStyle/>
           <a:p>
-            <a:fld id="{ED2E5961-9FAF-4670-9204-37F7C3A49C13}" type="slidenum">
+            <a:fld id="{75777C61-E1AF-4C89-9528-70FBF0304E59}" type="slidenum">
               <a:rPr lang="de-DE" smtClean="0"/>
               <a:t>‹Nr.›</a:t>
             </a:fld>
@@ -1198,7 +1198,7 @@
     </p:spTree>
     <p:extLst>
       <p:ext uri="{BB962C8B-B14F-4D97-AF65-F5344CB8AC3E}">
-        <p14:creationId xmlns:p14="http://schemas.microsoft.com/office/powerpoint/2010/main" val="1256767943"/>
+        <p14:creationId xmlns:p14="http://schemas.microsoft.com/office/powerpoint/2010/main" val="2266752513"/>
       </p:ext>
     </p:extLst>
   </p:cSld>
@@ -1230,7 +1230,7 @@
           <p:cNvPr id="2" name="Titel 1">
             <a:extLst>
               <a:ext uri="{FF2B5EF4-FFF2-40B4-BE49-F238E27FC236}">
-                <a16:creationId xmlns:a16="http://schemas.microsoft.com/office/drawing/2014/main" id="{7DE74393-323B-BBBD-F64F-806C59A14D88}"/>
+                <a16:creationId xmlns:a16="http://schemas.microsoft.com/office/drawing/2014/main" id="{AC363C27-E4CA-9ABE-7211-315ABD2DA5BD}"/>
               </a:ext>
             </a:extLst>
           </p:cNvPr>
@@ -1258,7 +1258,7 @@
           <p:cNvPr id="3" name="Inhaltsplatzhalter 2">
             <a:extLst>
               <a:ext uri="{FF2B5EF4-FFF2-40B4-BE49-F238E27FC236}">
-                <a16:creationId xmlns:a16="http://schemas.microsoft.com/office/drawing/2014/main" id="{153685C8-BDB8-740F-0911-C42C7A6504BB}"/>
+                <a16:creationId xmlns:a16="http://schemas.microsoft.com/office/drawing/2014/main" id="{AFD43311-7437-58F8-0676-6CC9F5A4227C}"/>
               </a:ext>
             </a:extLst>
           </p:cNvPr>
@@ -1320,7 +1320,7 @@
           <p:cNvPr id="4" name="Inhaltsplatzhalter 3">
             <a:extLst>
               <a:ext uri="{FF2B5EF4-FFF2-40B4-BE49-F238E27FC236}">
-                <a16:creationId xmlns:a16="http://schemas.microsoft.com/office/drawing/2014/main" id="{508F847D-1315-078F-22DA-34A60310011A}"/>
+                <a16:creationId xmlns:a16="http://schemas.microsoft.com/office/drawing/2014/main" id="{921A3414-E362-E8C2-9C14-2B92EA2BA820}"/>
               </a:ext>
             </a:extLst>
           </p:cNvPr>
@@ -1382,7 +1382,7 @@
           <p:cNvPr id="5" name="Datumsplatzhalter 4">
             <a:extLst>
               <a:ext uri="{FF2B5EF4-FFF2-40B4-BE49-F238E27FC236}">
-                <a16:creationId xmlns:a16="http://schemas.microsoft.com/office/drawing/2014/main" id="{4157D50A-62EA-D791-7FCD-73864364B9C9}"/>
+                <a16:creationId xmlns:a16="http://schemas.microsoft.com/office/drawing/2014/main" id="{8BFED03C-4EC2-BDA8-DCCB-3DCCEDFC4841}"/>
               </a:ext>
             </a:extLst>
           </p:cNvPr>
@@ -1398,7 +1398,7 @@
           <a:bodyPr/>
           <a:lstStyle/>
           <a:p>
-            <a:fld id="{D6E6ABCC-063A-4998-9989-DB1D869DE6E1}" type="datetimeFigureOut">
+            <a:fld id="{CBD3FF2F-EDBE-492A-A584-95FBA04BCDF8}" type="datetimeFigureOut">
               <a:rPr lang="de-DE" smtClean="0"/>
               <a:t>08.10.2026</a:t>
             </a:fld>
@@ -1411,7 +1411,7 @@
           <p:cNvPr id="6" name="Fußzeilenplatzhalter 5">
             <a:extLst>
               <a:ext uri="{FF2B5EF4-FFF2-40B4-BE49-F238E27FC236}">
-                <a16:creationId xmlns:a16="http://schemas.microsoft.com/office/drawing/2014/main" id="{37C895C4-E1CA-921E-1073-4DF26BB83EE3}"/>
+                <a16:creationId xmlns:a16="http://schemas.microsoft.com/office/drawing/2014/main" id="{B65D5B2A-83F1-EA7A-94BB-4BE804D37EF3}"/>
               </a:ext>
             </a:extLst>
           </p:cNvPr>
@@ -1436,7 +1436,7 @@
           <p:cNvPr id="7" name="Foliennummernplatzhalter 6">
             <a:extLst>
               <a:ext uri="{FF2B5EF4-FFF2-40B4-BE49-F238E27FC236}">
-                <a16:creationId xmlns:a16="http://schemas.microsoft.com/office/drawing/2014/main" id="{E97DF830-02CE-918F-99BD-D7BB6E3ECF32}"/>
+                <a16:creationId xmlns:a16="http://schemas.microsoft.com/office/drawing/2014/main" id="{A495C6BB-EE60-ED6B-D7FA-028E16C9CEA3}"/>
               </a:ext>
             </a:extLst>
           </p:cNvPr>
@@ -1452,7 +1452,7 @@
           <a:bodyPr/>
           <a:lstStyle/>
           <a:p>
-            <a:fld id="{ED2E5961-9FAF-4670-9204-37F7C3A49C13}" type="slidenum">
+            <a:fld id="{75777C61-E1AF-4C89-9528-70FBF0304E59}" type="slidenum">
               <a:rPr lang="de-DE" smtClean="0"/>
               <a:t>‹Nr.›</a:t>
             </a:fld>
@@ -1463,7 +1463,7 @@
     </p:spTree>
     <p:extLst>
       <p:ext uri="{BB962C8B-B14F-4D97-AF65-F5344CB8AC3E}">
-        <p14:creationId xmlns:p14="http://schemas.microsoft.com/office/powerpoint/2010/main" val="3201103972"/>
+        <p14:creationId xmlns:p14="http://schemas.microsoft.com/office/powerpoint/2010/main" val="9107492"/>
       </p:ext>
     </p:extLst>
   </p:cSld>
@@ -1495,7 +1495,7 @@
           <p:cNvPr id="2" name="Titel 1">
             <a:extLst>
               <a:ext uri="{FF2B5EF4-FFF2-40B4-BE49-F238E27FC236}">
-                <a16:creationId xmlns:a16="http://schemas.microsoft.com/office/drawing/2014/main" id="{54C8F225-51E9-C4F9-C872-982F9D2AB10F}"/>
+                <a16:creationId xmlns:a16="http://schemas.microsoft.com/office/drawing/2014/main" id="{B3DB2E03-1554-26E9-6547-2C1706ED0211}"/>
               </a:ext>
             </a:extLst>
           </p:cNvPr>
@@ -1528,7 +1528,7 @@
           <p:cNvPr id="3" name="Textplatzhalter 2">
             <a:extLst>
               <a:ext uri="{FF2B5EF4-FFF2-40B4-BE49-F238E27FC236}">
-                <a16:creationId xmlns:a16="http://schemas.microsoft.com/office/drawing/2014/main" id="{83A4D649-9DE6-3D51-4EB4-5CD8A4FE92EA}"/>
+                <a16:creationId xmlns:a16="http://schemas.microsoft.com/office/drawing/2014/main" id="{B3131179-A7E5-CF23-597A-F7A3BCC4A37F}"/>
               </a:ext>
             </a:extLst>
           </p:cNvPr>
@@ -1599,7 +1599,7 @@
           <p:cNvPr id="4" name="Inhaltsplatzhalter 3">
             <a:extLst>
               <a:ext uri="{FF2B5EF4-FFF2-40B4-BE49-F238E27FC236}">
-                <a16:creationId xmlns:a16="http://schemas.microsoft.com/office/drawing/2014/main" id="{516FCB7D-9E73-741C-DD71-5B344C9D09F0}"/>
+                <a16:creationId xmlns:a16="http://schemas.microsoft.com/office/drawing/2014/main" id="{46CBEB59-D300-319B-97D9-028535DA7181}"/>
               </a:ext>
             </a:extLst>
           </p:cNvPr>
@@ -1661,7 +1661,7 @@
           <p:cNvPr id="5" name="Textplatzhalter 4">
             <a:extLst>
               <a:ext uri="{FF2B5EF4-FFF2-40B4-BE49-F238E27FC236}">
-                <a16:creationId xmlns:a16="http://schemas.microsoft.com/office/drawing/2014/main" id="{2922019E-59D9-C723-B166-6A3FEDC20026}"/>
+                <a16:creationId xmlns:a16="http://schemas.microsoft.com/office/drawing/2014/main" id="{3DAA9925-8A85-FA6C-EE1D-2CCA37B920C8}"/>
               </a:ext>
             </a:extLst>
           </p:cNvPr>
@@ -1732,7 +1732,7 @@
           <p:cNvPr id="6" name="Inhaltsplatzhalter 5">
             <a:extLst>
               <a:ext uri="{FF2B5EF4-FFF2-40B4-BE49-F238E27FC236}">
-                <a16:creationId xmlns:a16="http://schemas.microsoft.com/office/drawing/2014/main" id="{5378FABF-C84A-6A5A-6D4D-CDF284A51C64}"/>
+                <a16:creationId xmlns:a16="http://schemas.microsoft.com/office/drawing/2014/main" id="{AE76F0B8-204A-4343-CB37-1957D019F6FD}"/>
               </a:ext>
             </a:extLst>
           </p:cNvPr>
@@ -1794,7 +1794,7 @@
           <p:cNvPr id="7" name="Datumsplatzhalter 6">
             <a:extLst>
               <a:ext uri="{FF2B5EF4-FFF2-40B4-BE49-F238E27FC236}">
-                <a16:creationId xmlns:a16="http://schemas.microsoft.com/office/drawing/2014/main" id="{3128839D-A00B-4F39-2888-D6E3DC753470}"/>
+                <a16:creationId xmlns:a16="http://schemas.microsoft.com/office/drawing/2014/main" id="{0FF94860-938E-CD4A-A5F1-8DE0B93AF011}"/>
               </a:ext>
             </a:extLst>
           </p:cNvPr>
@@ -1810,7 +1810,7 @@
           <a:bodyPr/>
           <a:lstStyle/>
           <a:p>
-            <a:fld id="{D6E6ABCC-063A-4998-9989-DB1D869DE6E1}" type="datetimeFigureOut">
+            <a:fld id="{CBD3FF2F-EDBE-492A-A584-95FBA04BCDF8}" type="datetimeFigureOut">
               <a:rPr lang="de-DE" smtClean="0"/>
               <a:t>08.10.2026</a:t>
             </a:fld>
@@ -1823,7 +1823,7 @@
           <p:cNvPr id="8" name="Fußzeilenplatzhalter 7">
             <a:extLst>
               <a:ext uri="{FF2B5EF4-FFF2-40B4-BE49-F238E27FC236}">
-                <a16:creationId xmlns:a16="http://schemas.microsoft.com/office/drawing/2014/main" id="{A2004D0D-6124-C34C-A07B-EAD13A67C134}"/>
+                <a16:creationId xmlns:a16="http://schemas.microsoft.com/office/drawing/2014/main" id="{8ACC04FD-8726-4F30-D5E1-97DF877E2840}"/>
               </a:ext>
             </a:extLst>
           </p:cNvPr>
@@ -1848,7 +1848,7 @@
           <p:cNvPr id="9" name="Foliennummernplatzhalter 8">
             <a:extLst>
               <a:ext uri="{FF2B5EF4-FFF2-40B4-BE49-F238E27FC236}">
-                <a16:creationId xmlns:a16="http://schemas.microsoft.com/office/drawing/2014/main" id="{0E57A819-E600-8D32-25C6-3C6490A32A82}"/>
+                <a16:creationId xmlns:a16="http://schemas.microsoft.com/office/drawing/2014/main" id="{A9A4D703-8541-F70B-021A-9499122E7D2E}"/>
               </a:ext>
             </a:extLst>
           </p:cNvPr>
@@ -1864,7 +1864,7 @@
           <a:bodyPr/>
           <a:lstStyle/>
           <a:p>
-            <a:fld id="{ED2E5961-9FAF-4670-9204-37F7C3A49C13}" type="slidenum">
+            <a:fld id="{75777C61-E1AF-4C89-9528-70FBF0304E59}" type="slidenum">
               <a:rPr lang="de-DE" smtClean="0"/>
               <a:t>‹Nr.›</a:t>
             </a:fld>
@@ -1875,7 +1875,7 @@
     </p:spTree>
     <p:extLst>
       <p:ext uri="{BB962C8B-B14F-4D97-AF65-F5344CB8AC3E}">
-        <p14:creationId xmlns:p14="http://schemas.microsoft.com/office/powerpoint/2010/main" val="1711128145"/>
+        <p14:creationId xmlns:p14="http://schemas.microsoft.com/office/powerpoint/2010/main" val="4007627976"/>
       </p:ext>
     </p:extLst>
   </p:cSld>
@@ -1907,7 +1907,7 @@
           <p:cNvPr id="2" name="Titel 1">
             <a:extLst>
               <a:ext uri="{FF2B5EF4-FFF2-40B4-BE49-F238E27FC236}">
-                <a16:creationId xmlns:a16="http://schemas.microsoft.com/office/drawing/2014/main" id="{791AB7E1-C5AA-1CE2-5FDE-C4536E4094DF}"/>
+                <a16:creationId xmlns:a16="http://schemas.microsoft.com/office/drawing/2014/main" id="{D02635D5-3CD1-170D-1E90-098608A80AC1}"/>
               </a:ext>
             </a:extLst>
           </p:cNvPr>
@@ -1935,7 +1935,7 @@
           <p:cNvPr id="3" name="Datumsplatzhalter 2">
             <a:extLst>
               <a:ext uri="{FF2B5EF4-FFF2-40B4-BE49-F238E27FC236}">
-                <a16:creationId xmlns:a16="http://schemas.microsoft.com/office/drawing/2014/main" id="{7CA4D165-181A-477E-7F11-743C4E7C833E}"/>
+                <a16:creationId xmlns:a16="http://schemas.microsoft.com/office/drawing/2014/main" id="{7B2920EA-8CE3-3C76-181B-31D21BBBD464}"/>
               </a:ext>
             </a:extLst>
           </p:cNvPr>
@@ -1951,7 +1951,7 @@
           <a:bodyPr/>
           <a:lstStyle/>
           <a:p>
-            <a:fld id="{D6E6ABCC-063A-4998-9989-DB1D869DE6E1}" type="datetimeFigureOut">
+            <a:fld id="{CBD3FF2F-EDBE-492A-A584-95FBA04BCDF8}" type="datetimeFigureOut">
               <a:rPr lang="de-DE" smtClean="0"/>
               <a:t>08.10.2026</a:t>
             </a:fld>
@@ -1964,7 +1964,7 @@
           <p:cNvPr id="4" name="Fußzeilenplatzhalter 3">
             <a:extLst>
               <a:ext uri="{FF2B5EF4-FFF2-40B4-BE49-F238E27FC236}">
-                <a16:creationId xmlns:a16="http://schemas.microsoft.com/office/drawing/2014/main" id="{7AF6DDB2-D63E-4D9E-A8FD-C0E695C55496}"/>
+                <a16:creationId xmlns:a16="http://schemas.microsoft.com/office/drawing/2014/main" id="{5426BDCB-9470-39BC-AB90-9983FC29B821}"/>
               </a:ext>
             </a:extLst>
           </p:cNvPr>
@@ -1989,7 +1989,7 @@
           <p:cNvPr id="5" name="Foliennummernplatzhalter 4">
             <a:extLst>
               <a:ext uri="{FF2B5EF4-FFF2-40B4-BE49-F238E27FC236}">
-                <a16:creationId xmlns:a16="http://schemas.microsoft.com/office/drawing/2014/main" id="{15D7410A-3F86-96E4-751A-A3DCF2B8E939}"/>
+                <a16:creationId xmlns:a16="http://schemas.microsoft.com/office/drawing/2014/main" id="{19BBF35D-E954-8929-CBC2-0B890C7804E1}"/>
               </a:ext>
             </a:extLst>
           </p:cNvPr>
@@ -2005,7 +2005,7 @@
           <a:bodyPr/>
           <a:lstStyle/>
           <a:p>
-            <a:fld id="{ED2E5961-9FAF-4670-9204-37F7C3A49C13}" type="slidenum">
+            <a:fld id="{75777C61-E1AF-4C89-9528-70FBF0304E59}" type="slidenum">
               <a:rPr lang="de-DE" smtClean="0"/>
               <a:t>‹Nr.›</a:t>
             </a:fld>
@@ -2016,7 +2016,7 @@
     </p:spTree>
     <p:extLst>
       <p:ext uri="{BB962C8B-B14F-4D97-AF65-F5344CB8AC3E}">
-        <p14:creationId xmlns:p14="http://schemas.microsoft.com/office/powerpoint/2010/main" val="1163581183"/>
+        <p14:creationId xmlns:p14="http://schemas.microsoft.com/office/powerpoint/2010/main" val="4044369697"/>
       </p:ext>
     </p:extLst>
   </p:cSld>
@@ -2048,7 +2048,7 @@
           <p:cNvPr id="2" name="Datumsplatzhalter 1">
             <a:extLst>
               <a:ext uri="{FF2B5EF4-FFF2-40B4-BE49-F238E27FC236}">
-                <a16:creationId xmlns:a16="http://schemas.microsoft.com/office/drawing/2014/main" id="{2D72D81F-008B-DA74-5F4D-91E97C9CDE02}"/>
+                <a16:creationId xmlns:a16="http://schemas.microsoft.com/office/drawing/2014/main" id="{17035C13-3D8A-3CCB-23F0-BCE8CAC4940B}"/>
               </a:ext>
             </a:extLst>
           </p:cNvPr>
@@ -2064,7 +2064,7 @@
           <a:bodyPr/>
           <a:lstStyle/>
           <a:p>
-            <a:fld id="{D6E6ABCC-063A-4998-9989-DB1D869DE6E1}" type="datetimeFigureOut">
+            <a:fld id="{CBD3FF2F-EDBE-492A-A584-95FBA04BCDF8}" type="datetimeFigureOut">
               <a:rPr lang="de-DE" smtClean="0"/>
               <a:t>08.10.2026</a:t>
             </a:fld>
@@ -2077,7 +2077,7 @@
           <p:cNvPr id="3" name="Fußzeilenplatzhalter 2">
             <a:extLst>
               <a:ext uri="{FF2B5EF4-FFF2-40B4-BE49-F238E27FC236}">
-                <a16:creationId xmlns:a16="http://schemas.microsoft.com/office/drawing/2014/main" id="{F9FDCF8A-DB97-4B13-DA1C-BF35B9CC7F02}"/>
+                <a16:creationId xmlns:a16="http://schemas.microsoft.com/office/drawing/2014/main" id="{2F087A95-8848-E0E2-F320-8C1950C12962}"/>
               </a:ext>
             </a:extLst>
           </p:cNvPr>
@@ -2102,7 +2102,7 @@
           <p:cNvPr id="4" name="Foliennummernplatzhalter 3">
             <a:extLst>
               <a:ext uri="{FF2B5EF4-FFF2-40B4-BE49-F238E27FC236}">
-                <a16:creationId xmlns:a16="http://schemas.microsoft.com/office/drawing/2014/main" id="{3B5CFF99-A9BB-F27F-9E9A-20FAD2DF302A}"/>
+                <a16:creationId xmlns:a16="http://schemas.microsoft.com/office/drawing/2014/main" id="{BB1D45B1-7877-98EF-CA6C-FA10364FEFED}"/>
               </a:ext>
             </a:extLst>
           </p:cNvPr>
@@ -2118,7 +2118,7 @@
           <a:bodyPr/>
           <a:lstStyle/>
           <a:p>
-            <a:fld id="{ED2E5961-9FAF-4670-9204-37F7C3A49C13}" type="slidenum">
+            <a:fld id="{75777C61-E1AF-4C89-9528-70FBF0304E59}" type="slidenum">
               <a:rPr lang="de-DE" smtClean="0"/>
               <a:t>‹Nr.›</a:t>
             </a:fld>
@@ -2129,7 +2129,7 @@
     </p:spTree>
     <p:extLst>
       <p:ext uri="{BB962C8B-B14F-4D97-AF65-F5344CB8AC3E}">
-        <p14:creationId xmlns:p14="http://schemas.microsoft.com/office/powerpoint/2010/main" val="3597328734"/>
+        <p14:creationId xmlns:p14="http://schemas.microsoft.com/office/powerpoint/2010/main" val="2121638624"/>
       </p:ext>
     </p:extLst>
   </p:cSld>
@@ -2161,7 +2161,7 @@
           <p:cNvPr id="2" name="Titel 1">
             <a:extLst>
               <a:ext uri="{FF2B5EF4-FFF2-40B4-BE49-F238E27FC236}">
-                <a16:creationId xmlns:a16="http://schemas.microsoft.com/office/drawing/2014/main" id="{A00DFCD1-9B27-25A1-F82E-FE994AE26A25}"/>
+                <a16:creationId xmlns:a16="http://schemas.microsoft.com/office/drawing/2014/main" id="{93543388-1308-3433-DAC3-2D288DF8689D}"/>
               </a:ext>
             </a:extLst>
           </p:cNvPr>
@@ -2198,7 +2198,7 @@
           <p:cNvPr id="3" name="Inhaltsplatzhalter 2">
             <a:extLst>
               <a:ext uri="{FF2B5EF4-FFF2-40B4-BE49-F238E27FC236}">
-                <a16:creationId xmlns:a16="http://schemas.microsoft.com/office/drawing/2014/main" id="{2CFDA9FD-A308-CC25-1620-E0F5E9CB732F}"/>
+                <a16:creationId xmlns:a16="http://schemas.microsoft.com/office/drawing/2014/main" id="{D7709AB0-8E2F-1DAF-C459-78217F7D4FA0}"/>
               </a:ext>
             </a:extLst>
           </p:cNvPr>
@@ -2288,7 +2288,7 @@
           <p:cNvPr id="4" name="Textplatzhalter 3">
             <a:extLst>
               <a:ext uri="{FF2B5EF4-FFF2-40B4-BE49-F238E27FC236}">
-                <a16:creationId xmlns:a16="http://schemas.microsoft.com/office/drawing/2014/main" id="{FD02938C-46B9-1C4D-9AFD-E916ECFDB19B}"/>
+                <a16:creationId xmlns:a16="http://schemas.microsoft.com/office/drawing/2014/main" id="{151BFD75-AF13-F6D2-7112-073380FFE1C7}"/>
               </a:ext>
             </a:extLst>
           </p:cNvPr>
@@ -2359,7 +2359,7 @@
           <p:cNvPr id="5" name="Datumsplatzhalter 4">
             <a:extLst>
               <a:ext uri="{FF2B5EF4-FFF2-40B4-BE49-F238E27FC236}">
-                <a16:creationId xmlns:a16="http://schemas.microsoft.com/office/drawing/2014/main" id="{7ECAEC3D-2815-5838-6F40-4ABBAD05F016}"/>
+                <a16:creationId xmlns:a16="http://schemas.microsoft.com/office/drawing/2014/main" id="{67611CDD-48DA-8805-2525-9FB744F76F02}"/>
               </a:ext>
             </a:extLst>
           </p:cNvPr>
@@ -2375,7 +2375,7 @@
           <a:bodyPr/>
           <a:lstStyle/>
           <a:p>
-            <a:fld id="{D6E6ABCC-063A-4998-9989-DB1D869DE6E1}" type="datetimeFigureOut">
+            <a:fld id="{CBD3FF2F-EDBE-492A-A584-95FBA04BCDF8}" type="datetimeFigureOut">
               <a:rPr lang="de-DE" smtClean="0"/>
               <a:t>08.10.2026</a:t>
             </a:fld>
@@ -2388,7 +2388,7 @@
           <p:cNvPr id="6" name="Fußzeilenplatzhalter 5">
             <a:extLst>
               <a:ext uri="{FF2B5EF4-FFF2-40B4-BE49-F238E27FC236}">
-                <a16:creationId xmlns:a16="http://schemas.microsoft.com/office/drawing/2014/main" id="{D6F644D3-4E36-C68F-C88D-9C4C65C905C2}"/>
+                <a16:creationId xmlns:a16="http://schemas.microsoft.com/office/drawing/2014/main" id="{44E668B9-B872-C15A-B51C-852552E93B7A}"/>
               </a:ext>
             </a:extLst>
           </p:cNvPr>
@@ -2413,7 +2413,7 @@
           <p:cNvPr id="7" name="Foliennummernplatzhalter 6">
             <a:extLst>
               <a:ext uri="{FF2B5EF4-FFF2-40B4-BE49-F238E27FC236}">
-                <a16:creationId xmlns:a16="http://schemas.microsoft.com/office/drawing/2014/main" id="{318F6A76-6893-5E63-A908-CD4968F3A2D4}"/>
+                <a16:creationId xmlns:a16="http://schemas.microsoft.com/office/drawing/2014/main" id="{F69878BC-B64B-C3D9-CE9E-40BD6ED20B32}"/>
               </a:ext>
             </a:extLst>
           </p:cNvPr>
@@ -2429,7 +2429,7 @@
           <a:bodyPr/>
           <a:lstStyle/>
           <a:p>
-            <a:fld id="{ED2E5961-9FAF-4670-9204-37F7C3A49C13}" type="slidenum">
+            <a:fld id="{75777C61-E1AF-4C89-9528-70FBF0304E59}" type="slidenum">
               <a:rPr lang="de-DE" smtClean="0"/>
               <a:t>‹Nr.›</a:t>
             </a:fld>
@@ -2440,7 +2440,7 @@
     </p:spTree>
     <p:extLst>
       <p:ext uri="{BB962C8B-B14F-4D97-AF65-F5344CB8AC3E}">
-        <p14:creationId xmlns:p14="http://schemas.microsoft.com/office/powerpoint/2010/main" val="619037342"/>
+        <p14:creationId xmlns:p14="http://schemas.microsoft.com/office/powerpoint/2010/main" val="3985004863"/>
       </p:ext>
     </p:extLst>
   </p:cSld>
@@ -2472,7 +2472,7 @@
           <p:cNvPr id="2" name="Titel 1">
             <a:extLst>
               <a:ext uri="{FF2B5EF4-FFF2-40B4-BE49-F238E27FC236}">
-                <a16:creationId xmlns:a16="http://schemas.microsoft.com/office/drawing/2014/main" id="{E6BC2E34-4315-2294-758C-79679C8C46C3}"/>
+                <a16:creationId xmlns:a16="http://schemas.microsoft.com/office/drawing/2014/main" id="{EAB6E868-B5BD-2C91-905B-D083909E854A}"/>
               </a:ext>
             </a:extLst>
           </p:cNvPr>
@@ -2509,7 +2509,7 @@
           <p:cNvPr id="3" name="Bildplatzhalter 2">
             <a:extLst>
               <a:ext uri="{FF2B5EF4-FFF2-40B4-BE49-F238E27FC236}">
-                <a16:creationId xmlns:a16="http://schemas.microsoft.com/office/drawing/2014/main" id="{E9270019-9692-F52A-8B85-1F3DF78F4C4C}"/>
+                <a16:creationId xmlns:a16="http://schemas.microsoft.com/office/drawing/2014/main" id="{7C4E976F-A5AF-5F53-84D9-F763C8BD082D}"/>
               </a:ext>
             </a:extLst>
           </p:cNvPr>
@@ -2576,7 +2576,7 @@
           <p:cNvPr id="4" name="Textplatzhalter 3">
             <a:extLst>
               <a:ext uri="{FF2B5EF4-FFF2-40B4-BE49-F238E27FC236}">
-                <a16:creationId xmlns:a16="http://schemas.microsoft.com/office/drawing/2014/main" id="{F16980DE-DBA7-2B71-5419-03FD20B60086}"/>
+                <a16:creationId xmlns:a16="http://schemas.microsoft.com/office/drawing/2014/main" id="{977F8CF9-5A08-0E08-F68A-E1097794BC39}"/>
               </a:ext>
             </a:extLst>
           </p:cNvPr>
@@ -2647,7 +2647,7 @@
           <p:cNvPr id="5" name="Datumsplatzhalter 4">
             <a:extLst>
               <a:ext uri="{FF2B5EF4-FFF2-40B4-BE49-F238E27FC236}">
-                <a16:creationId xmlns:a16="http://schemas.microsoft.com/office/drawing/2014/main" id="{4239DE96-3D87-F9A9-DAF0-CC87FF680F59}"/>
+                <a16:creationId xmlns:a16="http://schemas.microsoft.com/office/drawing/2014/main" id="{29AA0C4D-3688-3C33-166F-3A56E7D83DA7}"/>
               </a:ext>
             </a:extLst>
           </p:cNvPr>
@@ -2663,7 +2663,7 @@
           <a:bodyPr/>
           <a:lstStyle/>
           <a:p>
-            <a:fld id="{D6E6ABCC-063A-4998-9989-DB1D869DE6E1}" type="datetimeFigureOut">
+            <a:fld id="{CBD3FF2F-EDBE-492A-A584-95FBA04BCDF8}" type="datetimeFigureOut">
               <a:rPr lang="de-DE" smtClean="0"/>
               <a:t>08.10.2026</a:t>
             </a:fld>
@@ -2676,7 +2676,7 @@
           <p:cNvPr id="6" name="Fußzeilenplatzhalter 5">
             <a:extLst>
               <a:ext uri="{FF2B5EF4-FFF2-40B4-BE49-F238E27FC236}">
-                <a16:creationId xmlns:a16="http://schemas.microsoft.com/office/drawing/2014/main" id="{2B21976E-9EB9-47C2-569A-7AE6EA4324D2}"/>
+                <a16:creationId xmlns:a16="http://schemas.microsoft.com/office/drawing/2014/main" id="{F1E7E779-5B51-9C73-BF31-B65AF6B191FA}"/>
               </a:ext>
             </a:extLst>
           </p:cNvPr>
@@ -2701,7 +2701,7 @@
           <p:cNvPr id="7" name="Foliennummernplatzhalter 6">
             <a:extLst>
               <a:ext uri="{FF2B5EF4-FFF2-40B4-BE49-F238E27FC236}">
-                <a16:creationId xmlns:a16="http://schemas.microsoft.com/office/drawing/2014/main" id="{966D30C0-DE4C-3D3E-757E-9510479AAB62}"/>
+                <a16:creationId xmlns:a16="http://schemas.microsoft.com/office/drawing/2014/main" id="{3594AB8D-0696-2872-128C-CB00C17D56B9}"/>
               </a:ext>
             </a:extLst>
           </p:cNvPr>
@@ -2717,7 +2717,7 @@
           <a:bodyPr/>
           <a:lstStyle/>
           <a:p>
-            <a:fld id="{ED2E5961-9FAF-4670-9204-37F7C3A49C13}" type="slidenum">
+            <a:fld id="{75777C61-E1AF-4C89-9528-70FBF0304E59}" type="slidenum">
               <a:rPr lang="de-DE" smtClean="0"/>
               <a:t>‹Nr.›</a:t>
             </a:fld>
@@ -2728,7 +2728,7 @@
     </p:spTree>
     <p:extLst>
       <p:ext uri="{BB962C8B-B14F-4D97-AF65-F5344CB8AC3E}">
-        <p14:creationId xmlns:p14="http://schemas.microsoft.com/office/powerpoint/2010/main" val="3005027635"/>
+        <p14:creationId xmlns:p14="http://schemas.microsoft.com/office/powerpoint/2010/main" val="2029704315"/>
       </p:ext>
     </p:extLst>
   </p:cSld>
@@ -2765,7 +2765,7 @@
           <p:cNvPr id="2" name="Titelplatzhalter 1">
             <a:extLst>
               <a:ext uri="{FF2B5EF4-FFF2-40B4-BE49-F238E27FC236}">
-                <a16:creationId xmlns:a16="http://schemas.microsoft.com/office/drawing/2014/main" id="{66025D89-3125-E20B-B6BB-612A6065CF22}"/>
+                <a16:creationId xmlns:a16="http://schemas.microsoft.com/office/drawing/2014/main" id="{AE811897-1257-D519-6290-361B1B0819C6}"/>
               </a:ext>
             </a:extLst>
           </p:cNvPr>
@@ -2803,7 +2803,7 @@
           <p:cNvPr id="3" name="Textplatzhalter 2">
             <a:extLst>
               <a:ext uri="{FF2B5EF4-FFF2-40B4-BE49-F238E27FC236}">
-                <a16:creationId xmlns:a16="http://schemas.microsoft.com/office/drawing/2014/main" id="{06C30071-E988-708E-DD2C-6B21B1FD6E0D}"/>
+                <a16:creationId xmlns:a16="http://schemas.microsoft.com/office/drawing/2014/main" id="{EBBD32FA-DA3D-3977-3E53-869806EA3D6E}"/>
               </a:ext>
             </a:extLst>
           </p:cNvPr>
@@ -2870,7 +2870,7 @@
           <p:cNvPr id="4" name="Datumsplatzhalter 3">
             <a:extLst>
               <a:ext uri="{FF2B5EF4-FFF2-40B4-BE49-F238E27FC236}">
-                <a16:creationId xmlns:a16="http://schemas.microsoft.com/office/drawing/2014/main" id="{9EFC8240-34B3-5FA2-2AA1-A6AE06963A06}"/>
+                <a16:creationId xmlns:a16="http://schemas.microsoft.com/office/drawing/2014/main" id="{453E2AAA-4161-844E-6555-2D3B93487A6D}"/>
               </a:ext>
             </a:extLst>
           </p:cNvPr>
@@ -2904,7 +2904,7 @@
             </a:lvl1pPr>
           </a:lstStyle>
           <a:p>
-            <a:fld id="{D6E6ABCC-063A-4998-9989-DB1D869DE6E1}" type="datetimeFigureOut">
+            <a:fld id="{CBD3FF2F-EDBE-492A-A584-95FBA04BCDF8}" type="datetimeFigureOut">
               <a:rPr lang="de-DE" smtClean="0"/>
               <a:t>08.10.2026</a:t>
             </a:fld>
@@ -2917,7 +2917,7 @@
           <p:cNvPr id="5" name="Fußzeilenplatzhalter 4">
             <a:extLst>
               <a:ext uri="{FF2B5EF4-FFF2-40B4-BE49-F238E27FC236}">
-                <a16:creationId xmlns:a16="http://schemas.microsoft.com/office/drawing/2014/main" id="{79D05C60-B728-8914-7C5F-E8E15F707D15}"/>
+                <a16:creationId xmlns:a16="http://schemas.microsoft.com/office/drawing/2014/main" id="{ECAE8507-419E-7B4F-9A7B-32233CAD908D}"/>
               </a:ext>
             </a:extLst>
           </p:cNvPr>
@@ -2960,7 +2960,7 @@
           <p:cNvPr id="6" name="Foliennummernplatzhalter 5">
             <a:extLst>
               <a:ext uri="{FF2B5EF4-FFF2-40B4-BE49-F238E27FC236}">
-                <a16:creationId xmlns:a16="http://schemas.microsoft.com/office/drawing/2014/main" id="{228442F6-1973-8F9F-4E57-96D28793C1C7}"/>
+                <a16:creationId xmlns:a16="http://schemas.microsoft.com/office/drawing/2014/main" id="{BAA445D5-4238-6E9E-EB46-C440AE791EA8}"/>
               </a:ext>
             </a:extLst>
           </p:cNvPr>
@@ -2994,7 +2994,7 @@
             </a:lvl1pPr>
           </a:lstStyle>
           <a:p>
-            <a:fld id="{ED2E5961-9FAF-4670-9204-37F7C3A49C13}" type="slidenum">
+            <a:fld id="{75777C61-E1AF-4C89-9528-70FBF0304E59}" type="slidenum">
               <a:rPr lang="de-DE" smtClean="0"/>
               <a:t>‹Nr.›</a:t>
             </a:fld>
@@ -3005,7 +3005,7 @@
     </p:spTree>
     <p:extLst>
       <p:ext uri="{BB962C8B-B14F-4D97-AF65-F5344CB8AC3E}">
-        <p14:creationId xmlns:p14="http://schemas.microsoft.com/office/powerpoint/2010/main" val="2258933037"/>
+        <p14:creationId xmlns:p14="http://schemas.microsoft.com/office/powerpoint/2010/main" val="1265804476"/>
       </p:ext>
     </p:extLst>
   </p:cSld>
@@ -3328,7 +3328,7 @@
           <p:cNvPr id="2" name="Gerader Verbinder 1">
             <a:extLst>
               <a:ext uri="{FF2B5EF4-FFF2-40B4-BE49-F238E27FC236}">
-                <a16:creationId xmlns:a16="http://schemas.microsoft.com/office/drawing/2014/main" id="{6A129D49-A22E-726D-2FF7-7F9779DAC340}"/>
+                <a16:creationId xmlns:a16="http://schemas.microsoft.com/office/drawing/2014/main" id="{49E7C5EC-2317-3C2A-AEE7-AAFB24371E98}"/>
               </a:ext>
             </a:extLst>
           </p:cNvPr>
@@ -3369,7 +3369,7 @@
           <p:cNvPr id="3" name="Gerader Verbinder 2">
             <a:extLst>
               <a:ext uri="{FF2B5EF4-FFF2-40B4-BE49-F238E27FC236}">
-                <a16:creationId xmlns:a16="http://schemas.microsoft.com/office/drawing/2014/main" id="{8AAF7BD6-EE9F-EEA0-D51F-B8F39FA4694C}"/>
+                <a16:creationId xmlns:a16="http://schemas.microsoft.com/office/drawing/2014/main" id="{F30A2E16-83DC-1935-0603-80F00D06DC72}"/>
               </a:ext>
             </a:extLst>
           </p:cNvPr>
@@ -3410,7 +3410,7 @@
           <p:cNvPr id="4" name="Gerader Verbinder 3">
             <a:extLst>
               <a:ext uri="{FF2B5EF4-FFF2-40B4-BE49-F238E27FC236}">
-                <a16:creationId xmlns:a16="http://schemas.microsoft.com/office/drawing/2014/main" id="{6CE02062-6B2F-A2DE-2E61-31C2212A3554}"/>
+                <a16:creationId xmlns:a16="http://schemas.microsoft.com/office/drawing/2014/main" id="{7D7B68E0-1582-9408-9DC1-5F47C0DB3E68}"/>
               </a:ext>
             </a:extLst>
           </p:cNvPr>
@@ -3451,7 +3451,7 @@
           <p:cNvPr id="5" name="Gerader Verbinder 4">
             <a:extLst>
               <a:ext uri="{FF2B5EF4-FFF2-40B4-BE49-F238E27FC236}">
-                <a16:creationId xmlns:a16="http://schemas.microsoft.com/office/drawing/2014/main" id="{4DC883B3-5C97-6F33-5197-B069C4646DFF}"/>
+                <a16:creationId xmlns:a16="http://schemas.microsoft.com/office/drawing/2014/main" id="{54090632-02D7-E058-B00E-68CCF3062736}"/>
               </a:ext>
             </a:extLst>
           </p:cNvPr>
@@ -3492,7 +3492,7 @@
           <p:cNvPr id="6" name="Gerader Verbinder 5">
             <a:extLst>
               <a:ext uri="{FF2B5EF4-FFF2-40B4-BE49-F238E27FC236}">
-                <a16:creationId xmlns:a16="http://schemas.microsoft.com/office/drawing/2014/main" id="{CFA76020-3CB1-5557-F1FD-C9E2270A5486}"/>
+                <a16:creationId xmlns:a16="http://schemas.microsoft.com/office/drawing/2014/main" id="{DB892993-FEB2-8446-6B88-76815FBA4D53}"/>
               </a:ext>
             </a:extLst>
           </p:cNvPr>
@@ -3533,7 +3533,7 @@
           <p:cNvPr id="7" name="Gerader Verbinder 6">
             <a:extLst>
               <a:ext uri="{FF2B5EF4-FFF2-40B4-BE49-F238E27FC236}">
-                <a16:creationId xmlns:a16="http://schemas.microsoft.com/office/drawing/2014/main" id="{1029721C-126C-EF9F-9CFC-96FE8B925BBA}"/>
+                <a16:creationId xmlns:a16="http://schemas.microsoft.com/office/drawing/2014/main" id="{759E7E95-47F7-3F78-0EC5-2D9DD94734AA}"/>
               </a:ext>
             </a:extLst>
           </p:cNvPr>
@@ -3574,7 +3574,7 @@
           <p:cNvPr id="8" name="Gerader Verbinder 7">
             <a:extLst>
               <a:ext uri="{FF2B5EF4-FFF2-40B4-BE49-F238E27FC236}">
-                <a16:creationId xmlns:a16="http://schemas.microsoft.com/office/drawing/2014/main" id="{5F1E64DA-7D8F-2A30-2242-F01810A07829}"/>
+                <a16:creationId xmlns:a16="http://schemas.microsoft.com/office/drawing/2014/main" id="{41D3E9EC-1AD0-0775-56D9-DAAA63F6C756}"/>
               </a:ext>
             </a:extLst>
           </p:cNvPr>
@@ -3616,7 +3616,7 @@
           <p:cNvPr id="9" name="Gerader Verbinder 8">
             <a:extLst>
               <a:ext uri="{FF2B5EF4-FFF2-40B4-BE49-F238E27FC236}">
-                <a16:creationId xmlns:a16="http://schemas.microsoft.com/office/drawing/2014/main" id="{AF3D6320-D643-03AB-EE0B-FF001039604B}"/>
+                <a16:creationId xmlns:a16="http://schemas.microsoft.com/office/drawing/2014/main" id="{4049EFC7-1652-77E8-EDF5-4F6289BF4630}"/>
               </a:ext>
             </a:extLst>
           </p:cNvPr>
@@ -3658,7 +3658,7 @@
           <p:cNvPr id="10" name="Gerader Verbinder 9">
             <a:extLst>
               <a:ext uri="{FF2B5EF4-FFF2-40B4-BE49-F238E27FC236}">
-                <a16:creationId xmlns:a16="http://schemas.microsoft.com/office/drawing/2014/main" id="{81159CF1-7620-62B8-2B24-2913F06EF0F5}"/>
+                <a16:creationId xmlns:a16="http://schemas.microsoft.com/office/drawing/2014/main" id="{C7DF21C8-56BD-CA5B-EF56-35F6D1A0F8FF}"/>
               </a:ext>
             </a:extLst>
           </p:cNvPr>
@@ -3700,7 +3700,7 @@
           <p:cNvPr id="11" name="Gerader Verbinder 10">
             <a:extLst>
               <a:ext uri="{FF2B5EF4-FFF2-40B4-BE49-F238E27FC236}">
-                <a16:creationId xmlns:a16="http://schemas.microsoft.com/office/drawing/2014/main" id="{84B40F98-E536-FFF4-4931-C9642458C398}"/>
+                <a16:creationId xmlns:a16="http://schemas.microsoft.com/office/drawing/2014/main" id="{6CF01632-022E-2BD1-50D4-21DFD4A1877E}"/>
               </a:ext>
             </a:extLst>
           </p:cNvPr>
@@ -3742,7 +3742,7 @@
           <p:cNvPr id="12" name="Gerader Verbinder 11">
             <a:extLst>
               <a:ext uri="{FF2B5EF4-FFF2-40B4-BE49-F238E27FC236}">
-                <a16:creationId xmlns:a16="http://schemas.microsoft.com/office/drawing/2014/main" id="{73C615AF-C8BA-8591-1B6F-1784C514B88D}"/>
+                <a16:creationId xmlns:a16="http://schemas.microsoft.com/office/drawing/2014/main" id="{1AA93FE2-030A-9D23-27B3-83B90B3949D7}"/>
               </a:ext>
             </a:extLst>
           </p:cNvPr>
@@ -3784,7 +3784,7 @@
           <p:cNvPr id="13" name="Gerader Verbinder 12">
             <a:extLst>
               <a:ext uri="{FF2B5EF4-FFF2-40B4-BE49-F238E27FC236}">
-                <a16:creationId xmlns:a16="http://schemas.microsoft.com/office/drawing/2014/main" id="{EA5CCA17-44DB-989A-EEA1-85E539E9D54B}"/>
+                <a16:creationId xmlns:a16="http://schemas.microsoft.com/office/drawing/2014/main" id="{07026AEC-402B-2210-0E61-797597BCB463}"/>
               </a:ext>
             </a:extLst>
           </p:cNvPr>
@@ -3826,7 +3826,7 @@
           <p:cNvPr id="14" name="Gerader Verbinder 13">
             <a:extLst>
               <a:ext uri="{FF2B5EF4-FFF2-40B4-BE49-F238E27FC236}">
-                <a16:creationId xmlns:a16="http://schemas.microsoft.com/office/drawing/2014/main" id="{5ACFE3F2-DA91-0ADC-367A-F24E31F7A112}"/>
+                <a16:creationId xmlns:a16="http://schemas.microsoft.com/office/drawing/2014/main" id="{AF427AE5-0469-0D94-A71E-90CA69E530F4}"/>
               </a:ext>
             </a:extLst>
           </p:cNvPr>
@@ -3868,7 +3868,7 @@
           <p:cNvPr id="15" name="Gerader Verbinder 14">
             <a:extLst>
               <a:ext uri="{FF2B5EF4-FFF2-40B4-BE49-F238E27FC236}">
-                <a16:creationId xmlns:a16="http://schemas.microsoft.com/office/drawing/2014/main" id="{008806DE-546B-1E3D-A19E-D322ACC363F4}"/>
+                <a16:creationId xmlns:a16="http://schemas.microsoft.com/office/drawing/2014/main" id="{ACD1AD87-ADD4-42E2-58CF-74A9A44DE8DC}"/>
               </a:ext>
             </a:extLst>
           </p:cNvPr>
@@ -3910,7 +3910,7 @@
           <p:cNvPr id="16" name="Gerader Verbinder 15">
             <a:extLst>
               <a:ext uri="{FF2B5EF4-FFF2-40B4-BE49-F238E27FC236}">
-                <a16:creationId xmlns:a16="http://schemas.microsoft.com/office/drawing/2014/main" id="{20F25EDA-A908-14CE-06BF-E1A872422678}"/>
+                <a16:creationId xmlns:a16="http://schemas.microsoft.com/office/drawing/2014/main" id="{A772418E-F67B-F87E-463A-1255E643A700}"/>
               </a:ext>
             </a:extLst>
           </p:cNvPr>
@@ -3952,7 +3952,7 @@
           <p:cNvPr id="17" name="Gerader Verbinder 16">
             <a:extLst>
               <a:ext uri="{FF2B5EF4-FFF2-40B4-BE49-F238E27FC236}">
-                <a16:creationId xmlns:a16="http://schemas.microsoft.com/office/drawing/2014/main" id="{E10BCEFD-AE8E-60F5-D7B0-EAB0C11B7D5B}"/>
+                <a16:creationId xmlns:a16="http://schemas.microsoft.com/office/drawing/2014/main" id="{D082C134-620D-02A6-531B-83C5AB4081E4}"/>
               </a:ext>
             </a:extLst>
           </p:cNvPr>
@@ -3994,7 +3994,7 @@
           <p:cNvPr id="18" name="Gerader Verbinder 17">
             <a:extLst>
               <a:ext uri="{FF2B5EF4-FFF2-40B4-BE49-F238E27FC236}">
-                <a16:creationId xmlns:a16="http://schemas.microsoft.com/office/drawing/2014/main" id="{4FC89859-8914-7554-4770-7DCA9989ACB6}"/>
+                <a16:creationId xmlns:a16="http://schemas.microsoft.com/office/drawing/2014/main" id="{993579DD-A29C-8E58-F97B-2A15CFC93CC5}"/>
               </a:ext>
             </a:extLst>
           </p:cNvPr>
@@ -4036,7 +4036,7 @@
           <p:cNvPr id="19" name="Gerader Verbinder 18">
             <a:extLst>
               <a:ext uri="{FF2B5EF4-FFF2-40B4-BE49-F238E27FC236}">
-                <a16:creationId xmlns:a16="http://schemas.microsoft.com/office/drawing/2014/main" id="{3B0E357E-C105-05DB-10F8-1C3CF17BA52D}"/>
+                <a16:creationId xmlns:a16="http://schemas.microsoft.com/office/drawing/2014/main" id="{1D517B33-BD77-812D-6263-858061729176}"/>
               </a:ext>
             </a:extLst>
           </p:cNvPr>
@@ -4078,7 +4078,7 @@
           <p:cNvPr id="20" name="Rechteck 19">
             <a:extLst>
               <a:ext uri="{FF2B5EF4-FFF2-40B4-BE49-F238E27FC236}">
-                <a16:creationId xmlns:a16="http://schemas.microsoft.com/office/drawing/2014/main" id="{5C8563FF-7450-87E2-6749-D8A000CB341D}"/>
+                <a16:creationId xmlns:a16="http://schemas.microsoft.com/office/drawing/2014/main" id="{4201BCC3-E870-86AE-B42A-BCF1868FE221}"/>
               </a:ext>
             </a:extLst>
           </p:cNvPr>
@@ -4142,7 +4142,7 @@
           <p:cNvPr id="21" name="Rechteck 20">
             <a:extLst>
               <a:ext uri="{FF2B5EF4-FFF2-40B4-BE49-F238E27FC236}">
-                <a16:creationId xmlns:a16="http://schemas.microsoft.com/office/drawing/2014/main" id="{A874FA55-6E65-FB54-2EAA-9CFCFB444B09}"/>
+                <a16:creationId xmlns:a16="http://schemas.microsoft.com/office/drawing/2014/main" id="{F44C7C6C-1CBE-903B-23A0-9E88B8BD4EA9}"/>
               </a:ext>
             </a:extLst>
           </p:cNvPr>
@@ -4206,7 +4206,7 @@
           <p:cNvPr id="22" name="Rechteck 21">
             <a:extLst>
               <a:ext uri="{FF2B5EF4-FFF2-40B4-BE49-F238E27FC236}">
-                <a16:creationId xmlns:a16="http://schemas.microsoft.com/office/drawing/2014/main" id="{122A2CAA-400F-FCC1-8930-F66A6E4EEB42}"/>
+                <a16:creationId xmlns:a16="http://schemas.microsoft.com/office/drawing/2014/main" id="{6EA863D3-658B-5714-E804-E8656C817ADB}"/>
               </a:ext>
             </a:extLst>
           </p:cNvPr>
@@ -4270,7 +4270,7 @@
           <p:cNvPr id="23" name="Rechteck 22">
             <a:extLst>
               <a:ext uri="{FF2B5EF4-FFF2-40B4-BE49-F238E27FC236}">
-                <a16:creationId xmlns:a16="http://schemas.microsoft.com/office/drawing/2014/main" id="{9F36CA69-92E1-2C2B-F495-C2F5D65AFE64}"/>
+                <a16:creationId xmlns:a16="http://schemas.microsoft.com/office/drawing/2014/main" id="{3E772056-4075-0ABD-B179-8FA01EB75913}"/>
               </a:ext>
             </a:extLst>
           </p:cNvPr>
@@ -4334,7 +4334,7 @@
           <p:cNvPr id="24" name="Rechteck 23">
             <a:extLst>
               <a:ext uri="{FF2B5EF4-FFF2-40B4-BE49-F238E27FC236}">
-                <a16:creationId xmlns:a16="http://schemas.microsoft.com/office/drawing/2014/main" id="{E4A0C5B3-7233-82FE-1BC4-7FE9B2C12544}"/>
+                <a16:creationId xmlns:a16="http://schemas.microsoft.com/office/drawing/2014/main" id="{ED746A87-D6D5-0DB1-BC31-D08B4655858F}"/>
               </a:ext>
             </a:extLst>
           </p:cNvPr>
@@ -4396,7 +4396,7 @@
     </p:spTree>
     <p:extLst>
       <p:ext uri="{BB962C8B-B14F-4D97-AF65-F5344CB8AC3E}">
-        <p14:creationId xmlns:p14="http://schemas.microsoft.com/office/powerpoint/2010/main" val="4141175473"/>
+        <p14:creationId xmlns:p14="http://schemas.microsoft.com/office/powerpoint/2010/main" val="885643468"/>
       </p:ext>
     </p:extLst>
   </p:cSld>
@@ -4428,7 +4428,7 @@
           <p:cNvPr id="2" name="Gerader Verbinder 1">
             <a:extLst>
               <a:ext uri="{FF2B5EF4-FFF2-40B4-BE49-F238E27FC236}">
-                <a16:creationId xmlns:a16="http://schemas.microsoft.com/office/drawing/2014/main" id="{95E6C12C-F818-41BD-9F2B-6ECE625C1AD6}"/>
+                <a16:creationId xmlns:a16="http://schemas.microsoft.com/office/drawing/2014/main" id="{B77D4548-1E82-73A6-222B-CBB6A4E9E6A5}"/>
               </a:ext>
             </a:extLst>
           </p:cNvPr>
@@ -4471,7 +4471,7 @@
           <p:cNvPr id="3" name="Gerader Verbinder 2">
             <a:extLst>
               <a:ext uri="{FF2B5EF4-FFF2-40B4-BE49-F238E27FC236}">
-                <a16:creationId xmlns:a16="http://schemas.microsoft.com/office/drawing/2014/main" id="{FD0BB7FB-3F38-AFEA-3C0C-8D93F6145150}"/>
+                <a16:creationId xmlns:a16="http://schemas.microsoft.com/office/drawing/2014/main" id="{A6A764E1-12CE-8026-3192-930FE912D379}"/>
               </a:ext>
             </a:extLst>
           </p:cNvPr>
@@ -4513,7 +4513,7 @@
           <p:cNvPr id="4" name="Gerader Verbinder 3">
             <a:extLst>
               <a:ext uri="{FF2B5EF4-FFF2-40B4-BE49-F238E27FC236}">
-                <a16:creationId xmlns:a16="http://schemas.microsoft.com/office/drawing/2014/main" id="{EFE440C6-552E-EC3F-A41D-20CC15F8CB4F}"/>
+                <a16:creationId xmlns:a16="http://schemas.microsoft.com/office/drawing/2014/main" id="{3712C936-CF36-5519-0222-2C61DA7F3F03}"/>
               </a:ext>
             </a:extLst>
           </p:cNvPr>
@@ -4556,7 +4556,7 @@
           <p:cNvPr id="5" name="Gerader Verbinder 4">
             <a:extLst>
               <a:ext uri="{FF2B5EF4-FFF2-40B4-BE49-F238E27FC236}">
-                <a16:creationId xmlns:a16="http://schemas.microsoft.com/office/drawing/2014/main" id="{E42C1900-8084-646A-D350-C0662F08EE7D}"/>
+                <a16:creationId xmlns:a16="http://schemas.microsoft.com/office/drawing/2014/main" id="{A046AC6F-4469-20CE-7849-6476CEEC19B3}"/>
               </a:ext>
             </a:extLst>
           </p:cNvPr>
@@ -4598,7 +4598,7 @@
           <p:cNvPr id="6" name="Gerader Verbinder 5">
             <a:extLst>
               <a:ext uri="{FF2B5EF4-FFF2-40B4-BE49-F238E27FC236}">
-                <a16:creationId xmlns:a16="http://schemas.microsoft.com/office/drawing/2014/main" id="{91BB900B-5CC4-C953-250E-DC26866E726B}"/>
+                <a16:creationId xmlns:a16="http://schemas.microsoft.com/office/drawing/2014/main" id="{8DD7119C-D5EA-54EA-B647-E09BC6939C3A}"/>
               </a:ext>
             </a:extLst>
           </p:cNvPr>
@@ -4641,7 +4641,7 @@
           <p:cNvPr id="7" name="Gerader Verbinder 6">
             <a:extLst>
               <a:ext uri="{FF2B5EF4-FFF2-40B4-BE49-F238E27FC236}">
-                <a16:creationId xmlns:a16="http://schemas.microsoft.com/office/drawing/2014/main" id="{C62B4A3F-24B1-AF99-8B75-46FB4793BD92}"/>
+                <a16:creationId xmlns:a16="http://schemas.microsoft.com/office/drawing/2014/main" id="{D9AC4AD4-C772-F992-5991-BAE77C8DA743}"/>
               </a:ext>
             </a:extLst>
           </p:cNvPr>
@@ -4683,7 +4683,7 @@
           <p:cNvPr id="8" name="Gerader Verbinder 7">
             <a:extLst>
               <a:ext uri="{FF2B5EF4-FFF2-40B4-BE49-F238E27FC236}">
-                <a16:creationId xmlns:a16="http://schemas.microsoft.com/office/drawing/2014/main" id="{D4947DEB-920C-1708-E64F-ABA0BB2F5959}"/>
+                <a16:creationId xmlns:a16="http://schemas.microsoft.com/office/drawing/2014/main" id="{4C24F773-3239-0FDD-55A5-C35A31F2D0EE}"/>
               </a:ext>
             </a:extLst>
           </p:cNvPr>
@@ -4726,7 +4726,7 @@
           <p:cNvPr id="9" name="Gerader Verbinder 8">
             <a:extLst>
               <a:ext uri="{FF2B5EF4-FFF2-40B4-BE49-F238E27FC236}">
-                <a16:creationId xmlns:a16="http://schemas.microsoft.com/office/drawing/2014/main" id="{E373F213-2C9A-4589-00CE-9B6E4224F41C}"/>
+                <a16:creationId xmlns:a16="http://schemas.microsoft.com/office/drawing/2014/main" id="{74A6B05B-A583-5388-80F5-940AF55C9257}"/>
               </a:ext>
             </a:extLst>
           </p:cNvPr>
@@ -4768,7 +4768,7 @@
           <p:cNvPr id="10" name="Gerader Verbinder 9">
             <a:extLst>
               <a:ext uri="{FF2B5EF4-FFF2-40B4-BE49-F238E27FC236}">
-                <a16:creationId xmlns:a16="http://schemas.microsoft.com/office/drawing/2014/main" id="{21F9FA31-CB2A-935C-C1B9-BEF695970AB4}"/>
+                <a16:creationId xmlns:a16="http://schemas.microsoft.com/office/drawing/2014/main" id="{5E76F395-98DD-FE0D-43AD-353D96357E2F}"/>
               </a:ext>
             </a:extLst>
           </p:cNvPr>
@@ -4811,7 +4811,7 @@
           <p:cNvPr id="11" name="Gerader Verbinder 10">
             <a:extLst>
               <a:ext uri="{FF2B5EF4-FFF2-40B4-BE49-F238E27FC236}">
-                <a16:creationId xmlns:a16="http://schemas.microsoft.com/office/drawing/2014/main" id="{63233EE6-0E71-8A22-F8BE-530C0E7367D2}"/>
+                <a16:creationId xmlns:a16="http://schemas.microsoft.com/office/drawing/2014/main" id="{94CF9875-34E4-BE04-6999-DAAA9B11043D}"/>
               </a:ext>
             </a:extLst>
           </p:cNvPr>
@@ -4853,7 +4853,7 @@
           <p:cNvPr id="12" name="Gerader Verbinder 11">
             <a:extLst>
               <a:ext uri="{FF2B5EF4-FFF2-40B4-BE49-F238E27FC236}">
-                <a16:creationId xmlns:a16="http://schemas.microsoft.com/office/drawing/2014/main" id="{C3017C0F-A48A-4ACB-055A-26F1940C4CE3}"/>
+                <a16:creationId xmlns:a16="http://schemas.microsoft.com/office/drawing/2014/main" id="{B48CD332-F12F-D7D9-E172-ED055563F0CA}"/>
               </a:ext>
             </a:extLst>
           </p:cNvPr>
@@ -4896,7 +4896,7 @@
           <p:cNvPr id="13" name="Gerader Verbinder 12">
             <a:extLst>
               <a:ext uri="{FF2B5EF4-FFF2-40B4-BE49-F238E27FC236}">
-                <a16:creationId xmlns:a16="http://schemas.microsoft.com/office/drawing/2014/main" id="{4A6905DA-F69E-D4B4-B664-EF93842CD510}"/>
+                <a16:creationId xmlns:a16="http://schemas.microsoft.com/office/drawing/2014/main" id="{AFC1690D-8473-AF9D-DC3F-61136EE75C3C}"/>
               </a:ext>
             </a:extLst>
           </p:cNvPr>
@@ -4938,7 +4938,7 @@
           <p:cNvPr id="14" name="Gerader Verbinder 13">
             <a:extLst>
               <a:ext uri="{FF2B5EF4-FFF2-40B4-BE49-F238E27FC236}">
-                <a16:creationId xmlns:a16="http://schemas.microsoft.com/office/drawing/2014/main" id="{F5AB808F-F2D4-49EC-D9D2-9857F8435054}"/>
+                <a16:creationId xmlns:a16="http://schemas.microsoft.com/office/drawing/2014/main" id="{88B8B64A-27EF-907C-6ADD-52B1E285845B}"/>
               </a:ext>
             </a:extLst>
           </p:cNvPr>
@@ -4981,7 +4981,7 @@
           <p:cNvPr id="15" name="Gerader Verbinder 14">
             <a:extLst>
               <a:ext uri="{FF2B5EF4-FFF2-40B4-BE49-F238E27FC236}">
-                <a16:creationId xmlns:a16="http://schemas.microsoft.com/office/drawing/2014/main" id="{2B3330B6-8AC8-2185-DCC4-936C9DD51E89}"/>
+                <a16:creationId xmlns:a16="http://schemas.microsoft.com/office/drawing/2014/main" id="{E369C706-2F9F-2FDD-C2FB-8867E123203A}"/>
               </a:ext>
             </a:extLst>
           </p:cNvPr>
@@ -5023,7 +5023,7 @@
           <p:cNvPr id="16" name="Gerader Verbinder 15">
             <a:extLst>
               <a:ext uri="{FF2B5EF4-FFF2-40B4-BE49-F238E27FC236}">
-                <a16:creationId xmlns:a16="http://schemas.microsoft.com/office/drawing/2014/main" id="{EC387315-3720-67C0-086B-21D12AF48A6E}"/>
+                <a16:creationId xmlns:a16="http://schemas.microsoft.com/office/drawing/2014/main" id="{3AB4DF5C-4BFB-F9EE-965B-45DF3DE2FD3B}"/>
               </a:ext>
             </a:extLst>
           </p:cNvPr>
@@ -5066,7 +5066,7 @@
           <p:cNvPr id="17" name="Gerader Verbinder 16">
             <a:extLst>
               <a:ext uri="{FF2B5EF4-FFF2-40B4-BE49-F238E27FC236}">
-                <a16:creationId xmlns:a16="http://schemas.microsoft.com/office/drawing/2014/main" id="{5D54C1F6-E318-1998-F315-0B1D346DC58A}"/>
+                <a16:creationId xmlns:a16="http://schemas.microsoft.com/office/drawing/2014/main" id="{3A39F9FA-B96E-F791-ECD7-2F45F92877B6}"/>
               </a:ext>
             </a:extLst>
           </p:cNvPr>
@@ -5108,7 +5108,7 @@
           <p:cNvPr id="18" name="Gerader Verbinder 17">
             <a:extLst>
               <a:ext uri="{FF2B5EF4-FFF2-40B4-BE49-F238E27FC236}">
-                <a16:creationId xmlns:a16="http://schemas.microsoft.com/office/drawing/2014/main" id="{978BA23E-81D0-B472-5E9E-DDAE38B62F10}"/>
+                <a16:creationId xmlns:a16="http://schemas.microsoft.com/office/drawing/2014/main" id="{A45D65D4-AF35-EEC1-28EE-C5BAA8EF648A}"/>
               </a:ext>
             </a:extLst>
           </p:cNvPr>
@@ -5151,7 +5151,7 @@
           <p:cNvPr id="19" name="Gerader Verbinder 18">
             <a:extLst>
               <a:ext uri="{FF2B5EF4-FFF2-40B4-BE49-F238E27FC236}">
-                <a16:creationId xmlns:a16="http://schemas.microsoft.com/office/drawing/2014/main" id="{18694361-70A9-3085-FD93-92EBB4BF0C35}"/>
+                <a16:creationId xmlns:a16="http://schemas.microsoft.com/office/drawing/2014/main" id="{621AB8AC-2846-915C-E6DA-C5A4FF7C567E}"/>
               </a:ext>
             </a:extLst>
           </p:cNvPr>
@@ -5193,7 +5193,7 @@
           <p:cNvPr id="20" name="Gerader Verbinder 19">
             <a:extLst>
               <a:ext uri="{FF2B5EF4-FFF2-40B4-BE49-F238E27FC236}">
-                <a16:creationId xmlns:a16="http://schemas.microsoft.com/office/drawing/2014/main" id="{5BF68327-EEDF-30EE-99F9-01ABE3CB2A97}"/>
+                <a16:creationId xmlns:a16="http://schemas.microsoft.com/office/drawing/2014/main" id="{96742330-4EA5-1BFF-0CD1-38F3958DFCE7}"/>
               </a:ext>
             </a:extLst>
           </p:cNvPr>
@@ -5236,7 +5236,7 @@
           <p:cNvPr id="21" name="Gerader Verbinder 20">
             <a:extLst>
               <a:ext uri="{FF2B5EF4-FFF2-40B4-BE49-F238E27FC236}">
-                <a16:creationId xmlns:a16="http://schemas.microsoft.com/office/drawing/2014/main" id="{CF71E247-A189-7C76-17D4-675EE535E4D4}"/>
+                <a16:creationId xmlns:a16="http://schemas.microsoft.com/office/drawing/2014/main" id="{82008FDA-9B88-72DD-8AF5-78797BBB1C19}"/>
               </a:ext>
             </a:extLst>
           </p:cNvPr>
@@ -5278,7 +5278,7 @@
           <p:cNvPr id="22" name="Gerader Verbinder 21">
             <a:extLst>
               <a:ext uri="{FF2B5EF4-FFF2-40B4-BE49-F238E27FC236}">
-                <a16:creationId xmlns:a16="http://schemas.microsoft.com/office/drawing/2014/main" id="{6FA2D174-5CFD-B055-AEEA-4D7C68BB8A55}"/>
+                <a16:creationId xmlns:a16="http://schemas.microsoft.com/office/drawing/2014/main" id="{E8221363-DFA6-ABC0-9340-564B53310474}"/>
               </a:ext>
             </a:extLst>
           </p:cNvPr>
@@ -5321,7 +5321,7 @@
           <p:cNvPr id="23" name="Gerader Verbinder 22">
             <a:extLst>
               <a:ext uri="{FF2B5EF4-FFF2-40B4-BE49-F238E27FC236}">
-                <a16:creationId xmlns:a16="http://schemas.microsoft.com/office/drawing/2014/main" id="{2137C2C0-11A6-C172-54AF-7560A66D6939}"/>
+                <a16:creationId xmlns:a16="http://schemas.microsoft.com/office/drawing/2014/main" id="{578A7908-812B-7EB6-ECFD-B36B659C524B}"/>
               </a:ext>
             </a:extLst>
           </p:cNvPr>
@@ -5363,7 +5363,7 @@
           <p:cNvPr id="24" name="Gerader Verbinder 23">
             <a:extLst>
               <a:ext uri="{FF2B5EF4-FFF2-40B4-BE49-F238E27FC236}">
-                <a16:creationId xmlns:a16="http://schemas.microsoft.com/office/drawing/2014/main" id="{5676B3FE-30D2-AEC5-9F6C-909AFDD5F81F}"/>
+                <a16:creationId xmlns:a16="http://schemas.microsoft.com/office/drawing/2014/main" id="{98EDD7D6-D2AE-32D2-5595-FE88B46D9EAF}"/>
               </a:ext>
             </a:extLst>
           </p:cNvPr>
@@ -5406,7 +5406,7 @@
           <p:cNvPr id="25" name="Gerader Verbinder 24">
             <a:extLst>
               <a:ext uri="{FF2B5EF4-FFF2-40B4-BE49-F238E27FC236}">
-                <a16:creationId xmlns:a16="http://schemas.microsoft.com/office/drawing/2014/main" id="{C0820337-314B-0841-ECED-56DC9C87F082}"/>
+                <a16:creationId xmlns:a16="http://schemas.microsoft.com/office/drawing/2014/main" id="{2A4309AB-F75B-75A1-C7FC-57A6F55614DD}"/>
               </a:ext>
             </a:extLst>
           </p:cNvPr>
@@ -5448,7 +5448,7 @@
           <p:cNvPr id="26" name="Gerader Verbinder 25">
             <a:extLst>
               <a:ext uri="{FF2B5EF4-FFF2-40B4-BE49-F238E27FC236}">
-                <a16:creationId xmlns:a16="http://schemas.microsoft.com/office/drawing/2014/main" id="{4B0B0A2B-DA96-42D7-35E7-347A1A283A5D}"/>
+                <a16:creationId xmlns:a16="http://schemas.microsoft.com/office/drawing/2014/main" id="{47864C06-1527-F148-5ED4-E15C77F1822F}"/>
               </a:ext>
             </a:extLst>
           </p:cNvPr>
@@ -5491,7 +5491,7 @@
           <p:cNvPr id="27" name="Gerader Verbinder 26">
             <a:extLst>
               <a:ext uri="{FF2B5EF4-FFF2-40B4-BE49-F238E27FC236}">
-                <a16:creationId xmlns:a16="http://schemas.microsoft.com/office/drawing/2014/main" id="{6BD469FF-938E-7E8D-3568-FF524C98A7EC}"/>
+                <a16:creationId xmlns:a16="http://schemas.microsoft.com/office/drawing/2014/main" id="{B4A20B22-21CC-BED7-E328-02DCF48BBD31}"/>
               </a:ext>
             </a:extLst>
           </p:cNvPr>
@@ -5533,7 +5533,7 @@
           <p:cNvPr id="28" name="Gerader Verbinder 27">
             <a:extLst>
               <a:ext uri="{FF2B5EF4-FFF2-40B4-BE49-F238E27FC236}">
-                <a16:creationId xmlns:a16="http://schemas.microsoft.com/office/drawing/2014/main" id="{75C4C814-C8FB-6598-16A9-67705BF7E6FC}"/>
+                <a16:creationId xmlns:a16="http://schemas.microsoft.com/office/drawing/2014/main" id="{2BCC57C7-DAAA-B875-370F-01EB3C630C9C}"/>
               </a:ext>
             </a:extLst>
           </p:cNvPr>
@@ -5576,7 +5576,7 @@
           <p:cNvPr id="29" name="Gerader Verbinder 28">
             <a:extLst>
               <a:ext uri="{FF2B5EF4-FFF2-40B4-BE49-F238E27FC236}">
-                <a16:creationId xmlns:a16="http://schemas.microsoft.com/office/drawing/2014/main" id="{906CAC00-7B01-A8F5-1FA2-84B4F366057C}"/>
+                <a16:creationId xmlns:a16="http://schemas.microsoft.com/office/drawing/2014/main" id="{7C09197A-875A-9122-98D2-609036FFF7C7}"/>
               </a:ext>
             </a:extLst>
           </p:cNvPr>
@@ -5618,7 +5618,7 @@
           <p:cNvPr id="30" name="Gerader Verbinder 29">
             <a:extLst>
               <a:ext uri="{FF2B5EF4-FFF2-40B4-BE49-F238E27FC236}">
-                <a16:creationId xmlns:a16="http://schemas.microsoft.com/office/drawing/2014/main" id="{E40A4932-7D49-9F79-0C3B-5BF2E752E327}"/>
+                <a16:creationId xmlns:a16="http://schemas.microsoft.com/office/drawing/2014/main" id="{27D76913-861C-7792-287D-C9495BEDDDB9}"/>
               </a:ext>
             </a:extLst>
           </p:cNvPr>
@@ -5661,7 +5661,7 @@
           <p:cNvPr id="31" name="Gerader Verbinder 30">
             <a:extLst>
               <a:ext uri="{FF2B5EF4-FFF2-40B4-BE49-F238E27FC236}">
-                <a16:creationId xmlns:a16="http://schemas.microsoft.com/office/drawing/2014/main" id="{7B952F24-F040-0945-403C-5BD418BD2F70}"/>
+                <a16:creationId xmlns:a16="http://schemas.microsoft.com/office/drawing/2014/main" id="{B6960849-43DD-7584-9252-0DA02A79332F}"/>
               </a:ext>
             </a:extLst>
           </p:cNvPr>
@@ -5701,7 +5701,7 @@
     </p:spTree>
     <p:extLst>
       <p:ext uri="{BB962C8B-B14F-4D97-AF65-F5344CB8AC3E}">
-        <p14:creationId xmlns:p14="http://schemas.microsoft.com/office/powerpoint/2010/main" val="331570823"/>
+        <p14:creationId xmlns:p14="http://schemas.microsoft.com/office/powerpoint/2010/main" val="1001668036"/>
       </p:ext>
     </p:extLst>
   </p:cSld>
@@ -5733,7 +5733,7 @@
           <p:cNvPr id="2" name="Stern: 5 Zacken 1">
             <a:extLst>
               <a:ext uri="{FF2B5EF4-FFF2-40B4-BE49-F238E27FC236}">
-                <a16:creationId xmlns:a16="http://schemas.microsoft.com/office/drawing/2014/main" id="{41935829-ABC1-8461-A3B7-91AD669D3DC3}"/>
+                <a16:creationId xmlns:a16="http://schemas.microsoft.com/office/drawing/2014/main" id="{BDC34E4E-A862-A4B2-13A6-48A1D8DA3D88}"/>
               </a:ext>
             </a:extLst>
           </p:cNvPr>
@@ -5787,7 +5787,7 @@
           <p:cNvPr id="3" name="Ellipse 2">
             <a:extLst>
               <a:ext uri="{FF2B5EF4-FFF2-40B4-BE49-F238E27FC236}">
-                <a16:creationId xmlns:a16="http://schemas.microsoft.com/office/drawing/2014/main" id="{B5613FEA-299F-4E80-95E7-E2C43DEEA994}"/>
+                <a16:creationId xmlns:a16="http://schemas.microsoft.com/office/drawing/2014/main" id="{E4FC8449-4C6D-7B9D-5CCE-DC484013C15B}"/>
               </a:ext>
             </a:extLst>
           </p:cNvPr>
@@ -5841,7 +5841,7 @@
           <p:cNvPr id="4" name="Stern: 5 Zacken 3">
             <a:extLst>
               <a:ext uri="{FF2B5EF4-FFF2-40B4-BE49-F238E27FC236}">
-                <a16:creationId xmlns:a16="http://schemas.microsoft.com/office/drawing/2014/main" id="{13AE2B34-A1F4-4275-03A6-B60B29C92043}"/>
+                <a16:creationId xmlns:a16="http://schemas.microsoft.com/office/drawing/2014/main" id="{870DF7A9-A732-C1FB-3DEF-98684255AC0F}"/>
               </a:ext>
             </a:extLst>
           </p:cNvPr>
@@ -5895,7 +5895,7 @@
           <p:cNvPr id="5" name="Ellipse 4">
             <a:extLst>
               <a:ext uri="{FF2B5EF4-FFF2-40B4-BE49-F238E27FC236}">
-                <a16:creationId xmlns:a16="http://schemas.microsoft.com/office/drawing/2014/main" id="{0DE97EB9-47D8-5C89-F5F2-4516CFFA3D73}"/>
+                <a16:creationId xmlns:a16="http://schemas.microsoft.com/office/drawing/2014/main" id="{BBE7681E-D60C-8291-AC4D-DB746B84E01C}"/>
               </a:ext>
             </a:extLst>
           </p:cNvPr>
@@ -5949,7 +5949,7 @@
           <p:cNvPr id="6" name="Stern: 5 Zacken 5">
             <a:extLst>
               <a:ext uri="{FF2B5EF4-FFF2-40B4-BE49-F238E27FC236}">
-                <a16:creationId xmlns:a16="http://schemas.microsoft.com/office/drawing/2014/main" id="{8F5CE69A-8F8C-ECA3-C5A6-2CD530465CC2}"/>
+                <a16:creationId xmlns:a16="http://schemas.microsoft.com/office/drawing/2014/main" id="{6E2E5C61-4426-C17A-38E0-51679D801380}"/>
               </a:ext>
             </a:extLst>
           </p:cNvPr>
@@ -6003,7 +6003,7 @@
           <p:cNvPr id="7" name="Ellipse 6">
             <a:extLst>
               <a:ext uri="{FF2B5EF4-FFF2-40B4-BE49-F238E27FC236}">
-                <a16:creationId xmlns:a16="http://schemas.microsoft.com/office/drawing/2014/main" id="{8C2DF41B-E07F-EDAE-11DF-9786FDBE7892}"/>
+                <a16:creationId xmlns:a16="http://schemas.microsoft.com/office/drawing/2014/main" id="{8AD8A916-33CD-86F9-3F0C-8C1EDA0CEEE3}"/>
               </a:ext>
             </a:extLst>
           </p:cNvPr>
@@ -6055,7 +6055,7 @@
     </p:spTree>
     <p:extLst>
       <p:ext uri="{BB962C8B-B14F-4D97-AF65-F5344CB8AC3E}">
-        <p14:creationId xmlns:p14="http://schemas.microsoft.com/office/powerpoint/2010/main" val="74599966"/>
+        <p14:creationId xmlns:p14="http://schemas.microsoft.com/office/powerpoint/2010/main" val="1567792185"/>
       </p:ext>
     </p:extLst>
   </p:cSld>

--- a/tests/corpus/pptx/generated/lines.pptx
+++ b/tests/corpus/pptx/generated/lines.pptx
@@ -131,7 +131,7 @@
           <p:cNvPr id="2" name="Titel 1">
             <a:extLst>
               <a:ext uri="{FF2B5EF4-FFF2-40B4-BE49-F238E27FC236}">
-                <a16:creationId xmlns:a16="http://schemas.microsoft.com/office/drawing/2014/main" id="{E0C90C23-F114-9007-8C73-E9957B41D44B}"/>
+                <a16:creationId xmlns:a16="http://schemas.microsoft.com/office/drawing/2014/main" id="{7A7C520A-140C-29EB-8F95-0F05054B6166}"/>
               </a:ext>
             </a:extLst>
           </p:cNvPr>
@@ -168,7 +168,7 @@
           <p:cNvPr id="3" name="Untertitel 2">
             <a:extLst>
               <a:ext uri="{FF2B5EF4-FFF2-40B4-BE49-F238E27FC236}">
-                <a16:creationId xmlns:a16="http://schemas.microsoft.com/office/drawing/2014/main" id="{5525753C-03CD-C097-A460-8139D7DA0B7D}"/>
+                <a16:creationId xmlns:a16="http://schemas.microsoft.com/office/drawing/2014/main" id="{3D005E85-FD95-CC12-CC8A-E61513E91FD5}"/>
               </a:ext>
             </a:extLst>
           </p:cNvPr>
@@ -238,7 +238,7 @@
           <p:cNvPr id="4" name="Datumsplatzhalter 3">
             <a:extLst>
               <a:ext uri="{FF2B5EF4-FFF2-40B4-BE49-F238E27FC236}">
-                <a16:creationId xmlns:a16="http://schemas.microsoft.com/office/drawing/2014/main" id="{44232DE2-55CE-33C2-D6DE-A85381F9BBD2}"/>
+                <a16:creationId xmlns:a16="http://schemas.microsoft.com/office/drawing/2014/main" id="{9EEEE114-24EA-460D-5A00-1A14BBC41F34}"/>
               </a:ext>
             </a:extLst>
           </p:cNvPr>
@@ -254,7 +254,7 @@
           <a:bodyPr/>
           <a:lstStyle/>
           <a:p>
-            <a:fld id="{CBD3FF2F-EDBE-492A-A584-95FBA04BCDF8}" type="datetimeFigureOut">
+            <a:fld id="{96617B50-F960-4036-8841-4A0CCC737E93}" type="datetimeFigureOut">
               <a:rPr lang="de-DE" smtClean="0"/>
               <a:t>08.10.2026</a:t>
             </a:fld>
@@ -267,7 +267,7 @@
           <p:cNvPr id="5" name="Fußzeilenplatzhalter 4">
             <a:extLst>
               <a:ext uri="{FF2B5EF4-FFF2-40B4-BE49-F238E27FC236}">
-                <a16:creationId xmlns:a16="http://schemas.microsoft.com/office/drawing/2014/main" id="{0E87EFEE-D893-EA36-E98B-42BD0C80AAAE}"/>
+                <a16:creationId xmlns:a16="http://schemas.microsoft.com/office/drawing/2014/main" id="{CCF06114-54CB-2B8E-285D-7815463EDF25}"/>
               </a:ext>
             </a:extLst>
           </p:cNvPr>
@@ -292,7 +292,7 @@
           <p:cNvPr id="6" name="Foliennummernplatzhalter 5">
             <a:extLst>
               <a:ext uri="{FF2B5EF4-FFF2-40B4-BE49-F238E27FC236}">
-                <a16:creationId xmlns:a16="http://schemas.microsoft.com/office/drawing/2014/main" id="{F18733E9-5D64-E360-4470-80EB447D6DA3}"/>
+                <a16:creationId xmlns:a16="http://schemas.microsoft.com/office/drawing/2014/main" id="{3D0FF3B6-7001-7740-5C50-B3E4FB48C32A}"/>
               </a:ext>
             </a:extLst>
           </p:cNvPr>
@@ -308,7 +308,7 @@
           <a:bodyPr/>
           <a:lstStyle/>
           <a:p>
-            <a:fld id="{75777C61-E1AF-4C89-9528-70FBF0304E59}" type="slidenum">
+            <a:fld id="{697172D1-5880-471A-B115-A902ED1779B8}" type="slidenum">
               <a:rPr lang="de-DE" smtClean="0"/>
               <a:t>‹Nr.›</a:t>
             </a:fld>
@@ -319,7 +319,7 @@
     </p:spTree>
     <p:extLst>
       <p:ext uri="{BB962C8B-B14F-4D97-AF65-F5344CB8AC3E}">
-        <p14:creationId xmlns:p14="http://schemas.microsoft.com/office/powerpoint/2010/main" val="279641927"/>
+        <p14:creationId xmlns:p14="http://schemas.microsoft.com/office/powerpoint/2010/main" val="3719796051"/>
       </p:ext>
     </p:extLst>
   </p:cSld>
@@ -351,7 +351,7 @@
           <p:cNvPr id="2" name="Titel 1">
             <a:extLst>
               <a:ext uri="{FF2B5EF4-FFF2-40B4-BE49-F238E27FC236}">
-                <a16:creationId xmlns:a16="http://schemas.microsoft.com/office/drawing/2014/main" id="{A5D9A3CE-B16A-51A4-8B4C-890493DF181D}"/>
+                <a16:creationId xmlns:a16="http://schemas.microsoft.com/office/drawing/2014/main" id="{BA452C29-042B-81D1-79CC-98264EFF0BB3}"/>
               </a:ext>
             </a:extLst>
           </p:cNvPr>
@@ -379,7 +379,7 @@
           <p:cNvPr id="3" name="Vertikaler Textplatzhalter 2">
             <a:extLst>
               <a:ext uri="{FF2B5EF4-FFF2-40B4-BE49-F238E27FC236}">
-                <a16:creationId xmlns:a16="http://schemas.microsoft.com/office/drawing/2014/main" id="{BA7AA913-7ECE-C745-175B-C349A9CFEDB2}"/>
+                <a16:creationId xmlns:a16="http://schemas.microsoft.com/office/drawing/2014/main" id="{64E06DC3-C84C-F3B2-D617-60D1C53F6564}"/>
               </a:ext>
             </a:extLst>
           </p:cNvPr>
@@ -436,7 +436,7 @@
           <p:cNvPr id="4" name="Datumsplatzhalter 3">
             <a:extLst>
               <a:ext uri="{FF2B5EF4-FFF2-40B4-BE49-F238E27FC236}">
-                <a16:creationId xmlns:a16="http://schemas.microsoft.com/office/drawing/2014/main" id="{06C6D953-6323-C195-347A-2742DF111B04}"/>
+                <a16:creationId xmlns:a16="http://schemas.microsoft.com/office/drawing/2014/main" id="{E9711CFB-FD35-05AF-2BE9-AC5CAA65599C}"/>
               </a:ext>
             </a:extLst>
           </p:cNvPr>
@@ -452,7 +452,7 @@
           <a:bodyPr/>
           <a:lstStyle/>
           <a:p>
-            <a:fld id="{CBD3FF2F-EDBE-492A-A584-95FBA04BCDF8}" type="datetimeFigureOut">
+            <a:fld id="{96617B50-F960-4036-8841-4A0CCC737E93}" type="datetimeFigureOut">
               <a:rPr lang="de-DE" smtClean="0"/>
               <a:t>08.10.2026</a:t>
             </a:fld>
@@ -465,7 +465,7 @@
           <p:cNvPr id="5" name="Fußzeilenplatzhalter 4">
             <a:extLst>
               <a:ext uri="{FF2B5EF4-FFF2-40B4-BE49-F238E27FC236}">
-                <a16:creationId xmlns:a16="http://schemas.microsoft.com/office/drawing/2014/main" id="{73770055-D5CF-C98E-D804-8DF7B52A81EA}"/>
+                <a16:creationId xmlns:a16="http://schemas.microsoft.com/office/drawing/2014/main" id="{1562DE19-0F79-C003-C3B5-915F2CE55143}"/>
               </a:ext>
             </a:extLst>
           </p:cNvPr>
@@ -490,7 +490,7 @@
           <p:cNvPr id="6" name="Foliennummernplatzhalter 5">
             <a:extLst>
               <a:ext uri="{FF2B5EF4-FFF2-40B4-BE49-F238E27FC236}">
-                <a16:creationId xmlns:a16="http://schemas.microsoft.com/office/drawing/2014/main" id="{A75E3BB0-18BE-60F3-5F92-D088E99B5385}"/>
+                <a16:creationId xmlns:a16="http://schemas.microsoft.com/office/drawing/2014/main" id="{710C9288-B8F7-61EF-130C-F0B51B86CB02}"/>
               </a:ext>
             </a:extLst>
           </p:cNvPr>
@@ -506,7 +506,7 @@
           <a:bodyPr/>
           <a:lstStyle/>
           <a:p>
-            <a:fld id="{75777C61-E1AF-4C89-9528-70FBF0304E59}" type="slidenum">
+            <a:fld id="{697172D1-5880-471A-B115-A902ED1779B8}" type="slidenum">
               <a:rPr lang="de-DE" smtClean="0"/>
               <a:t>‹Nr.›</a:t>
             </a:fld>
@@ -517,7 +517,7 @@
     </p:spTree>
     <p:extLst>
       <p:ext uri="{BB962C8B-B14F-4D97-AF65-F5344CB8AC3E}">
-        <p14:creationId xmlns:p14="http://schemas.microsoft.com/office/powerpoint/2010/main" val="3276535825"/>
+        <p14:creationId xmlns:p14="http://schemas.microsoft.com/office/powerpoint/2010/main" val="4018094380"/>
       </p:ext>
     </p:extLst>
   </p:cSld>
@@ -549,7 +549,7 @@
           <p:cNvPr id="2" name="Vertikaler Titel 1">
             <a:extLst>
               <a:ext uri="{FF2B5EF4-FFF2-40B4-BE49-F238E27FC236}">
-                <a16:creationId xmlns:a16="http://schemas.microsoft.com/office/drawing/2014/main" id="{0394CFEE-F34E-364E-730C-0A7F79B4FC57}"/>
+                <a16:creationId xmlns:a16="http://schemas.microsoft.com/office/drawing/2014/main" id="{26CBB5CD-7F42-4E25-714A-64D360C9B59E}"/>
               </a:ext>
             </a:extLst>
           </p:cNvPr>
@@ -582,7 +582,7 @@
           <p:cNvPr id="3" name="Vertikaler Textplatzhalter 2">
             <a:extLst>
               <a:ext uri="{FF2B5EF4-FFF2-40B4-BE49-F238E27FC236}">
-                <a16:creationId xmlns:a16="http://schemas.microsoft.com/office/drawing/2014/main" id="{C2D78D98-F143-7DE2-3D84-F0EDDB22F6CE}"/>
+                <a16:creationId xmlns:a16="http://schemas.microsoft.com/office/drawing/2014/main" id="{C0FB1BED-86F1-7C2D-AF13-38B738BA8AE9}"/>
               </a:ext>
             </a:extLst>
           </p:cNvPr>
@@ -644,7 +644,7 @@
           <p:cNvPr id="4" name="Datumsplatzhalter 3">
             <a:extLst>
               <a:ext uri="{FF2B5EF4-FFF2-40B4-BE49-F238E27FC236}">
-                <a16:creationId xmlns:a16="http://schemas.microsoft.com/office/drawing/2014/main" id="{9DF4E1F4-3F91-7AB3-FDD3-F5A09F74A97B}"/>
+                <a16:creationId xmlns:a16="http://schemas.microsoft.com/office/drawing/2014/main" id="{8FFC220C-9778-6C66-844F-3EBEFEDF7693}"/>
               </a:ext>
             </a:extLst>
           </p:cNvPr>
@@ -660,7 +660,7 @@
           <a:bodyPr/>
           <a:lstStyle/>
           <a:p>
-            <a:fld id="{CBD3FF2F-EDBE-492A-A584-95FBA04BCDF8}" type="datetimeFigureOut">
+            <a:fld id="{96617B50-F960-4036-8841-4A0CCC737E93}" type="datetimeFigureOut">
               <a:rPr lang="de-DE" smtClean="0"/>
               <a:t>08.10.2026</a:t>
             </a:fld>
@@ -673,7 +673,7 @@
           <p:cNvPr id="5" name="Fußzeilenplatzhalter 4">
             <a:extLst>
               <a:ext uri="{FF2B5EF4-FFF2-40B4-BE49-F238E27FC236}">
-                <a16:creationId xmlns:a16="http://schemas.microsoft.com/office/drawing/2014/main" id="{90DB3A79-5917-FBAB-640B-DF6F80A8B475}"/>
+                <a16:creationId xmlns:a16="http://schemas.microsoft.com/office/drawing/2014/main" id="{A4318D4B-101A-1A40-7462-B8C34268F5F8}"/>
               </a:ext>
             </a:extLst>
           </p:cNvPr>
@@ -698,7 +698,7 @@
           <p:cNvPr id="6" name="Foliennummernplatzhalter 5">
             <a:extLst>
               <a:ext uri="{FF2B5EF4-FFF2-40B4-BE49-F238E27FC236}">
-                <a16:creationId xmlns:a16="http://schemas.microsoft.com/office/drawing/2014/main" id="{F1AB8219-0C16-514A-9C15-62E8ADBE0727}"/>
+                <a16:creationId xmlns:a16="http://schemas.microsoft.com/office/drawing/2014/main" id="{F0FCE3F9-B820-D018-2E02-B011CF9CD0DE}"/>
               </a:ext>
             </a:extLst>
           </p:cNvPr>
@@ -714,7 +714,7 @@
           <a:bodyPr/>
           <a:lstStyle/>
           <a:p>
-            <a:fld id="{75777C61-E1AF-4C89-9528-70FBF0304E59}" type="slidenum">
+            <a:fld id="{697172D1-5880-471A-B115-A902ED1779B8}" type="slidenum">
               <a:rPr lang="de-DE" smtClean="0"/>
               <a:t>‹Nr.›</a:t>
             </a:fld>
@@ -725,7 +725,7 @@
     </p:spTree>
     <p:extLst>
       <p:ext uri="{BB962C8B-B14F-4D97-AF65-F5344CB8AC3E}">
-        <p14:creationId xmlns:p14="http://schemas.microsoft.com/office/powerpoint/2010/main" val="382509123"/>
+        <p14:creationId xmlns:p14="http://schemas.microsoft.com/office/powerpoint/2010/main" val="882090055"/>
       </p:ext>
     </p:extLst>
   </p:cSld>
@@ -757,7 +757,7 @@
           <p:cNvPr id="2" name="Titel 1">
             <a:extLst>
               <a:ext uri="{FF2B5EF4-FFF2-40B4-BE49-F238E27FC236}">
-                <a16:creationId xmlns:a16="http://schemas.microsoft.com/office/drawing/2014/main" id="{4B18056D-B345-1EDB-FF61-6D78B0854A57}"/>
+                <a16:creationId xmlns:a16="http://schemas.microsoft.com/office/drawing/2014/main" id="{A47FBCFA-984C-63BD-3803-DD318CC1BED5}"/>
               </a:ext>
             </a:extLst>
           </p:cNvPr>
@@ -785,7 +785,7 @@
           <p:cNvPr id="3" name="Inhaltsplatzhalter 2">
             <a:extLst>
               <a:ext uri="{FF2B5EF4-FFF2-40B4-BE49-F238E27FC236}">
-                <a16:creationId xmlns:a16="http://schemas.microsoft.com/office/drawing/2014/main" id="{32A1DE60-D9DF-B292-80B6-1D2BF1A97045}"/>
+                <a16:creationId xmlns:a16="http://schemas.microsoft.com/office/drawing/2014/main" id="{F7EE2DC0-983A-C75B-B23B-23BD9E99683E}"/>
               </a:ext>
             </a:extLst>
           </p:cNvPr>
@@ -842,7 +842,7 @@
           <p:cNvPr id="4" name="Datumsplatzhalter 3">
             <a:extLst>
               <a:ext uri="{FF2B5EF4-FFF2-40B4-BE49-F238E27FC236}">
-                <a16:creationId xmlns:a16="http://schemas.microsoft.com/office/drawing/2014/main" id="{D551976C-F325-6AA3-500F-6CBAF3F2B9D7}"/>
+                <a16:creationId xmlns:a16="http://schemas.microsoft.com/office/drawing/2014/main" id="{8950EECB-92B0-D07E-7963-8C49A5895FD2}"/>
               </a:ext>
             </a:extLst>
           </p:cNvPr>
@@ -858,7 +858,7 @@
           <a:bodyPr/>
           <a:lstStyle/>
           <a:p>
-            <a:fld id="{CBD3FF2F-EDBE-492A-A584-95FBA04BCDF8}" type="datetimeFigureOut">
+            <a:fld id="{96617B50-F960-4036-8841-4A0CCC737E93}" type="datetimeFigureOut">
               <a:rPr lang="de-DE" smtClean="0"/>
               <a:t>08.10.2026</a:t>
             </a:fld>
@@ -871,7 +871,7 @@
           <p:cNvPr id="5" name="Fußzeilenplatzhalter 4">
             <a:extLst>
               <a:ext uri="{FF2B5EF4-FFF2-40B4-BE49-F238E27FC236}">
-                <a16:creationId xmlns:a16="http://schemas.microsoft.com/office/drawing/2014/main" id="{50E44259-B0D5-6B6A-B67E-20CC26C33DBB}"/>
+                <a16:creationId xmlns:a16="http://schemas.microsoft.com/office/drawing/2014/main" id="{699455A2-C506-202B-62B4-1894DBC422B4}"/>
               </a:ext>
             </a:extLst>
           </p:cNvPr>
@@ -896,7 +896,7 @@
           <p:cNvPr id="6" name="Foliennummernplatzhalter 5">
             <a:extLst>
               <a:ext uri="{FF2B5EF4-FFF2-40B4-BE49-F238E27FC236}">
-                <a16:creationId xmlns:a16="http://schemas.microsoft.com/office/drawing/2014/main" id="{17BE8AAB-98CF-DA97-D242-87A4177F6BDF}"/>
+                <a16:creationId xmlns:a16="http://schemas.microsoft.com/office/drawing/2014/main" id="{F82965C2-1C26-C4BC-27CF-7546B58FD44A}"/>
               </a:ext>
             </a:extLst>
           </p:cNvPr>
@@ -912,7 +912,7 @@
           <a:bodyPr/>
           <a:lstStyle/>
           <a:p>
-            <a:fld id="{75777C61-E1AF-4C89-9528-70FBF0304E59}" type="slidenum">
+            <a:fld id="{697172D1-5880-471A-B115-A902ED1779B8}" type="slidenum">
               <a:rPr lang="de-DE" smtClean="0"/>
               <a:t>‹Nr.›</a:t>
             </a:fld>
@@ -923,7 +923,7 @@
     </p:spTree>
     <p:extLst>
       <p:ext uri="{BB962C8B-B14F-4D97-AF65-F5344CB8AC3E}">
-        <p14:creationId xmlns:p14="http://schemas.microsoft.com/office/powerpoint/2010/main" val="863458425"/>
+        <p14:creationId xmlns:p14="http://schemas.microsoft.com/office/powerpoint/2010/main" val="2408986834"/>
       </p:ext>
     </p:extLst>
   </p:cSld>
@@ -955,7 +955,7 @@
           <p:cNvPr id="2" name="Titel 1">
             <a:extLst>
               <a:ext uri="{FF2B5EF4-FFF2-40B4-BE49-F238E27FC236}">
-                <a16:creationId xmlns:a16="http://schemas.microsoft.com/office/drawing/2014/main" id="{B24CF56F-72B8-4C86-2CD9-7A9561FFD97C}"/>
+                <a16:creationId xmlns:a16="http://schemas.microsoft.com/office/drawing/2014/main" id="{CE664BE4-B0C8-87CE-966D-0C04AB7E67B7}"/>
               </a:ext>
             </a:extLst>
           </p:cNvPr>
@@ -992,7 +992,7 @@
           <p:cNvPr id="3" name="Textplatzhalter 2">
             <a:extLst>
               <a:ext uri="{FF2B5EF4-FFF2-40B4-BE49-F238E27FC236}">
-                <a16:creationId xmlns:a16="http://schemas.microsoft.com/office/drawing/2014/main" id="{39055340-6F1A-3C22-AB05-C5AFDDD1FF2E}"/>
+                <a16:creationId xmlns:a16="http://schemas.microsoft.com/office/drawing/2014/main" id="{D6BB9A9C-851D-0397-0FE3-5667417453EE}"/>
               </a:ext>
             </a:extLst>
           </p:cNvPr>
@@ -1117,7 +1117,7 @@
           <p:cNvPr id="4" name="Datumsplatzhalter 3">
             <a:extLst>
               <a:ext uri="{FF2B5EF4-FFF2-40B4-BE49-F238E27FC236}">
-                <a16:creationId xmlns:a16="http://schemas.microsoft.com/office/drawing/2014/main" id="{FFC5D256-6B24-E1EC-A3A6-78F662CAB5D0}"/>
+                <a16:creationId xmlns:a16="http://schemas.microsoft.com/office/drawing/2014/main" id="{E9E16B5C-D7AE-470B-93DD-EC2AD9603021}"/>
               </a:ext>
             </a:extLst>
           </p:cNvPr>
@@ -1133,7 +1133,7 @@
           <a:bodyPr/>
           <a:lstStyle/>
           <a:p>
-            <a:fld id="{CBD3FF2F-EDBE-492A-A584-95FBA04BCDF8}" type="datetimeFigureOut">
+            <a:fld id="{96617B50-F960-4036-8841-4A0CCC737E93}" type="datetimeFigureOut">
               <a:rPr lang="de-DE" smtClean="0"/>
               <a:t>08.10.2026</a:t>
             </a:fld>
@@ -1146,7 +1146,7 @@
           <p:cNvPr id="5" name="Fußzeilenplatzhalter 4">
             <a:extLst>
               <a:ext uri="{FF2B5EF4-FFF2-40B4-BE49-F238E27FC236}">
-                <a16:creationId xmlns:a16="http://schemas.microsoft.com/office/drawing/2014/main" id="{7AECEBAD-4F4B-A7BA-7235-5CFE2A7C5423}"/>
+                <a16:creationId xmlns:a16="http://schemas.microsoft.com/office/drawing/2014/main" id="{027967B8-0C1A-8D31-BCD1-06B29FD6A70A}"/>
               </a:ext>
             </a:extLst>
           </p:cNvPr>
@@ -1171,7 +1171,7 @@
           <p:cNvPr id="6" name="Foliennummernplatzhalter 5">
             <a:extLst>
               <a:ext uri="{FF2B5EF4-FFF2-40B4-BE49-F238E27FC236}">
-                <a16:creationId xmlns:a16="http://schemas.microsoft.com/office/drawing/2014/main" id="{71866269-0CC5-7417-0A41-ACA5C0E884BC}"/>
+                <a16:creationId xmlns:a16="http://schemas.microsoft.com/office/drawing/2014/main" id="{ADA248DA-E8AE-85EE-4178-E6507B803C52}"/>
               </a:ext>
             </a:extLst>
           </p:cNvPr>
@@ -1187,7 +1187,7 @@
           <a:bodyPr/>
           <a:lstStyle/>
           <a:p>
-            <a:fld id="{75777C61-E1AF-4C89-9528-70FBF0304E59}" type="slidenum">
+            <a:fld id="{697172D1-5880-471A-B115-A902ED1779B8}" type="slidenum">
               <a:rPr lang="de-DE" smtClean="0"/>
               <a:t>‹Nr.›</a:t>
             </a:fld>
@@ -1198,7 +1198,7 @@
     </p:spTree>
     <p:extLst>
       <p:ext uri="{BB962C8B-B14F-4D97-AF65-F5344CB8AC3E}">
-        <p14:creationId xmlns:p14="http://schemas.microsoft.com/office/powerpoint/2010/main" val="2266752513"/>
+        <p14:creationId xmlns:p14="http://schemas.microsoft.com/office/powerpoint/2010/main" val="3267963963"/>
       </p:ext>
     </p:extLst>
   </p:cSld>
@@ -1230,7 +1230,7 @@
           <p:cNvPr id="2" name="Titel 1">
             <a:extLst>
               <a:ext uri="{FF2B5EF4-FFF2-40B4-BE49-F238E27FC236}">
-                <a16:creationId xmlns:a16="http://schemas.microsoft.com/office/drawing/2014/main" id="{AC363C27-E4CA-9ABE-7211-315ABD2DA5BD}"/>
+                <a16:creationId xmlns:a16="http://schemas.microsoft.com/office/drawing/2014/main" id="{26A5DB07-04C0-00BD-C905-EB20FF05A085}"/>
               </a:ext>
             </a:extLst>
           </p:cNvPr>
@@ -1258,7 +1258,7 @@
           <p:cNvPr id="3" name="Inhaltsplatzhalter 2">
             <a:extLst>
               <a:ext uri="{FF2B5EF4-FFF2-40B4-BE49-F238E27FC236}">
-                <a16:creationId xmlns:a16="http://schemas.microsoft.com/office/drawing/2014/main" id="{AFD43311-7437-58F8-0676-6CC9F5A4227C}"/>
+                <a16:creationId xmlns:a16="http://schemas.microsoft.com/office/drawing/2014/main" id="{6FB32945-9E24-45B1-54CA-B4356D6D2F51}"/>
               </a:ext>
             </a:extLst>
           </p:cNvPr>
@@ -1320,7 +1320,7 @@
           <p:cNvPr id="4" name="Inhaltsplatzhalter 3">
             <a:extLst>
               <a:ext uri="{FF2B5EF4-FFF2-40B4-BE49-F238E27FC236}">
-                <a16:creationId xmlns:a16="http://schemas.microsoft.com/office/drawing/2014/main" id="{921A3414-E362-E8C2-9C14-2B92EA2BA820}"/>
+                <a16:creationId xmlns:a16="http://schemas.microsoft.com/office/drawing/2014/main" id="{27FBABEC-1D0E-95E6-FAA1-FE63A77610DF}"/>
               </a:ext>
             </a:extLst>
           </p:cNvPr>
@@ -1382,7 +1382,7 @@
           <p:cNvPr id="5" name="Datumsplatzhalter 4">
             <a:extLst>
               <a:ext uri="{FF2B5EF4-FFF2-40B4-BE49-F238E27FC236}">
-                <a16:creationId xmlns:a16="http://schemas.microsoft.com/office/drawing/2014/main" id="{8BFED03C-4EC2-BDA8-DCCB-3DCCEDFC4841}"/>
+                <a16:creationId xmlns:a16="http://schemas.microsoft.com/office/drawing/2014/main" id="{15B01055-0261-6F7B-8C40-F875903FD155}"/>
               </a:ext>
             </a:extLst>
           </p:cNvPr>
@@ -1398,7 +1398,7 @@
           <a:bodyPr/>
           <a:lstStyle/>
           <a:p>
-            <a:fld id="{CBD3FF2F-EDBE-492A-A584-95FBA04BCDF8}" type="datetimeFigureOut">
+            <a:fld id="{96617B50-F960-4036-8841-4A0CCC737E93}" type="datetimeFigureOut">
               <a:rPr lang="de-DE" smtClean="0"/>
               <a:t>08.10.2026</a:t>
             </a:fld>
@@ -1411,7 +1411,7 @@
           <p:cNvPr id="6" name="Fußzeilenplatzhalter 5">
             <a:extLst>
               <a:ext uri="{FF2B5EF4-FFF2-40B4-BE49-F238E27FC236}">
-                <a16:creationId xmlns:a16="http://schemas.microsoft.com/office/drawing/2014/main" id="{B65D5B2A-83F1-EA7A-94BB-4BE804D37EF3}"/>
+                <a16:creationId xmlns:a16="http://schemas.microsoft.com/office/drawing/2014/main" id="{52F258B0-BFCB-DB65-4799-828868F3657A}"/>
               </a:ext>
             </a:extLst>
           </p:cNvPr>
@@ -1436,7 +1436,7 @@
           <p:cNvPr id="7" name="Foliennummernplatzhalter 6">
             <a:extLst>
               <a:ext uri="{FF2B5EF4-FFF2-40B4-BE49-F238E27FC236}">
-                <a16:creationId xmlns:a16="http://schemas.microsoft.com/office/drawing/2014/main" id="{A495C6BB-EE60-ED6B-D7FA-028E16C9CEA3}"/>
+                <a16:creationId xmlns:a16="http://schemas.microsoft.com/office/drawing/2014/main" id="{F754F82C-8377-7DF2-3402-835BBA21B45C}"/>
               </a:ext>
             </a:extLst>
           </p:cNvPr>
@@ -1452,7 +1452,7 @@
           <a:bodyPr/>
           <a:lstStyle/>
           <a:p>
-            <a:fld id="{75777C61-E1AF-4C89-9528-70FBF0304E59}" type="slidenum">
+            <a:fld id="{697172D1-5880-471A-B115-A902ED1779B8}" type="slidenum">
               <a:rPr lang="de-DE" smtClean="0"/>
               <a:t>‹Nr.›</a:t>
             </a:fld>
@@ -1463,7 +1463,7 @@
     </p:spTree>
     <p:extLst>
       <p:ext uri="{BB962C8B-B14F-4D97-AF65-F5344CB8AC3E}">
-        <p14:creationId xmlns:p14="http://schemas.microsoft.com/office/powerpoint/2010/main" val="9107492"/>
+        <p14:creationId xmlns:p14="http://schemas.microsoft.com/office/powerpoint/2010/main" val="2763430856"/>
       </p:ext>
     </p:extLst>
   </p:cSld>
@@ -1495,7 +1495,7 @@
           <p:cNvPr id="2" name="Titel 1">
             <a:extLst>
               <a:ext uri="{FF2B5EF4-FFF2-40B4-BE49-F238E27FC236}">
-                <a16:creationId xmlns:a16="http://schemas.microsoft.com/office/drawing/2014/main" id="{B3DB2E03-1554-26E9-6547-2C1706ED0211}"/>
+                <a16:creationId xmlns:a16="http://schemas.microsoft.com/office/drawing/2014/main" id="{788C05CA-A209-E8C6-04EA-CDAACD6EE2F0}"/>
               </a:ext>
             </a:extLst>
           </p:cNvPr>
@@ -1528,7 +1528,7 @@
           <p:cNvPr id="3" name="Textplatzhalter 2">
             <a:extLst>
               <a:ext uri="{FF2B5EF4-FFF2-40B4-BE49-F238E27FC236}">
-                <a16:creationId xmlns:a16="http://schemas.microsoft.com/office/drawing/2014/main" id="{B3131179-A7E5-CF23-597A-F7A3BCC4A37F}"/>
+                <a16:creationId xmlns:a16="http://schemas.microsoft.com/office/drawing/2014/main" id="{FB4D4BE5-357C-AADD-B313-887D5832FE75}"/>
               </a:ext>
             </a:extLst>
           </p:cNvPr>
@@ -1599,7 +1599,7 @@
           <p:cNvPr id="4" name="Inhaltsplatzhalter 3">
             <a:extLst>
               <a:ext uri="{FF2B5EF4-FFF2-40B4-BE49-F238E27FC236}">
-                <a16:creationId xmlns:a16="http://schemas.microsoft.com/office/drawing/2014/main" id="{46CBEB59-D300-319B-97D9-028535DA7181}"/>
+                <a16:creationId xmlns:a16="http://schemas.microsoft.com/office/drawing/2014/main" id="{061F4E1A-2F40-E2D0-7C83-050F1C35983B}"/>
               </a:ext>
             </a:extLst>
           </p:cNvPr>
@@ -1661,7 +1661,7 @@
           <p:cNvPr id="5" name="Textplatzhalter 4">
             <a:extLst>
               <a:ext uri="{FF2B5EF4-FFF2-40B4-BE49-F238E27FC236}">
-                <a16:creationId xmlns:a16="http://schemas.microsoft.com/office/drawing/2014/main" id="{3DAA9925-8A85-FA6C-EE1D-2CCA37B920C8}"/>
+                <a16:creationId xmlns:a16="http://schemas.microsoft.com/office/drawing/2014/main" id="{1BE8E0CA-C7FD-8E24-5EFB-1E2018A10356}"/>
               </a:ext>
             </a:extLst>
           </p:cNvPr>
@@ -1732,7 +1732,7 @@
           <p:cNvPr id="6" name="Inhaltsplatzhalter 5">
             <a:extLst>
               <a:ext uri="{FF2B5EF4-FFF2-40B4-BE49-F238E27FC236}">
-                <a16:creationId xmlns:a16="http://schemas.microsoft.com/office/drawing/2014/main" id="{AE76F0B8-204A-4343-CB37-1957D019F6FD}"/>
+                <a16:creationId xmlns:a16="http://schemas.microsoft.com/office/drawing/2014/main" id="{FD78EDD1-2708-226F-8814-01B537B08549}"/>
               </a:ext>
             </a:extLst>
           </p:cNvPr>
@@ -1794,7 +1794,7 @@
           <p:cNvPr id="7" name="Datumsplatzhalter 6">
             <a:extLst>
               <a:ext uri="{FF2B5EF4-FFF2-40B4-BE49-F238E27FC236}">
-                <a16:creationId xmlns:a16="http://schemas.microsoft.com/office/drawing/2014/main" id="{0FF94860-938E-CD4A-A5F1-8DE0B93AF011}"/>
+                <a16:creationId xmlns:a16="http://schemas.microsoft.com/office/drawing/2014/main" id="{A35CB7B2-0EB0-B7F0-5CA6-B210511735D1}"/>
               </a:ext>
             </a:extLst>
           </p:cNvPr>
@@ -1810,7 +1810,7 @@
           <a:bodyPr/>
           <a:lstStyle/>
           <a:p>
-            <a:fld id="{CBD3FF2F-EDBE-492A-A584-95FBA04BCDF8}" type="datetimeFigureOut">
+            <a:fld id="{96617B50-F960-4036-8841-4A0CCC737E93}" type="datetimeFigureOut">
               <a:rPr lang="de-DE" smtClean="0"/>
               <a:t>08.10.2026</a:t>
             </a:fld>
@@ -1823,7 +1823,7 @@
           <p:cNvPr id="8" name="Fußzeilenplatzhalter 7">
             <a:extLst>
               <a:ext uri="{FF2B5EF4-FFF2-40B4-BE49-F238E27FC236}">
-                <a16:creationId xmlns:a16="http://schemas.microsoft.com/office/drawing/2014/main" id="{8ACC04FD-8726-4F30-D5E1-97DF877E2840}"/>
+                <a16:creationId xmlns:a16="http://schemas.microsoft.com/office/drawing/2014/main" id="{76B7BDE3-C10E-9910-DCDD-37F103CA7025}"/>
               </a:ext>
             </a:extLst>
           </p:cNvPr>
@@ -1848,7 +1848,7 @@
           <p:cNvPr id="9" name="Foliennummernplatzhalter 8">
             <a:extLst>
               <a:ext uri="{FF2B5EF4-FFF2-40B4-BE49-F238E27FC236}">
-                <a16:creationId xmlns:a16="http://schemas.microsoft.com/office/drawing/2014/main" id="{A9A4D703-8541-F70B-021A-9499122E7D2E}"/>
+                <a16:creationId xmlns:a16="http://schemas.microsoft.com/office/drawing/2014/main" id="{D796D464-30EA-9956-B140-F7D67E0C807B}"/>
               </a:ext>
             </a:extLst>
           </p:cNvPr>
@@ -1864,7 +1864,7 @@
           <a:bodyPr/>
           <a:lstStyle/>
           <a:p>
-            <a:fld id="{75777C61-E1AF-4C89-9528-70FBF0304E59}" type="slidenum">
+            <a:fld id="{697172D1-5880-471A-B115-A902ED1779B8}" type="slidenum">
               <a:rPr lang="de-DE" smtClean="0"/>
               <a:t>‹Nr.›</a:t>
             </a:fld>
@@ -1875,7 +1875,7 @@
     </p:spTree>
     <p:extLst>
       <p:ext uri="{BB962C8B-B14F-4D97-AF65-F5344CB8AC3E}">
-        <p14:creationId xmlns:p14="http://schemas.microsoft.com/office/powerpoint/2010/main" val="4007627976"/>
+        <p14:creationId xmlns:p14="http://schemas.microsoft.com/office/powerpoint/2010/main" val="2162393813"/>
       </p:ext>
     </p:extLst>
   </p:cSld>
@@ -1907,7 +1907,7 @@
           <p:cNvPr id="2" name="Titel 1">
             <a:extLst>
               <a:ext uri="{FF2B5EF4-FFF2-40B4-BE49-F238E27FC236}">
-                <a16:creationId xmlns:a16="http://schemas.microsoft.com/office/drawing/2014/main" id="{D02635D5-3CD1-170D-1E90-098608A80AC1}"/>
+                <a16:creationId xmlns:a16="http://schemas.microsoft.com/office/drawing/2014/main" id="{47C9487E-39BE-89DB-2742-95594C7433CF}"/>
               </a:ext>
             </a:extLst>
           </p:cNvPr>
@@ -1935,7 +1935,7 @@
           <p:cNvPr id="3" name="Datumsplatzhalter 2">
             <a:extLst>
               <a:ext uri="{FF2B5EF4-FFF2-40B4-BE49-F238E27FC236}">
-                <a16:creationId xmlns:a16="http://schemas.microsoft.com/office/drawing/2014/main" id="{7B2920EA-8CE3-3C76-181B-31D21BBBD464}"/>
+                <a16:creationId xmlns:a16="http://schemas.microsoft.com/office/drawing/2014/main" id="{A22DCD6F-871C-FBA5-766C-8278CAF100F1}"/>
               </a:ext>
             </a:extLst>
           </p:cNvPr>
@@ -1951,7 +1951,7 @@
           <a:bodyPr/>
           <a:lstStyle/>
           <a:p>
-            <a:fld id="{CBD3FF2F-EDBE-492A-A584-95FBA04BCDF8}" type="datetimeFigureOut">
+            <a:fld id="{96617B50-F960-4036-8841-4A0CCC737E93}" type="datetimeFigureOut">
               <a:rPr lang="de-DE" smtClean="0"/>
               <a:t>08.10.2026</a:t>
             </a:fld>
@@ -1964,7 +1964,7 @@
           <p:cNvPr id="4" name="Fußzeilenplatzhalter 3">
             <a:extLst>
               <a:ext uri="{FF2B5EF4-FFF2-40B4-BE49-F238E27FC236}">
-                <a16:creationId xmlns:a16="http://schemas.microsoft.com/office/drawing/2014/main" id="{5426BDCB-9470-39BC-AB90-9983FC29B821}"/>
+                <a16:creationId xmlns:a16="http://schemas.microsoft.com/office/drawing/2014/main" id="{F3091E77-D433-B15E-AEC4-36AD90B51787}"/>
               </a:ext>
             </a:extLst>
           </p:cNvPr>
@@ -1989,7 +1989,7 @@
           <p:cNvPr id="5" name="Foliennummernplatzhalter 4">
             <a:extLst>
               <a:ext uri="{FF2B5EF4-FFF2-40B4-BE49-F238E27FC236}">
-                <a16:creationId xmlns:a16="http://schemas.microsoft.com/office/drawing/2014/main" id="{19BBF35D-E954-8929-CBC2-0B890C7804E1}"/>
+                <a16:creationId xmlns:a16="http://schemas.microsoft.com/office/drawing/2014/main" id="{E9DCAB97-CFEE-FCEA-07E8-992BA83841CF}"/>
               </a:ext>
             </a:extLst>
           </p:cNvPr>
@@ -2005,7 +2005,7 @@
           <a:bodyPr/>
           <a:lstStyle/>
           <a:p>
-            <a:fld id="{75777C61-E1AF-4C89-9528-70FBF0304E59}" type="slidenum">
+            <a:fld id="{697172D1-5880-471A-B115-A902ED1779B8}" type="slidenum">
               <a:rPr lang="de-DE" smtClean="0"/>
               <a:t>‹Nr.›</a:t>
             </a:fld>
@@ -2016,7 +2016,7 @@
     </p:spTree>
     <p:extLst>
       <p:ext uri="{BB962C8B-B14F-4D97-AF65-F5344CB8AC3E}">
-        <p14:creationId xmlns:p14="http://schemas.microsoft.com/office/powerpoint/2010/main" val="4044369697"/>
+        <p14:creationId xmlns:p14="http://schemas.microsoft.com/office/powerpoint/2010/main" val="2172375642"/>
       </p:ext>
     </p:extLst>
   </p:cSld>
@@ -2048,7 +2048,7 @@
           <p:cNvPr id="2" name="Datumsplatzhalter 1">
             <a:extLst>
               <a:ext uri="{FF2B5EF4-FFF2-40B4-BE49-F238E27FC236}">
-                <a16:creationId xmlns:a16="http://schemas.microsoft.com/office/drawing/2014/main" id="{17035C13-3D8A-3CCB-23F0-BCE8CAC4940B}"/>
+                <a16:creationId xmlns:a16="http://schemas.microsoft.com/office/drawing/2014/main" id="{A4B254C5-0E5C-1989-1FB0-3D95B1E41C76}"/>
               </a:ext>
             </a:extLst>
           </p:cNvPr>
@@ -2064,7 +2064,7 @@
           <a:bodyPr/>
           <a:lstStyle/>
           <a:p>
-            <a:fld id="{CBD3FF2F-EDBE-492A-A584-95FBA04BCDF8}" type="datetimeFigureOut">
+            <a:fld id="{96617B50-F960-4036-8841-4A0CCC737E93}" type="datetimeFigureOut">
               <a:rPr lang="de-DE" smtClean="0"/>
               <a:t>08.10.2026</a:t>
             </a:fld>
@@ -2077,7 +2077,7 @@
           <p:cNvPr id="3" name="Fußzeilenplatzhalter 2">
             <a:extLst>
               <a:ext uri="{FF2B5EF4-FFF2-40B4-BE49-F238E27FC236}">
-                <a16:creationId xmlns:a16="http://schemas.microsoft.com/office/drawing/2014/main" id="{2F087A95-8848-E0E2-F320-8C1950C12962}"/>
+                <a16:creationId xmlns:a16="http://schemas.microsoft.com/office/drawing/2014/main" id="{158580BE-AAB3-CD83-DA6F-250EB4B7FABE}"/>
               </a:ext>
             </a:extLst>
           </p:cNvPr>
@@ -2102,7 +2102,7 @@
           <p:cNvPr id="4" name="Foliennummernplatzhalter 3">
             <a:extLst>
               <a:ext uri="{FF2B5EF4-FFF2-40B4-BE49-F238E27FC236}">
-                <a16:creationId xmlns:a16="http://schemas.microsoft.com/office/drawing/2014/main" id="{BB1D45B1-7877-98EF-CA6C-FA10364FEFED}"/>
+                <a16:creationId xmlns:a16="http://schemas.microsoft.com/office/drawing/2014/main" id="{C159D057-4EBE-7D9F-390F-23348A5DE238}"/>
               </a:ext>
             </a:extLst>
           </p:cNvPr>
@@ -2118,7 +2118,7 @@
           <a:bodyPr/>
           <a:lstStyle/>
           <a:p>
-            <a:fld id="{75777C61-E1AF-4C89-9528-70FBF0304E59}" type="slidenum">
+            <a:fld id="{697172D1-5880-471A-B115-A902ED1779B8}" type="slidenum">
               <a:rPr lang="de-DE" smtClean="0"/>
               <a:t>‹Nr.›</a:t>
             </a:fld>
@@ -2129,7 +2129,7 @@
     </p:spTree>
     <p:extLst>
       <p:ext uri="{BB962C8B-B14F-4D97-AF65-F5344CB8AC3E}">
-        <p14:creationId xmlns:p14="http://schemas.microsoft.com/office/powerpoint/2010/main" val="2121638624"/>
+        <p14:creationId xmlns:p14="http://schemas.microsoft.com/office/powerpoint/2010/main" val="3870728119"/>
       </p:ext>
     </p:extLst>
   </p:cSld>
@@ -2161,7 +2161,7 @@
           <p:cNvPr id="2" name="Titel 1">
             <a:extLst>
               <a:ext uri="{FF2B5EF4-FFF2-40B4-BE49-F238E27FC236}">
-                <a16:creationId xmlns:a16="http://schemas.microsoft.com/office/drawing/2014/main" id="{93543388-1308-3433-DAC3-2D288DF8689D}"/>
+                <a16:creationId xmlns:a16="http://schemas.microsoft.com/office/drawing/2014/main" id="{E11E8E7B-0669-0849-00BE-C4DFB9CEA578}"/>
               </a:ext>
             </a:extLst>
           </p:cNvPr>
@@ -2198,7 +2198,7 @@
           <p:cNvPr id="3" name="Inhaltsplatzhalter 2">
             <a:extLst>
               <a:ext uri="{FF2B5EF4-FFF2-40B4-BE49-F238E27FC236}">
-                <a16:creationId xmlns:a16="http://schemas.microsoft.com/office/drawing/2014/main" id="{D7709AB0-8E2F-1DAF-C459-78217F7D4FA0}"/>
+                <a16:creationId xmlns:a16="http://schemas.microsoft.com/office/drawing/2014/main" id="{E04942F1-3B12-48F2-B09D-3F6AFB48E01B}"/>
               </a:ext>
             </a:extLst>
           </p:cNvPr>
@@ -2288,7 +2288,7 @@
           <p:cNvPr id="4" name="Textplatzhalter 3">
             <a:extLst>
               <a:ext uri="{FF2B5EF4-FFF2-40B4-BE49-F238E27FC236}">
-                <a16:creationId xmlns:a16="http://schemas.microsoft.com/office/drawing/2014/main" id="{151BFD75-AF13-F6D2-7112-073380FFE1C7}"/>
+                <a16:creationId xmlns:a16="http://schemas.microsoft.com/office/drawing/2014/main" id="{9E90207B-2D17-1D9B-046F-98480DF43DB0}"/>
               </a:ext>
             </a:extLst>
           </p:cNvPr>
@@ -2359,7 +2359,7 @@
           <p:cNvPr id="5" name="Datumsplatzhalter 4">
             <a:extLst>
               <a:ext uri="{FF2B5EF4-FFF2-40B4-BE49-F238E27FC236}">
-                <a16:creationId xmlns:a16="http://schemas.microsoft.com/office/drawing/2014/main" id="{67611CDD-48DA-8805-2525-9FB744F76F02}"/>
+                <a16:creationId xmlns:a16="http://schemas.microsoft.com/office/drawing/2014/main" id="{85C97ADE-AC04-6A9E-A294-B315BBB56B36}"/>
               </a:ext>
             </a:extLst>
           </p:cNvPr>
@@ -2375,7 +2375,7 @@
           <a:bodyPr/>
           <a:lstStyle/>
           <a:p>
-            <a:fld id="{CBD3FF2F-EDBE-492A-A584-95FBA04BCDF8}" type="datetimeFigureOut">
+            <a:fld id="{96617B50-F960-4036-8841-4A0CCC737E93}" type="datetimeFigureOut">
               <a:rPr lang="de-DE" smtClean="0"/>
               <a:t>08.10.2026</a:t>
             </a:fld>
@@ -2388,7 +2388,7 @@
           <p:cNvPr id="6" name="Fußzeilenplatzhalter 5">
             <a:extLst>
               <a:ext uri="{FF2B5EF4-FFF2-40B4-BE49-F238E27FC236}">
-                <a16:creationId xmlns:a16="http://schemas.microsoft.com/office/drawing/2014/main" id="{44E668B9-B872-C15A-B51C-852552E93B7A}"/>
+                <a16:creationId xmlns:a16="http://schemas.microsoft.com/office/drawing/2014/main" id="{24373BB5-D713-7AA5-4C7E-805DD807654C}"/>
               </a:ext>
             </a:extLst>
           </p:cNvPr>
@@ -2413,7 +2413,7 @@
           <p:cNvPr id="7" name="Foliennummernplatzhalter 6">
             <a:extLst>
               <a:ext uri="{FF2B5EF4-FFF2-40B4-BE49-F238E27FC236}">
-                <a16:creationId xmlns:a16="http://schemas.microsoft.com/office/drawing/2014/main" id="{F69878BC-B64B-C3D9-CE9E-40BD6ED20B32}"/>
+                <a16:creationId xmlns:a16="http://schemas.microsoft.com/office/drawing/2014/main" id="{E1D58A77-771A-1FCA-5EC4-C812F119F44B}"/>
               </a:ext>
             </a:extLst>
           </p:cNvPr>
@@ -2429,7 +2429,7 @@
           <a:bodyPr/>
           <a:lstStyle/>
           <a:p>
-            <a:fld id="{75777C61-E1AF-4C89-9528-70FBF0304E59}" type="slidenum">
+            <a:fld id="{697172D1-5880-471A-B115-A902ED1779B8}" type="slidenum">
               <a:rPr lang="de-DE" smtClean="0"/>
               <a:t>‹Nr.›</a:t>
             </a:fld>
@@ -2440,7 +2440,7 @@
     </p:spTree>
     <p:extLst>
       <p:ext uri="{BB962C8B-B14F-4D97-AF65-F5344CB8AC3E}">
-        <p14:creationId xmlns:p14="http://schemas.microsoft.com/office/powerpoint/2010/main" val="3985004863"/>
+        <p14:creationId xmlns:p14="http://schemas.microsoft.com/office/powerpoint/2010/main" val="1715618419"/>
       </p:ext>
     </p:extLst>
   </p:cSld>
@@ -2472,7 +2472,7 @@
           <p:cNvPr id="2" name="Titel 1">
             <a:extLst>
               <a:ext uri="{FF2B5EF4-FFF2-40B4-BE49-F238E27FC236}">
-                <a16:creationId xmlns:a16="http://schemas.microsoft.com/office/drawing/2014/main" id="{EAB6E868-B5BD-2C91-905B-D083909E854A}"/>
+                <a16:creationId xmlns:a16="http://schemas.microsoft.com/office/drawing/2014/main" id="{D2729971-2E96-380B-63F3-F953B7692EB4}"/>
               </a:ext>
             </a:extLst>
           </p:cNvPr>
@@ -2509,7 +2509,7 @@
           <p:cNvPr id="3" name="Bildplatzhalter 2">
             <a:extLst>
               <a:ext uri="{FF2B5EF4-FFF2-40B4-BE49-F238E27FC236}">
-                <a16:creationId xmlns:a16="http://schemas.microsoft.com/office/drawing/2014/main" id="{7C4E976F-A5AF-5F53-84D9-F763C8BD082D}"/>
+                <a16:creationId xmlns:a16="http://schemas.microsoft.com/office/drawing/2014/main" id="{F907AF1F-0AD0-65DC-F79C-3E315107F87A}"/>
               </a:ext>
             </a:extLst>
           </p:cNvPr>
@@ -2576,7 +2576,7 @@
           <p:cNvPr id="4" name="Textplatzhalter 3">
             <a:extLst>
               <a:ext uri="{FF2B5EF4-FFF2-40B4-BE49-F238E27FC236}">
-                <a16:creationId xmlns:a16="http://schemas.microsoft.com/office/drawing/2014/main" id="{977F8CF9-5A08-0E08-F68A-E1097794BC39}"/>
+                <a16:creationId xmlns:a16="http://schemas.microsoft.com/office/drawing/2014/main" id="{C146CD8E-ACBF-18DE-D497-E2AF54F5B376}"/>
               </a:ext>
             </a:extLst>
           </p:cNvPr>
@@ -2647,7 +2647,7 @@
           <p:cNvPr id="5" name="Datumsplatzhalter 4">
             <a:extLst>
               <a:ext uri="{FF2B5EF4-FFF2-40B4-BE49-F238E27FC236}">
-                <a16:creationId xmlns:a16="http://schemas.microsoft.com/office/drawing/2014/main" id="{29AA0C4D-3688-3C33-166F-3A56E7D83DA7}"/>
+                <a16:creationId xmlns:a16="http://schemas.microsoft.com/office/drawing/2014/main" id="{5F3CAE41-5959-E358-5064-86ABB9BDD966}"/>
               </a:ext>
             </a:extLst>
           </p:cNvPr>
@@ -2663,7 +2663,7 @@
           <a:bodyPr/>
           <a:lstStyle/>
           <a:p>
-            <a:fld id="{CBD3FF2F-EDBE-492A-A584-95FBA04BCDF8}" type="datetimeFigureOut">
+            <a:fld id="{96617B50-F960-4036-8841-4A0CCC737E93}" type="datetimeFigureOut">
               <a:rPr lang="de-DE" smtClean="0"/>
               <a:t>08.10.2026</a:t>
             </a:fld>
@@ -2676,7 +2676,7 @@
           <p:cNvPr id="6" name="Fußzeilenplatzhalter 5">
             <a:extLst>
               <a:ext uri="{FF2B5EF4-FFF2-40B4-BE49-F238E27FC236}">
-                <a16:creationId xmlns:a16="http://schemas.microsoft.com/office/drawing/2014/main" id="{F1E7E779-5B51-9C73-BF31-B65AF6B191FA}"/>
+                <a16:creationId xmlns:a16="http://schemas.microsoft.com/office/drawing/2014/main" id="{84688BD9-B4D8-F31F-B4D3-FA6CEB6DBF59}"/>
               </a:ext>
             </a:extLst>
           </p:cNvPr>
@@ -2701,7 +2701,7 @@
           <p:cNvPr id="7" name="Foliennummernplatzhalter 6">
             <a:extLst>
               <a:ext uri="{FF2B5EF4-FFF2-40B4-BE49-F238E27FC236}">
-                <a16:creationId xmlns:a16="http://schemas.microsoft.com/office/drawing/2014/main" id="{3594AB8D-0696-2872-128C-CB00C17D56B9}"/>
+                <a16:creationId xmlns:a16="http://schemas.microsoft.com/office/drawing/2014/main" id="{04600E2E-E756-AD00-B2A2-8DFBD0359D83}"/>
               </a:ext>
             </a:extLst>
           </p:cNvPr>
@@ -2717,7 +2717,7 @@
           <a:bodyPr/>
           <a:lstStyle/>
           <a:p>
-            <a:fld id="{75777C61-E1AF-4C89-9528-70FBF0304E59}" type="slidenum">
+            <a:fld id="{697172D1-5880-471A-B115-A902ED1779B8}" type="slidenum">
               <a:rPr lang="de-DE" smtClean="0"/>
               <a:t>‹Nr.›</a:t>
             </a:fld>
@@ -2728,7 +2728,7 @@
     </p:spTree>
     <p:extLst>
       <p:ext uri="{BB962C8B-B14F-4D97-AF65-F5344CB8AC3E}">
-        <p14:creationId xmlns:p14="http://schemas.microsoft.com/office/powerpoint/2010/main" val="2029704315"/>
+        <p14:creationId xmlns:p14="http://schemas.microsoft.com/office/powerpoint/2010/main" val="2256953641"/>
       </p:ext>
     </p:extLst>
   </p:cSld>
@@ -2765,7 +2765,7 @@
           <p:cNvPr id="2" name="Titelplatzhalter 1">
             <a:extLst>
               <a:ext uri="{FF2B5EF4-FFF2-40B4-BE49-F238E27FC236}">
-                <a16:creationId xmlns:a16="http://schemas.microsoft.com/office/drawing/2014/main" id="{AE811897-1257-D519-6290-361B1B0819C6}"/>
+                <a16:creationId xmlns:a16="http://schemas.microsoft.com/office/drawing/2014/main" id="{775F9FE3-D83A-F829-7F40-80457556D296}"/>
               </a:ext>
             </a:extLst>
           </p:cNvPr>
@@ -2803,7 +2803,7 @@
           <p:cNvPr id="3" name="Textplatzhalter 2">
             <a:extLst>
               <a:ext uri="{FF2B5EF4-FFF2-40B4-BE49-F238E27FC236}">
-                <a16:creationId xmlns:a16="http://schemas.microsoft.com/office/drawing/2014/main" id="{EBBD32FA-DA3D-3977-3E53-869806EA3D6E}"/>
+                <a16:creationId xmlns:a16="http://schemas.microsoft.com/office/drawing/2014/main" id="{4BFEE898-1A84-83AC-446B-9AC8C3D47CDE}"/>
               </a:ext>
             </a:extLst>
           </p:cNvPr>
@@ -2870,7 +2870,7 @@
           <p:cNvPr id="4" name="Datumsplatzhalter 3">
             <a:extLst>
               <a:ext uri="{FF2B5EF4-FFF2-40B4-BE49-F238E27FC236}">
-                <a16:creationId xmlns:a16="http://schemas.microsoft.com/office/drawing/2014/main" id="{453E2AAA-4161-844E-6555-2D3B93487A6D}"/>
+                <a16:creationId xmlns:a16="http://schemas.microsoft.com/office/drawing/2014/main" id="{86C36B49-EA24-E5F4-EAF9-669D0F7983A7}"/>
               </a:ext>
             </a:extLst>
           </p:cNvPr>
@@ -2904,7 +2904,7 @@
             </a:lvl1pPr>
           </a:lstStyle>
           <a:p>
-            <a:fld id="{CBD3FF2F-EDBE-492A-A584-95FBA04BCDF8}" type="datetimeFigureOut">
+            <a:fld id="{96617B50-F960-4036-8841-4A0CCC737E93}" type="datetimeFigureOut">
               <a:rPr lang="de-DE" smtClean="0"/>
               <a:t>08.10.2026</a:t>
             </a:fld>
@@ -2917,7 +2917,7 @@
           <p:cNvPr id="5" name="Fußzeilenplatzhalter 4">
             <a:extLst>
               <a:ext uri="{FF2B5EF4-FFF2-40B4-BE49-F238E27FC236}">
-                <a16:creationId xmlns:a16="http://schemas.microsoft.com/office/drawing/2014/main" id="{ECAE8507-419E-7B4F-9A7B-32233CAD908D}"/>
+                <a16:creationId xmlns:a16="http://schemas.microsoft.com/office/drawing/2014/main" id="{63F3E071-9493-8CCE-C524-F8E93AE36325}"/>
               </a:ext>
             </a:extLst>
           </p:cNvPr>
@@ -2960,7 +2960,7 @@
           <p:cNvPr id="6" name="Foliennummernplatzhalter 5">
             <a:extLst>
               <a:ext uri="{FF2B5EF4-FFF2-40B4-BE49-F238E27FC236}">
-                <a16:creationId xmlns:a16="http://schemas.microsoft.com/office/drawing/2014/main" id="{BAA445D5-4238-6E9E-EB46-C440AE791EA8}"/>
+                <a16:creationId xmlns:a16="http://schemas.microsoft.com/office/drawing/2014/main" id="{2CD24CC4-560C-851A-37E3-BB0B8F9D79B4}"/>
               </a:ext>
             </a:extLst>
           </p:cNvPr>
@@ -2994,7 +2994,7 @@
             </a:lvl1pPr>
           </a:lstStyle>
           <a:p>
-            <a:fld id="{75777C61-E1AF-4C89-9528-70FBF0304E59}" type="slidenum">
+            <a:fld id="{697172D1-5880-471A-B115-A902ED1779B8}" type="slidenum">
               <a:rPr lang="de-DE" smtClean="0"/>
               <a:t>‹Nr.›</a:t>
             </a:fld>
@@ -3005,7 +3005,7 @@
     </p:spTree>
     <p:extLst>
       <p:ext uri="{BB962C8B-B14F-4D97-AF65-F5344CB8AC3E}">
-        <p14:creationId xmlns:p14="http://schemas.microsoft.com/office/powerpoint/2010/main" val="1265804476"/>
+        <p14:creationId xmlns:p14="http://schemas.microsoft.com/office/powerpoint/2010/main" val="738588179"/>
       </p:ext>
     </p:extLst>
   </p:cSld>
@@ -3328,7 +3328,7 @@
           <p:cNvPr id="2" name="Gerader Verbinder 1">
             <a:extLst>
               <a:ext uri="{FF2B5EF4-FFF2-40B4-BE49-F238E27FC236}">
-                <a16:creationId xmlns:a16="http://schemas.microsoft.com/office/drawing/2014/main" id="{49E7C5EC-2317-3C2A-AEE7-AAFB24371E98}"/>
+                <a16:creationId xmlns:a16="http://schemas.microsoft.com/office/drawing/2014/main" id="{C0C18268-B3E1-2DC9-ADD8-48EFAFCEE51B}"/>
               </a:ext>
             </a:extLst>
           </p:cNvPr>
@@ -3369,7 +3369,7 @@
           <p:cNvPr id="3" name="Gerader Verbinder 2">
             <a:extLst>
               <a:ext uri="{FF2B5EF4-FFF2-40B4-BE49-F238E27FC236}">
-                <a16:creationId xmlns:a16="http://schemas.microsoft.com/office/drawing/2014/main" id="{F30A2E16-83DC-1935-0603-80F00D06DC72}"/>
+                <a16:creationId xmlns:a16="http://schemas.microsoft.com/office/drawing/2014/main" id="{6B45A5AB-9A5E-1D90-6AC6-63ACDFC08B2E}"/>
               </a:ext>
             </a:extLst>
           </p:cNvPr>
@@ -3410,7 +3410,7 @@
           <p:cNvPr id="4" name="Gerader Verbinder 3">
             <a:extLst>
               <a:ext uri="{FF2B5EF4-FFF2-40B4-BE49-F238E27FC236}">
-                <a16:creationId xmlns:a16="http://schemas.microsoft.com/office/drawing/2014/main" id="{7D7B68E0-1582-9408-9DC1-5F47C0DB3E68}"/>
+                <a16:creationId xmlns:a16="http://schemas.microsoft.com/office/drawing/2014/main" id="{C0F2656A-5F0C-AEAF-39C5-3B4F9ED28D96}"/>
               </a:ext>
             </a:extLst>
           </p:cNvPr>
@@ -3451,7 +3451,7 @@
           <p:cNvPr id="5" name="Gerader Verbinder 4">
             <a:extLst>
               <a:ext uri="{FF2B5EF4-FFF2-40B4-BE49-F238E27FC236}">
-                <a16:creationId xmlns:a16="http://schemas.microsoft.com/office/drawing/2014/main" id="{54090632-02D7-E058-B00E-68CCF3062736}"/>
+                <a16:creationId xmlns:a16="http://schemas.microsoft.com/office/drawing/2014/main" id="{E58F46CA-43C4-58C8-6717-236B2482051F}"/>
               </a:ext>
             </a:extLst>
           </p:cNvPr>
@@ -3492,7 +3492,7 @@
           <p:cNvPr id="6" name="Gerader Verbinder 5">
             <a:extLst>
               <a:ext uri="{FF2B5EF4-FFF2-40B4-BE49-F238E27FC236}">
-                <a16:creationId xmlns:a16="http://schemas.microsoft.com/office/drawing/2014/main" id="{DB892993-FEB2-8446-6B88-76815FBA4D53}"/>
+                <a16:creationId xmlns:a16="http://schemas.microsoft.com/office/drawing/2014/main" id="{B7BD3A19-19F9-D403-FF8B-0A5217142EAB}"/>
               </a:ext>
             </a:extLst>
           </p:cNvPr>
@@ -3533,7 +3533,7 @@
           <p:cNvPr id="7" name="Gerader Verbinder 6">
             <a:extLst>
               <a:ext uri="{FF2B5EF4-FFF2-40B4-BE49-F238E27FC236}">
-                <a16:creationId xmlns:a16="http://schemas.microsoft.com/office/drawing/2014/main" id="{759E7E95-47F7-3F78-0EC5-2D9DD94734AA}"/>
+                <a16:creationId xmlns:a16="http://schemas.microsoft.com/office/drawing/2014/main" id="{2FA42C11-95BA-4CEE-E3BB-27943F672734}"/>
               </a:ext>
             </a:extLst>
           </p:cNvPr>
@@ -3574,7 +3574,7 @@
           <p:cNvPr id="8" name="Gerader Verbinder 7">
             <a:extLst>
               <a:ext uri="{FF2B5EF4-FFF2-40B4-BE49-F238E27FC236}">
-                <a16:creationId xmlns:a16="http://schemas.microsoft.com/office/drawing/2014/main" id="{41D3E9EC-1AD0-0775-56D9-DAAA63F6C756}"/>
+                <a16:creationId xmlns:a16="http://schemas.microsoft.com/office/drawing/2014/main" id="{8EBD2737-57BE-F403-439A-67A23119C129}"/>
               </a:ext>
             </a:extLst>
           </p:cNvPr>
@@ -3616,7 +3616,7 @@
           <p:cNvPr id="9" name="Gerader Verbinder 8">
             <a:extLst>
               <a:ext uri="{FF2B5EF4-FFF2-40B4-BE49-F238E27FC236}">
-                <a16:creationId xmlns:a16="http://schemas.microsoft.com/office/drawing/2014/main" id="{4049EFC7-1652-77E8-EDF5-4F6289BF4630}"/>
+                <a16:creationId xmlns:a16="http://schemas.microsoft.com/office/drawing/2014/main" id="{C2856236-C832-29B4-BBEF-306B67CD69F7}"/>
               </a:ext>
             </a:extLst>
           </p:cNvPr>
@@ -3658,7 +3658,7 @@
           <p:cNvPr id="10" name="Gerader Verbinder 9">
             <a:extLst>
               <a:ext uri="{FF2B5EF4-FFF2-40B4-BE49-F238E27FC236}">
-                <a16:creationId xmlns:a16="http://schemas.microsoft.com/office/drawing/2014/main" id="{C7DF21C8-56BD-CA5B-EF56-35F6D1A0F8FF}"/>
+                <a16:creationId xmlns:a16="http://schemas.microsoft.com/office/drawing/2014/main" id="{73677D99-9607-63B4-43CB-5A86D8518462}"/>
               </a:ext>
             </a:extLst>
           </p:cNvPr>
@@ -3700,7 +3700,7 @@
           <p:cNvPr id="11" name="Gerader Verbinder 10">
             <a:extLst>
               <a:ext uri="{FF2B5EF4-FFF2-40B4-BE49-F238E27FC236}">
-                <a16:creationId xmlns:a16="http://schemas.microsoft.com/office/drawing/2014/main" id="{6CF01632-022E-2BD1-50D4-21DFD4A1877E}"/>
+                <a16:creationId xmlns:a16="http://schemas.microsoft.com/office/drawing/2014/main" id="{46AA0DCA-EB4A-86A5-0D92-BAE52FCC555A}"/>
               </a:ext>
             </a:extLst>
           </p:cNvPr>
@@ -3742,7 +3742,7 @@
           <p:cNvPr id="12" name="Gerader Verbinder 11">
             <a:extLst>
               <a:ext uri="{FF2B5EF4-FFF2-40B4-BE49-F238E27FC236}">
-                <a16:creationId xmlns:a16="http://schemas.microsoft.com/office/drawing/2014/main" id="{1AA93FE2-030A-9D23-27B3-83B90B3949D7}"/>
+                <a16:creationId xmlns:a16="http://schemas.microsoft.com/office/drawing/2014/main" id="{064120D9-7CCF-A9F7-2BDD-4B9A8085BD44}"/>
               </a:ext>
             </a:extLst>
           </p:cNvPr>
@@ -3784,7 +3784,7 @@
           <p:cNvPr id="13" name="Gerader Verbinder 12">
             <a:extLst>
               <a:ext uri="{FF2B5EF4-FFF2-40B4-BE49-F238E27FC236}">
-                <a16:creationId xmlns:a16="http://schemas.microsoft.com/office/drawing/2014/main" id="{07026AEC-402B-2210-0E61-797597BCB463}"/>
+                <a16:creationId xmlns:a16="http://schemas.microsoft.com/office/drawing/2014/main" id="{EE4D596B-E1C4-540A-16AF-FBFD300EFBE6}"/>
               </a:ext>
             </a:extLst>
           </p:cNvPr>
@@ -3826,7 +3826,7 @@
           <p:cNvPr id="14" name="Gerader Verbinder 13">
             <a:extLst>
               <a:ext uri="{FF2B5EF4-FFF2-40B4-BE49-F238E27FC236}">
-                <a16:creationId xmlns:a16="http://schemas.microsoft.com/office/drawing/2014/main" id="{AF427AE5-0469-0D94-A71E-90CA69E530F4}"/>
+                <a16:creationId xmlns:a16="http://schemas.microsoft.com/office/drawing/2014/main" id="{A5B94711-94F5-EB1C-A7E8-2161711CFE3E}"/>
               </a:ext>
             </a:extLst>
           </p:cNvPr>
@@ -3868,7 +3868,7 @@
           <p:cNvPr id="15" name="Gerader Verbinder 14">
             <a:extLst>
               <a:ext uri="{FF2B5EF4-FFF2-40B4-BE49-F238E27FC236}">
-                <a16:creationId xmlns:a16="http://schemas.microsoft.com/office/drawing/2014/main" id="{ACD1AD87-ADD4-42E2-58CF-74A9A44DE8DC}"/>
+                <a16:creationId xmlns:a16="http://schemas.microsoft.com/office/drawing/2014/main" id="{A4268785-AAD2-5F0D-14A4-75F1C14AE82D}"/>
               </a:ext>
             </a:extLst>
           </p:cNvPr>
@@ -3910,7 +3910,7 @@
           <p:cNvPr id="16" name="Gerader Verbinder 15">
             <a:extLst>
               <a:ext uri="{FF2B5EF4-FFF2-40B4-BE49-F238E27FC236}">
-                <a16:creationId xmlns:a16="http://schemas.microsoft.com/office/drawing/2014/main" id="{A772418E-F67B-F87E-463A-1255E643A700}"/>
+                <a16:creationId xmlns:a16="http://schemas.microsoft.com/office/drawing/2014/main" id="{FCD2134F-4830-4BAC-4FD8-A4468A856F56}"/>
               </a:ext>
             </a:extLst>
           </p:cNvPr>
@@ -3952,7 +3952,7 @@
           <p:cNvPr id="17" name="Gerader Verbinder 16">
             <a:extLst>
               <a:ext uri="{FF2B5EF4-FFF2-40B4-BE49-F238E27FC236}">
-                <a16:creationId xmlns:a16="http://schemas.microsoft.com/office/drawing/2014/main" id="{D082C134-620D-02A6-531B-83C5AB4081E4}"/>
+                <a16:creationId xmlns:a16="http://schemas.microsoft.com/office/drawing/2014/main" id="{F38C707C-9EB2-8FAC-CFBA-1D1E2AF035C5}"/>
               </a:ext>
             </a:extLst>
           </p:cNvPr>
@@ -3994,7 +3994,7 @@
           <p:cNvPr id="18" name="Gerader Verbinder 17">
             <a:extLst>
               <a:ext uri="{FF2B5EF4-FFF2-40B4-BE49-F238E27FC236}">
-                <a16:creationId xmlns:a16="http://schemas.microsoft.com/office/drawing/2014/main" id="{993579DD-A29C-8E58-F97B-2A15CFC93CC5}"/>
+                <a16:creationId xmlns:a16="http://schemas.microsoft.com/office/drawing/2014/main" id="{491B29AF-ABBD-F4C4-F53E-B34A51A4AFC6}"/>
               </a:ext>
             </a:extLst>
           </p:cNvPr>
@@ -4036,7 +4036,7 @@
           <p:cNvPr id="19" name="Gerader Verbinder 18">
             <a:extLst>
               <a:ext uri="{FF2B5EF4-FFF2-40B4-BE49-F238E27FC236}">
-                <a16:creationId xmlns:a16="http://schemas.microsoft.com/office/drawing/2014/main" id="{1D517B33-BD77-812D-6263-858061729176}"/>
+                <a16:creationId xmlns:a16="http://schemas.microsoft.com/office/drawing/2014/main" id="{C85DDFDC-6458-5D8E-64A8-EC5275BEB09A}"/>
               </a:ext>
             </a:extLst>
           </p:cNvPr>
@@ -4078,7 +4078,7 @@
           <p:cNvPr id="20" name="Rechteck 19">
             <a:extLst>
               <a:ext uri="{FF2B5EF4-FFF2-40B4-BE49-F238E27FC236}">
-                <a16:creationId xmlns:a16="http://schemas.microsoft.com/office/drawing/2014/main" id="{4201BCC3-E870-86AE-B42A-BCF1868FE221}"/>
+                <a16:creationId xmlns:a16="http://schemas.microsoft.com/office/drawing/2014/main" id="{931DE154-AAB9-D911-6FB5-9AE20EE46487}"/>
               </a:ext>
             </a:extLst>
           </p:cNvPr>
@@ -4142,7 +4142,7 @@
           <p:cNvPr id="21" name="Rechteck 20">
             <a:extLst>
               <a:ext uri="{FF2B5EF4-FFF2-40B4-BE49-F238E27FC236}">
-                <a16:creationId xmlns:a16="http://schemas.microsoft.com/office/drawing/2014/main" id="{F44C7C6C-1CBE-903B-23A0-9E88B8BD4EA9}"/>
+                <a16:creationId xmlns:a16="http://schemas.microsoft.com/office/drawing/2014/main" id="{278F188A-AB40-77A8-EE40-CC96D93375D8}"/>
               </a:ext>
             </a:extLst>
           </p:cNvPr>
@@ -4206,7 +4206,7 @@
           <p:cNvPr id="22" name="Rechteck 21">
             <a:extLst>
               <a:ext uri="{FF2B5EF4-FFF2-40B4-BE49-F238E27FC236}">
-                <a16:creationId xmlns:a16="http://schemas.microsoft.com/office/drawing/2014/main" id="{6EA863D3-658B-5714-E804-E8656C817ADB}"/>
+                <a16:creationId xmlns:a16="http://schemas.microsoft.com/office/drawing/2014/main" id="{3D06AFE3-B843-5ED7-8E35-46FDFEADF12B}"/>
               </a:ext>
             </a:extLst>
           </p:cNvPr>
@@ -4270,7 +4270,7 @@
           <p:cNvPr id="23" name="Rechteck 22">
             <a:extLst>
               <a:ext uri="{FF2B5EF4-FFF2-40B4-BE49-F238E27FC236}">
-                <a16:creationId xmlns:a16="http://schemas.microsoft.com/office/drawing/2014/main" id="{3E772056-4075-0ABD-B179-8FA01EB75913}"/>
+                <a16:creationId xmlns:a16="http://schemas.microsoft.com/office/drawing/2014/main" id="{A028815D-9DF0-888A-2ED4-F29E06D70E6B}"/>
               </a:ext>
             </a:extLst>
           </p:cNvPr>
@@ -4334,7 +4334,7 @@
           <p:cNvPr id="24" name="Rechteck 23">
             <a:extLst>
               <a:ext uri="{FF2B5EF4-FFF2-40B4-BE49-F238E27FC236}">
-                <a16:creationId xmlns:a16="http://schemas.microsoft.com/office/drawing/2014/main" id="{ED746A87-D6D5-0DB1-BC31-D08B4655858F}"/>
+                <a16:creationId xmlns:a16="http://schemas.microsoft.com/office/drawing/2014/main" id="{B9B841A1-B10A-776D-81DD-159A6C20038E}"/>
               </a:ext>
             </a:extLst>
           </p:cNvPr>
@@ -4396,7 +4396,7 @@
     </p:spTree>
     <p:extLst>
       <p:ext uri="{BB962C8B-B14F-4D97-AF65-F5344CB8AC3E}">
-        <p14:creationId xmlns:p14="http://schemas.microsoft.com/office/powerpoint/2010/main" val="885643468"/>
+        <p14:creationId xmlns:p14="http://schemas.microsoft.com/office/powerpoint/2010/main" val="2309847879"/>
       </p:ext>
     </p:extLst>
   </p:cSld>
@@ -4428,7 +4428,7 @@
           <p:cNvPr id="2" name="Gerader Verbinder 1">
             <a:extLst>
               <a:ext uri="{FF2B5EF4-FFF2-40B4-BE49-F238E27FC236}">
-                <a16:creationId xmlns:a16="http://schemas.microsoft.com/office/drawing/2014/main" id="{B77D4548-1E82-73A6-222B-CBB6A4E9E6A5}"/>
+                <a16:creationId xmlns:a16="http://schemas.microsoft.com/office/drawing/2014/main" id="{62F72214-AB3F-3CAD-1040-9C1E1ADED23D}"/>
               </a:ext>
             </a:extLst>
           </p:cNvPr>
@@ -4471,7 +4471,7 @@
           <p:cNvPr id="3" name="Gerader Verbinder 2">
             <a:extLst>
               <a:ext uri="{FF2B5EF4-FFF2-40B4-BE49-F238E27FC236}">
-                <a16:creationId xmlns:a16="http://schemas.microsoft.com/office/drawing/2014/main" id="{A6A764E1-12CE-8026-3192-930FE912D379}"/>
+                <a16:creationId xmlns:a16="http://schemas.microsoft.com/office/drawing/2014/main" id="{D7E449B5-8234-F26D-A3F2-444AF04E5EAE}"/>
               </a:ext>
             </a:extLst>
           </p:cNvPr>
@@ -4513,7 +4513,7 @@
           <p:cNvPr id="4" name="Gerader Verbinder 3">
             <a:extLst>
               <a:ext uri="{FF2B5EF4-FFF2-40B4-BE49-F238E27FC236}">
-                <a16:creationId xmlns:a16="http://schemas.microsoft.com/office/drawing/2014/main" id="{3712C936-CF36-5519-0222-2C61DA7F3F03}"/>
+                <a16:creationId xmlns:a16="http://schemas.microsoft.com/office/drawing/2014/main" id="{083C8E63-4D1A-B677-D788-4A1EA05C3AC3}"/>
               </a:ext>
             </a:extLst>
           </p:cNvPr>
@@ -4556,7 +4556,7 @@
           <p:cNvPr id="5" name="Gerader Verbinder 4">
             <a:extLst>
               <a:ext uri="{FF2B5EF4-FFF2-40B4-BE49-F238E27FC236}">
-                <a16:creationId xmlns:a16="http://schemas.microsoft.com/office/drawing/2014/main" id="{A046AC6F-4469-20CE-7849-6476CEEC19B3}"/>
+                <a16:creationId xmlns:a16="http://schemas.microsoft.com/office/drawing/2014/main" id="{DE675FFC-F20E-9715-2DA2-1E23CC0F3412}"/>
               </a:ext>
             </a:extLst>
           </p:cNvPr>
@@ -4598,7 +4598,7 @@
           <p:cNvPr id="6" name="Gerader Verbinder 5">
             <a:extLst>
               <a:ext uri="{FF2B5EF4-FFF2-40B4-BE49-F238E27FC236}">
-                <a16:creationId xmlns:a16="http://schemas.microsoft.com/office/drawing/2014/main" id="{8DD7119C-D5EA-54EA-B647-E09BC6939C3A}"/>
+                <a16:creationId xmlns:a16="http://schemas.microsoft.com/office/drawing/2014/main" id="{6B519410-52D4-CAD3-FD50-7AC8CA73BFC1}"/>
               </a:ext>
             </a:extLst>
           </p:cNvPr>
@@ -4641,7 +4641,7 @@
           <p:cNvPr id="7" name="Gerader Verbinder 6">
             <a:extLst>
               <a:ext uri="{FF2B5EF4-FFF2-40B4-BE49-F238E27FC236}">
-                <a16:creationId xmlns:a16="http://schemas.microsoft.com/office/drawing/2014/main" id="{D9AC4AD4-C772-F992-5991-BAE77C8DA743}"/>
+                <a16:creationId xmlns:a16="http://schemas.microsoft.com/office/drawing/2014/main" id="{10A73743-8790-C280-7972-0D30E0F64296}"/>
               </a:ext>
             </a:extLst>
           </p:cNvPr>
@@ -4683,7 +4683,7 @@
           <p:cNvPr id="8" name="Gerader Verbinder 7">
             <a:extLst>
               <a:ext uri="{FF2B5EF4-FFF2-40B4-BE49-F238E27FC236}">
-                <a16:creationId xmlns:a16="http://schemas.microsoft.com/office/drawing/2014/main" id="{4C24F773-3239-0FDD-55A5-C35A31F2D0EE}"/>
+                <a16:creationId xmlns:a16="http://schemas.microsoft.com/office/drawing/2014/main" id="{C6FEA7B9-3CD9-473C-EF09-B07B5185BBB1}"/>
               </a:ext>
             </a:extLst>
           </p:cNvPr>
@@ -4726,7 +4726,7 @@
           <p:cNvPr id="9" name="Gerader Verbinder 8">
             <a:extLst>
               <a:ext uri="{FF2B5EF4-FFF2-40B4-BE49-F238E27FC236}">
-                <a16:creationId xmlns:a16="http://schemas.microsoft.com/office/drawing/2014/main" id="{74A6B05B-A583-5388-80F5-940AF55C9257}"/>
+                <a16:creationId xmlns:a16="http://schemas.microsoft.com/office/drawing/2014/main" id="{3954EA31-005C-8232-94B1-E7803C8CD405}"/>
               </a:ext>
             </a:extLst>
           </p:cNvPr>
@@ -4768,7 +4768,7 @@
           <p:cNvPr id="10" name="Gerader Verbinder 9">
             <a:extLst>
               <a:ext uri="{FF2B5EF4-FFF2-40B4-BE49-F238E27FC236}">
-                <a16:creationId xmlns:a16="http://schemas.microsoft.com/office/drawing/2014/main" id="{5E76F395-98DD-FE0D-43AD-353D96357E2F}"/>
+                <a16:creationId xmlns:a16="http://schemas.microsoft.com/office/drawing/2014/main" id="{644CE246-F155-6AE2-070E-9F640B44D990}"/>
               </a:ext>
             </a:extLst>
           </p:cNvPr>
@@ -4811,7 +4811,7 @@
           <p:cNvPr id="11" name="Gerader Verbinder 10">
             <a:extLst>
               <a:ext uri="{FF2B5EF4-FFF2-40B4-BE49-F238E27FC236}">
-                <a16:creationId xmlns:a16="http://schemas.microsoft.com/office/drawing/2014/main" id="{94CF9875-34E4-BE04-6999-DAAA9B11043D}"/>
+                <a16:creationId xmlns:a16="http://schemas.microsoft.com/office/drawing/2014/main" id="{431521BD-6CE1-3D21-6B70-BD1DDADED69E}"/>
               </a:ext>
             </a:extLst>
           </p:cNvPr>
@@ -4853,7 +4853,7 @@
           <p:cNvPr id="12" name="Gerader Verbinder 11">
             <a:extLst>
               <a:ext uri="{FF2B5EF4-FFF2-40B4-BE49-F238E27FC236}">
-                <a16:creationId xmlns:a16="http://schemas.microsoft.com/office/drawing/2014/main" id="{B48CD332-F12F-D7D9-E172-ED055563F0CA}"/>
+                <a16:creationId xmlns:a16="http://schemas.microsoft.com/office/drawing/2014/main" id="{D8F4890A-B9DC-359E-0DF7-910E214AD67C}"/>
               </a:ext>
             </a:extLst>
           </p:cNvPr>
@@ -4896,7 +4896,7 @@
           <p:cNvPr id="13" name="Gerader Verbinder 12">
             <a:extLst>
               <a:ext uri="{FF2B5EF4-FFF2-40B4-BE49-F238E27FC236}">
-                <a16:creationId xmlns:a16="http://schemas.microsoft.com/office/drawing/2014/main" id="{AFC1690D-8473-AF9D-DC3F-61136EE75C3C}"/>
+                <a16:creationId xmlns:a16="http://schemas.microsoft.com/office/drawing/2014/main" id="{4EE39993-CAFF-B31F-E655-4F18D0795F58}"/>
               </a:ext>
             </a:extLst>
           </p:cNvPr>
@@ -4938,7 +4938,7 @@
           <p:cNvPr id="14" name="Gerader Verbinder 13">
             <a:extLst>
               <a:ext uri="{FF2B5EF4-FFF2-40B4-BE49-F238E27FC236}">
-                <a16:creationId xmlns:a16="http://schemas.microsoft.com/office/drawing/2014/main" id="{88B8B64A-27EF-907C-6ADD-52B1E285845B}"/>
+                <a16:creationId xmlns:a16="http://schemas.microsoft.com/office/drawing/2014/main" id="{2D6DF59E-EAE9-720E-DE94-647DDA35C8C8}"/>
               </a:ext>
             </a:extLst>
           </p:cNvPr>
@@ -4981,7 +4981,7 @@
           <p:cNvPr id="15" name="Gerader Verbinder 14">
             <a:extLst>
               <a:ext uri="{FF2B5EF4-FFF2-40B4-BE49-F238E27FC236}">
-                <a16:creationId xmlns:a16="http://schemas.microsoft.com/office/drawing/2014/main" id="{E369C706-2F9F-2FDD-C2FB-8867E123203A}"/>
+                <a16:creationId xmlns:a16="http://schemas.microsoft.com/office/drawing/2014/main" id="{5385B652-7195-C53B-FF23-7BE829F6D812}"/>
               </a:ext>
             </a:extLst>
           </p:cNvPr>
@@ -5023,7 +5023,7 @@
           <p:cNvPr id="16" name="Gerader Verbinder 15">
             <a:extLst>
               <a:ext uri="{FF2B5EF4-FFF2-40B4-BE49-F238E27FC236}">
-                <a16:creationId xmlns:a16="http://schemas.microsoft.com/office/drawing/2014/main" id="{3AB4DF5C-4BFB-F9EE-965B-45DF3DE2FD3B}"/>
+                <a16:creationId xmlns:a16="http://schemas.microsoft.com/office/drawing/2014/main" id="{E0A2BF6E-6C87-B782-3399-2B277E4C8A0F}"/>
               </a:ext>
             </a:extLst>
           </p:cNvPr>
@@ -5066,7 +5066,7 @@
           <p:cNvPr id="17" name="Gerader Verbinder 16">
             <a:extLst>
               <a:ext uri="{FF2B5EF4-FFF2-40B4-BE49-F238E27FC236}">
-                <a16:creationId xmlns:a16="http://schemas.microsoft.com/office/drawing/2014/main" id="{3A39F9FA-B96E-F791-ECD7-2F45F92877B6}"/>
+                <a16:creationId xmlns:a16="http://schemas.microsoft.com/office/drawing/2014/main" id="{24716FA7-017A-5675-C485-C41755122D35}"/>
               </a:ext>
             </a:extLst>
           </p:cNvPr>
@@ -5108,7 +5108,7 @@
           <p:cNvPr id="18" name="Gerader Verbinder 17">
             <a:extLst>
               <a:ext uri="{FF2B5EF4-FFF2-40B4-BE49-F238E27FC236}">
-                <a16:creationId xmlns:a16="http://schemas.microsoft.com/office/drawing/2014/main" id="{A45D65D4-AF35-EEC1-28EE-C5BAA8EF648A}"/>
+                <a16:creationId xmlns:a16="http://schemas.microsoft.com/office/drawing/2014/main" id="{C050CD63-1A34-EAF8-6147-8A0A75988D7B}"/>
               </a:ext>
             </a:extLst>
           </p:cNvPr>
@@ -5151,7 +5151,7 @@
           <p:cNvPr id="19" name="Gerader Verbinder 18">
             <a:extLst>
               <a:ext uri="{FF2B5EF4-FFF2-40B4-BE49-F238E27FC236}">
-                <a16:creationId xmlns:a16="http://schemas.microsoft.com/office/drawing/2014/main" id="{621AB8AC-2846-915C-E6DA-C5A4FF7C567E}"/>
+                <a16:creationId xmlns:a16="http://schemas.microsoft.com/office/drawing/2014/main" id="{0D2DCE91-D429-7767-ACD3-4BA347232425}"/>
               </a:ext>
             </a:extLst>
           </p:cNvPr>
@@ -5193,7 +5193,7 @@
           <p:cNvPr id="20" name="Gerader Verbinder 19">
             <a:extLst>
               <a:ext uri="{FF2B5EF4-FFF2-40B4-BE49-F238E27FC236}">
-                <a16:creationId xmlns:a16="http://schemas.microsoft.com/office/drawing/2014/main" id="{96742330-4EA5-1BFF-0CD1-38F3958DFCE7}"/>
+                <a16:creationId xmlns:a16="http://schemas.microsoft.com/office/drawing/2014/main" id="{69CACCB4-901B-277B-DC9A-726FB14110AE}"/>
               </a:ext>
             </a:extLst>
           </p:cNvPr>
@@ -5236,7 +5236,7 @@
           <p:cNvPr id="21" name="Gerader Verbinder 20">
             <a:extLst>
               <a:ext uri="{FF2B5EF4-FFF2-40B4-BE49-F238E27FC236}">
-                <a16:creationId xmlns:a16="http://schemas.microsoft.com/office/drawing/2014/main" id="{82008FDA-9B88-72DD-8AF5-78797BBB1C19}"/>
+                <a16:creationId xmlns:a16="http://schemas.microsoft.com/office/drawing/2014/main" id="{50E34DC7-AE26-485A-D4E9-C4AE6E690A5C}"/>
               </a:ext>
             </a:extLst>
           </p:cNvPr>
@@ -5278,7 +5278,7 @@
           <p:cNvPr id="22" name="Gerader Verbinder 21">
             <a:extLst>
               <a:ext uri="{FF2B5EF4-FFF2-40B4-BE49-F238E27FC236}">
-                <a16:creationId xmlns:a16="http://schemas.microsoft.com/office/drawing/2014/main" id="{E8221363-DFA6-ABC0-9340-564B53310474}"/>
+                <a16:creationId xmlns:a16="http://schemas.microsoft.com/office/drawing/2014/main" id="{D851FB9C-AC3E-DFA9-D03B-6F8484F66904}"/>
               </a:ext>
             </a:extLst>
           </p:cNvPr>
@@ -5321,7 +5321,7 @@
           <p:cNvPr id="23" name="Gerader Verbinder 22">
             <a:extLst>
               <a:ext uri="{FF2B5EF4-FFF2-40B4-BE49-F238E27FC236}">
-                <a16:creationId xmlns:a16="http://schemas.microsoft.com/office/drawing/2014/main" id="{578A7908-812B-7EB6-ECFD-B36B659C524B}"/>
+                <a16:creationId xmlns:a16="http://schemas.microsoft.com/office/drawing/2014/main" id="{1CEBEE97-1EBC-E77B-2CE1-DC260C1AAF41}"/>
               </a:ext>
             </a:extLst>
           </p:cNvPr>
@@ -5363,7 +5363,7 @@
           <p:cNvPr id="24" name="Gerader Verbinder 23">
             <a:extLst>
               <a:ext uri="{FF2B5EF4-FFF2-40B4-BE49-F238E27FC236}">
-                <a16:creationId xmlns:a16="http://schemas.microsoft.com/office/drawing/2014/main" id="{98EDD7D6-D2AE-32D2-5595-FE88B46D9EAF}"/>
+                <a16:creationId xmlns:a16="http://schemas.microsoft.com/office/drawing/2014/main" id="{A912808F-37AF-DDE7-EA61-99B8216C50EF}"/>
               </a:ext>
             </a:extLst>
           </p:cNvPr>
@@ -5406,7 +5406,7 @@
           <p:cNvPr id="25" name="Gerader Verbinder 24">
             <a:extLst>
               <a:ext uri="{FF2B5EF4-FFF2-40B4-BE49-F238E27FC236}">
-                <a16:creationId xmlns:a16="http://schemas.microsoft.com/office/drawing/2014/main" id="{2A4309AB-F75B-75A1-C7FC-57A6F55614DD}"/>
+                <a16:creationId xmlns:a16="http://schemas.microsoft.com/office/drawing/2014/main" id="{F82D7AD5-CB69-206A-F555-3A21EFE66587}"/>
               </a:ext>
             </a:extLst>
           </p:cNvPr>
@@ -5448,7 +5448,7 @@
           <p:cNvPr id="26" name="Gerader Verbinder 25">
             <a:extLst>
               <a:ext uri="{FF2B5EF4-FFF2-40B4-BE49-F238E27FC236}">
-                <a16:creationId xmlns:a16="http://schemas.microsoft.com/office/drawing/2014/main" id="{47864C06-1527-F148-5ED4-E15C77F1822F}"/>
+                <a16:creationId xmlns:a16="http://schemas.microsoft.com/office/drawing/2014/main" id="{8E5BC65A-30EB-9C89-4375-51B5F19AB7D0}"/>
               </a:ext>
             </a:extLst>
           </p:cNvPr>
@@ -5491,7 +5491,7 @@
           <p:cNvPr id="27" name="Gerader Verbinder 26">
             <a:extLst>
               <a:ext uri="{FF2B5EF4-FFF2-40B4-BE49-F238E27FC236}">
-                <a16:creationId xmlns:a16="http://schemas.microsoft.com/office/drawing/2014/main" id="{B4A20B22-21CC-BED7-E328-02DCF48BBD31}"/>
+                <a16:creationId xmlns:a16="http://schemas.microsoft.com/office/drawing/2014/main" id="{D0AFA0D1-60C6-2465-F758-EB9925F620D4}"/>
               </a:ext>
             </a:extLst>
           </p:cNvPr>
@@ -5533,7 +5533,7 @@
           <p:cNvPr id="28" name="Gerader Verbinder 27">
             <a:extLst>
               <a:ext uri="{FF2B5EF4-FFF2-40B4-BE49-F238E27FC236}">
-                <a16:creationId xmlns:a16="http://schemas.microsoft.com/office/drawing/2014/main" id="{2BCC57C7-DAAA-B875-370F-01EB3C630C9C}"/>
+                <a16:creationId xmlns:a16="http://schemas.microsoft.com/office/drawing/2014/main" id="{CABE15D5-9F61-4970-ADD7-4DC7F849ABFB}"/>
               </a:ext>
             </a:extLst>
           </p:cNvPr>
@@ -5576,7 +5576,7 @@
           <p:cNvPr id="29" name="Gerader Verbinder 28">
             <a:extLst>
               <a:ext uri="{FF2B5EF4-FFF2-40B4-BE49-F238E27FC236}">
-                <a16:creationId xmlns:a16="http://schemas.microsoft.com/office/drawing/2014/main" id="{7C09197A-875A-9122-98D2-609036FFF7C7}"/>
+                <a16:creationId xmlns:a16="http://schemas.microsoft.com/office/drawing/2014/main" id="{601B176E-5162-050E-CA91-B5974BAAE9F3}"/>
               </a:ext>
             </a:extLst>
           </p:cNvPr>
@@ -5618,7 +5618,7 @@
           <p:cNvPr id="30" name="Gerader Verbinder 29">
             <a:extLst>
               <a:ext uri="{FF2B5EF4-FFF2-40B4-BE49-F238E27FC236}">
-                <a16:creationId xmlns:a16="http://schemas.microsoft.com/office/drawing/2014/main" id="{27D76913-861C-7792-287D-C9495BEDDDB9}"/>
+                <a16:creationId xmlns:a16="http://schemas.microsoft.com/office/drawing/2014/main" id="{9809B091-DDA3-B3F3-2829-FCB96C44AFFD}"/>
               </a:ext>
             </a:extLst>
           </p:cNvPr>
@@ -5661,7 +5661,7 @@
           <p:cNvPr id="31" name="Gerader Verbinder 30">
             <a:extLst>
               <a:ext uri="{FF2B5EF4-FFF2-40B4-BE49-F238E27FC236}">
-                <a16:creationId xmlns:a16="http://schemas.microsoft.com/office/drawing/2014/main" id="{B6960849-43DD-7584-9252-0DA02A79332F}"/>
+                <a16:creationId xmlns:a16="http://schemas.microsoft.com/office/drawing/2014/main" id="{CE13A7B1-4F40-FBF7-EF14-9EAC4C76FA34}"/>
               </a:ext>
             </a:extLst>
           </p:cNvPr>
@@ -5701,7 +5701,7 @@
     </p:spTree>
     <p:extLst>
       <p:ext uri="{BB962C8B-B14F-4D97-AF65-F5344CB8AC3E}">
-        <p14:creationId xmlns:p14="http://schemas.microsoft.com/office/powerpoint/2010/main" val="1001668036"/>
+        <p14:creationId xmlns:p14="http://schemas.microsoft.com/office/powerpoint/2010/main" val="2289012805"/>
       </p:ext>
     </p:extLst>
   </p:cSld>
@@ -5733,7 +5733,7 @@
           <p:cNvPr id="2" name="Stern: 5 Zacken 1">
             <a:extLst>
               <a:ext uri="{FF2B5EF4-FFF2-40B4-BE49-F238E27FC236}">
-                <a16:creationId xmlns:a16="http://schemas.microsoft.com/office/drawing/2014/main" id="{BDC34E4E-A862-A4B2-13A6-48A1D8DA3D88}"/>
+                <a16:creationId xmlns:a16="http://schemas.microsoft.com/office/drawing/2014/main" id="{864B363A-7D05-1763-664A-105099DD6E45}"/>
               </a:ext>
             </a:extLst>
           </p:cNvPr>
@@ -5787,7 +5787,7 @@
           <p:cNvPr id="3" name="Ellipse 2">
             <a:extLst>
               <a:ext uri="{FF2B5EF4-FFF2-40B4-BE49-F238E27FC236}">
-                <a16:creationId xmlns:a16="http://schemas.microsoft.com/office/drawing/2014/main" id="{E4FC8449-4C6D-7B9D-5CCE-DC484013C15B}"/>
+                <a16:creationId xmlns:a16="http://schemas.microsoft.com/office/drawing/2014/main" id="{C247D382-C9CB-2B2B-DE82-87929E122CB5}"/>
               </a:ext>
             </a:extLst>
           </p:cNvPr>
@@ -5841,7 +5841,7 @@
           <p:cNvPr id="4" name="Stern: 5 Zacken 3">
             <a:extLst>
               <a:ext uri="{FF2B5EF4-FFF2-40B4-BE49-F238E27FC236}">
-                <a16:creationId xmlns:a16="http://schemas.microsoft.com/office/drawing/2014/main" id="{870DF7A9-A732-C1FB-3DEF-98684255AC0F}"/>
+                <a16:creationId xmlns:a16="http://schemas.microsoft.com/office/drawing/2014/main" id="{C19DF971-BF13-6928-94B1-01EEF8B93126}"/>
               </a:ext>
             </a:extLst>
           </p:cNvPr>
@@ -5895,7 +5895,7 @@
           <p:cNvPr id="5" name="Ellipse 4">
             <a:extLst>
               <a:ext uri="{FF2B5EF4-FFF2-40B4-BE49-F238E27FC236}">
-                <a16:creationId xmlns:a16="http://schemas.microsoft.com/office/drawing/2014/main" id="{BBE7681E-D60C-8291-AC4D-DB746B84E01C}"/>
+                <a16:creationId xmlns:a16="http://schemas.microsoft.com/office/drawing/2014/main" id="{A4C8415F-6D86-269E-134B-8D68873AB693}"/>
               </a:ext>
             </a:extLst>
           </p:cNvPr>
@@ -5949,7 +5949,7 @@
           <p:cNvPr id="6" name="Stern: 5 Zacken 5">
             <a:extLst>
               <a:ext uri="{FF2B5EF4-FFF2-40B4-BE49-F238E27FC236}">
-                <a16:creationId xmlns:a16="http://schemas.microsoft.com/office/drawing/2014/main" id="{6E2E5C61-4426-C17A-38E0-51679D801380}"/>
+                <a16:creationId xmlns:a16="http://schemas.microsoft.com/office/drawing/2014/main" id="{D6193DE7-4031-FCB4-010A-B344C737C3B7}"/>
               </a:ext>
             </a:extLst>
           </p:cNvPr>
@@ -6003,7 +6003,7 @@
           <p:cNvPr id="7" name="Ellipse 6">
             <a:extLst>
               <a:ext uri="{FF2B5EF4-FFF2-40B4-BE49-F238E27FC236}">
-                <a16:creationId xmlns:a16="http://schemas.microsoft.com/office/drawing/2014/main" id="{8AD8A916-33CD-86F9-3F0C-8C1EDA0CEEE3}"/>
+                <a16:creationId xmlns:a16="http://schemas.microsoft.com/office/drawing/2014/main" id="{CBE1EFDE-E514-332A-A4BD-EB2A5B571392}"/>
               </a:ext>
             </a:extLst>
           </p:cNvPr>
@@ -6055,7 +6055,7 @@
     </p:spTree>
     <p:extLst>
       <p:ext uri="{BB962C8B-B14F-4D97-AF65-F5344CB8AC3E}">
-        <p14:creationId xmlns:p14="http://schemas.microsoft.com/office/powerpoint/2010/main" val="1567792185"/>
+        <p14:creationId xmlns:p14="http://schemas.microsoft.com/office/powerpoint/2010/main" val="1583916210"/>
       </p:ext>
     </p:extLst>
   </p:cSld>

--- a/tests/corpus/pptx/generated/lines.pptx
+++ b/tests/corpus/pptx/generated/lines.pptx
@@ -131,7 +131,7 @@
           <p:cNvPr id="2" name="Titel 1">
             <a:extLst>
               <a:ext uri="{FF2B5EF4-FFF2-40B4-BE49-F238E27FC236}">
-                <a16:creationId xmlns:a16="http://schemas.microsoft.com/office/drawing/2014/main" id="{7A7C520A-140C-29EB-8F95-0F05054B6166}"/>
+                <a16:creationId xmlns:a16="http://schemas.microsoft.com/office/drawing/2014/main" id="{CC5AE26F-F1DA-D4C5-F9C0-7FA5DEE7DEBF}"/>
               </a:ext>
             </a:extLst>
           </p:cNvPr>
@@ -168,7 +168,7 @@
           <p:cNvPr id="3" name="Untertitel 2">
             <a:extLst>
               <a:ext uri="{FF2B5EF4-FFF2-40B4-BE49-F238E27FC236}">
-                <a16:creationId xmlns:a16="http://schemas.microsoft.com/office/drawing/2014/main" id="{3D005E85-FD95-CC12-CC8A-E61513E91FD5}"/>
+                <a16:creationId xmlns:a16="http://schemas.microsoft.com/office/drawing/2014/main" id="{42F2669E-2275-8FC2-E674-6D8D3A2804F1}"/>
               </a:ext>
             </a:extLst>
           </p:cNvPr>
@@ -238,7 +238,7 @@
           <p:cNvPr id="4" name="Datumsplatzhalter 3">
             <a:extLst>
               <a:ext uri="{FF2B5EF4-FFF2-40B4-BE49-F238E27FC236}">
-                <a16:creationId xmlns:a16="http://schemas.microsoft.com/office/drawing/2014/main" id="{9EEEE114-24EA-460D-5A00-1A14BBC41F34}"/>
+                <a16:creationId xmlns:a16="http://schemas.microsoft.com/office/drawing/2014/main" id="{1F2E0707-B4BD-C500-CB74-674C8B559557}"/>
               </a:ext>
             </a:extLst>
           </p:cNvPr>
@@ -254,7 +254,7 @@
           <a:bodyPr/>
           <a:lstStyle/>
           <a:p>
-            <a:fld id="{96617B50-F960-4036-8841-4A0CCC737E93}" type="datetimeFigureOut">
+            <a:fld id="{D82672E1-57E8-467C-8345-19D96DC89106}" type="datetimeFigureOut">
               <a:rPr lang="de-DE" smtClean="0"/>
               <a:t>08.10.2026</a:t>
             </a:fld>
@@ -267,7 +267,7 @@
           <p:cNvPr id="5" name="Fußzeilenplatzhalter 4">
             <a:extLst>
               <a:ext uri="{FF2B5EF4-FFF2-40B4-BE49-F238E27FC236}">
-                <a16:creationId xmlns:a16="http://schemas.microsoft.com/office/drawing/2014/main" id="{CCF06114-54CB-2B8E-285D-7815463EDF25}"/>
+                <a16:creationId xmlns:a16="http://schemas.microsoft.com/office/drawing/2014/main" id="{C582CE95-B15A-2D0B-7137-564F04945910}"/>
               </a:ext>
             </a:extLst>
           </p:cNvPr>
@@ -292,7 +292,7 @@
           <p:cNvPr id="6" name="Foliennummernplatzhalter 5">
             <a:extLst>
               <a:ext uri="{FF2B5EF4-FFF2-40B4-BE49-F238E27FC236}">
-                <a16:creationId xmlns:a16="http://schemas.microsoft.com/office/drawing/2014/main" id="{3D0FF3B6-7001-7740-5C50-B3E4FB48C32A}"/>
+                <a16:creationId xmlns:a16="http://schemas.microsoft.com/office/drawing/2014/main" id="{5ADF6D99-2465-8923-1FF1-34D6E78C3F52}"/>
               </a:ext>
             </a:extLst>
           </p:cNvPr>
@@ -308,7 +308,7 @@
           <a:bodyPr/>
           <a:lstStyle/>
           <a:p>
-            <a:fld id="{697172D1-5880-471A-B115-A902ED1779B8}" type="slidenum">
+            <a:fld id="{772AB598-4194-497E-883B-DA42DB1C224F}" type="slidenum">
               <a:rPr lang="de-DE" smtClean="0"/>
               <a:t>‹Nr.›</a:t>
             </a:fld>
@@ -319,7 +319,7 @@
     </p:spTree>
     <p:extLst>
       <p:ext uri="{BB962C8B-B14F-4D97-AF65-F5344CB8AC3E}">
-        <p14:creationId xmlns:p14="http://schemas.microsoft.com/office/powerpoint/2010/main" val="3719796051"/>
+        <p14:creationId xmlns:p14="http://schemas.microsoft.com/office/powerpoint/2010/main" val="941464454"/>
       </p:ext>
     </p:extLst>
   </p:cSld>
@@ -351,7 +351,7 @@
           <p:cNvPr id="2" name="Titel 1">
             <a:extLst>
               <a:ext uri="{FF2B5EF4-FFF2-40B4-BE49-F238E27FC236}">
-                <a16:creationId xmlns:a16="http://schemas.microsoft.com/office/drawing/2014/main" id="{BA452C29-042B-81D1-79CC-98264EFF0BB3}"/>
+                <a16:creationId xmlns:a16="http://schemas.microsoft.com/office/drawing/2014/main" id="{130329E7-B7EA-BA12-8E04-6EF9DF36AAD4}"/>
               </a:ext>
             </a:extLst>
           </p:cNvPr>
@@ -379,7 +379,7 @@
           <p:cNvPr id="3" name="Vertikaler Textplatzhalter 2">
             <a:extLst>
               <a:ext uri="{FF2B5EF4-FFF2-40B4-BE49-F238E27FC236}">
-                <a16:creationId xmlns:a16="http://schemas.microsoft.com/office/drawing/2014/main" id="{64E06DC3-C84C-F3B2-D617-60D1C53F6564}"/>
+                <a16:creationId xmlns:a16="http://schemas.microsoft.com/office/drawing/2014/main" id="{77BCFF08-860A-92A5-834E-11FEA0CAE798}"/>
               </a:ext>
             </a:extLst>
           </p:cNvPr>
@@ -436,7 +436,7 @@
           <p:cNvPr id="4" name="Datumsplatzhalter 3">
             <a:extLst>
               <a:ext uri="{FF2B5EF4-FFF2-40B4-BE49-F238E27FC236}">
-                <a16:creationId xmlns:a16="http://schemas.microsoft.com/office/drawing/2014/main" id="{E9711CFB-FD35-05AF-2BE9-AC5CAA65599C}"/>
+                <a16:creationId xmlns:a16="http://schemas.microsoft.com/office/drawing/2014/main" id="{987712A4-A257-0ADD-1C3B-FD74DA053A7D}"/>
               </a:ext>
             </a:extLst>
           </p:cNvPr>
@@ -452,7 +452,7 @@
           <a:bodyPr/>
           <a:lstStyle/>
           <a:p>
-            <a:fld id="{96617B50-F960-4036-8841-4A0CCC737E93}" type="datetimeFigureOut">
+            <a:fld id="{D82672E1-57E8-467C-8345-19D96DC89106}" type="datetimeFigureOut">
               <a:rPr lang="de-DE" smtClean="0"/>
               <a:t>08.10.2026</a:t>
             </a:fld>
@@ -465,7 +465,7 @@
           <p:cNvPr id="5" name="Fußzeilenplatzhalter 4">
             <a:extLst>
               <a:ext uri="{FF2B5EF4-FFF2-40B4-BE49-F238E27FC236}">
-                <a16:creationId xmlns:a16="http://schemas.microsoft.com/office/drawing/2014/main" id="{1562DE19-0F79-C003-C3B5-915F2CE55143}"/>
+                <a16:creationId xmlns:a16="http://schemas.microsoft.com/office/drawing/2014/main" id="{3E025AB6-522A-94AC-675B-2A943A42347B}"/>
               </a:ext>
             </a:extLst>
           </p:cNvPr>
@@ -490,7 +490,7 @@
           <p:cNvPr id="6" name="Foliennummernplatzhalter 5">
             <a:extLst>
               <a:ext uri="{FF2B5EF4-FFF2-40B4-BE49-F238E27FC236}">
-                <a16:creationId xmlns:a16="http://schemas.microsoft.com/office/drawing/2014/main" id="{710C9288-B8F7-61EF-130C-F0B51B86CB02}"/>
+                <a16:creationId xmlns:a16="http://schemas.microsoft.com/office/drawing/2014/main" id="{94121F67-3B97-8476-39BA-2777AADC28C2}"/>
               </a:ext>
             </a:extLst>
           </p:cNvPr>
@@ -506,7 +506,7 @@
           <a:bodyPr/>
           <a:lstStyle/>
           <a:p>
-            <a:fld id="{697172D1-5880-471A-B115-A902ED1779B8}" type="slidenum">
+            <a:fld id="{772AB598-4194-497E-883B-DA42DB1C224F}" type="slidenum">
               <a:rPr lang="de-DE" smtClean="0"/>
               <a:t>‹Nr.›</a:t>
             </a:fld>
@@ -517,7 +517,7 @@
     </p:spTree>
     <p:extLst>
       <p:ext uri="{BB962C8B-B14F-4D97-AF65-F5344CB8AC3E}">
-        <p14:creationId xmlns:p14="http://schemas.microsoft.com/office/powerpoint/2010/main" val="4018094380"/>
+        <p14:creationId xmlns:p14="http://schemas.microsoft.com/office/powerpoint/2010/main" val="294047168"/>
       </p:ext>
     </p:extLst>
   </p:cSld>
@@ -549,7 +549,7 @@
           <p:cNvPr id="2" name="Vertikaler Titel 1">
             <a:extLst>
               <a:ext uri="{FF2B5EF4-FFF2-40B4-BE49-F238E27FC236}">
-                <a16:creationId xmlns:a16="http://schemas.microsoft.com/office/drawing/2014/main" id="{26CBB5CD-7F42-4E25-714A-64D360C9B59E}"/>
+                <a16:creationId xmlns:a16="http://schemas.microsoft.com/office/drawing/2014/main" id="{88BABC9B-BE84-66F7-F55D-E02B1A9F6CB3}"/>
               </a:ext>
             </a:extLst>
           </p:cNvPr>
@@ -582,7 +582,7 @@
           <p:cNvPr id="3" name="Vertikaler Textplatzhalter 2">
             <a:extLst>
               <a:ext uri="{FF2B5EF4-FFF2-40B4-BE49-F238E27FC236}">
-                <a16:creationId xmlns:a16="http://schemas.microsoft.com/office/drawing/2014/main" id="{C0FB1BED-86F1-7C2D-AF13-38B738BA8AE9}"/>
+                <a16:creationId xmlns:a16="http://schemas.microsoft.com/office/drawing/2014/main" id="{1AF473B5-55E4-30F7-9290-B24769690E87}"/>
               </a:ext>
             </a:extLst>
           </p:cNvPr>
@@ -644,7 +644,7 @@
           <p:cNvPr id="4" name="Datumsplatzhalter 3">
             <a:extLst>
               <a:ext uri="{FF2B5EF4-FFF2-40B4-BE49-F238E27FC236}">
-                <a16:creationId xmlns:a16="http://schemas.microsoft.com/office/drawing/2014/main" id="{8FFC220C-9778-6C66-844F-3EBEFEDF7693}"/>
+                <a16:creationId xmlns:a16="http://schemas.microsoft.com/office/drawing/2014/main" id="{C45CBECE-F35F-4997-D284-25BFD41A3327}"/>
               </a:ext>
             </a:extLst>
           </p:cNvPr>
@@ -660,7 +660,7 @@
           <a:bodyPr/>
           <a:lstStyle/>
           <a:p>
-            <a:fld id="{96617B50-F960-4036-8841-4A0CCC737E93}" type="datetimeFigureOut">
+            <a:fld id="{D82672E1-57E8-467C-8345-19D96DC89106}" type="datetimeFigureOut">
               <a:rPr lang="de-DE" smtClean="0"/>
               <a:t>08.10.2026</a:t>
             </a:fld>
@@ -673,7 +673,7 @@
           <p:cNvPr id="5" name="Fußzeilenplatzhalter 4">
             <a:extLst>
               <a:ext uri="{FF2B5EF4-FFF2-40B4-BE49-F238E27FC236}">
-                <a16:creationId xmlns:a16="http://schemas.microsoft.com/office/drawing/2014/main" id="{A4318D4B-101A-1A40-7462-B8C34268F5F8}"/>
+                <a16:creationId xmlns:a16="http://schemas.microsoft.com/office/drawing/2014/main" id="{0C964F92-2E28-6AC8-32F6-E2041968198B}"/>
               </a:ext>
             </a:extLst>
           </p:cNvPr>
@@ -698,7 +698,7 @@
           <p:cNvPr id="6" name="Foliennummernplatzhalter 5">
             <a:extLst>
               <a:ext uri="{FF2B5EF4-FFF2-40B4-BE49-F238E27FC236}">
-                <a16:creationId xmlns:a16="http://schemas.microsoft.com/office/drawing/2014/main" id="{F0FCE3F9-B820-D018-2E02-B011CF9CD0DE}"/>
+                <a16:creationId xmlns:a16="http://schemas.microsoft.com/office/drawing/2014/main" id="{A9463E32-8F7D-441F-9849-A120C1607E1E}"/>
               </a:ext>
             </a:extLst>
           </p:cNvPr>
@@ -714,7 +714,7 @@
           <a:bodyPr/>
           <a:lstStyle/>
           <a:p>
-            <a:fld id="{697172D1-5880-471A-B115-A902ED1779B8}" type="slidenum">
+            <a:fld id="{772AB598-4194-497E-883B-DA42DB1C224F}" type="slidenum">
               <a:rPr lang="de-DE" smtClean="0"/>
               <a:t>‹Nr.›</a:t>
             </a:fld>
@@ -725,7 +725,7 @@
     </p:spTree>
     <p:extLst>
       <p:ext uri="{BB962C8B-B14F-4D97-AF65-F5344CB8AC3E}">
-        <p14:creationId xmlns:p14="http://schemas.microsoft.com/office/powerpoint/2010/main" val="882090055"/>
+        <p14:creationId xmlns:p14="http://schemas.microsoft.com/office/powerpoint/2010/main" val="3050858854"/>
       </p:ext>
     </p:extLst>
   </p:cSld>
@@ -757,7 +757,7 @@
           <p:cNvPr id="2" name="Titel 1">
             <a:extLst>
               <a:ext uri="{FF2B5EF4-FFF2-40B4-BE49-F238E27FC236}">
-                <a16:creationId xmlns:a16="http://schemas.microsoft.com/office/drawing/2014/main" id="{A47FBCFA-984C-63BD-3803-DD318CC1BED5}"/>
+                <a16:creationId xmlns:a16="http://schemas.microsoft.com/office/drawing/2014/main" id="{87C18EED-BA8D-F838-7CC4-4F760A67024D}"/>
               </a:ext>
             </a:extLst>
           </p:cNvPr>
@@ -785,7 +785,7 @@
           <p:cNvPr id="3" name="Inhaltsplatzhalter 2">
             <a:extLst>
               <a:ext uri="{FF2B5EF4-FFF2-40B4-BE49-F238E27FC236}">
-                <a16:creationId xmlns:a16="http://schemas.microsoft.com/office/drawing/2014/main" id="{F7EE2DC0-983A-C75B-B23B-23BD9E99683E}"/>
+                <a16:creationId xmlns:a16="http://schemas.microsoft.com/office/drawing/2014/main" id="{02A7D2F8-3ED6-9FC9-1CB5-B610A4EDDB93}"/>
               </a:ext>
             </a:extLst>
           </p:cNvPr>
@@ -842,7 +842,7 @@
           <p:cNvPr id="4" name="Datumsplatzhalter 3">
             <a:extLst>
               <a:ext uri="{FF2B5EF4-FFF2-40B4-BE49-F238E27FC236}">
-                <a16:creationId xmlns:a16="http://schemas.microsoft.com/office/drawing/2014/main" id="{8950EECB-92B0-D07E-7963-8C49A5895FD2}"/>
+                <a16:creationId xmlns:a16="http://schemas.microsoft.com/office/drawing/2014/main" id="{66A79E4D-330E-FBD1-E546-F90618CD50D5}"/>
               </a:ext>
             </a:extLst>
           </p:cNvPr>
@@ -858,7 +858,7 @@
           <a:bodyPr/>
           <a:lstStyle/>
           <a:p>
-            <a:fld id="{96617B50-F960-4036-8841-4A0CCC737E93}" type="datetimeFigureOut">
+            <a:fld id="{D82672E1-57E8-467C-8345-19D96DC89106}" type="datetimeFigureOut">
               <a:rPr lang="de-DE" smtClean="0"/>
               <a:t>08.10.2026</a:t>
             </a:fld>
@@ -871,7 +871,7 @@
           <p:cNvPr id="5" name="Fußzeilenplatzhalter 4">
             <a:extLst>
               <a:ext uri="{FF2B5EF4-FFF2-40B4-BE49-F238E27FC236}">
-                <a16:creationId xmlns:a16="http://schemas.microsoft.com/office/drawing/2014/main" id="{699455A2-C506-202B-62B4-1894DBC422B4}"/>
+                <a16:creationId xmlns:a16="http://schemas.microsoft.com/office/drawing/2014/main" id="{88B9FE69-B187-83AD-3356-6F9D966308F4}"/>
               </a:ext>
             </a:extLst>
           </p:cNvPr>
@@ -896,7 +896,7 @@
           <p:cNvPr id="6" name="Foliennummernplatzhalter 5">
             <a:extLst>
               <a:ext uri="{FF2B5EF4-FFF2-40B4-BE49-F238E27FC236}">
-                <a16:creationId xmlns:a16="http://schemas.microsoft.com/office/drawing/2014/main" id="{F82965C2-1C26-C4BC-27CF-7546B58FD44A}"/>
+                <a16:creationId xmlns:a16="http://schemas.microsoft.com/office/drawing/2014/main" id="{9E7B674C-0201-DEB0-BBFD-10FF16286822}"/>
               </a:ext>
             </a:extLst>
           </p:cNvPr>
@@ -912,7 +912,7 @@
           <a:bodyPr/>
           <a:lstStyle/>
           <a:p>
-            <a:fld id="{697172D1-5880-471A-B115-A902ED1779B8}" type="slidenum">
+            <a:fld id="{772AB598-4194-497E-883B-DA42DB1C224F}" type="slidenum">
               <a:rPr lang="de-DE" smtClean="0"/>
               <a:t>‹Nr.›</a:t>
             </a:fld>
@@ -923,7 +923,7 @@
     </p:spTree>
     <p:extLst>
       <p:ext uri="{BB962C8B-B14F-4D97-AF65-F5344CB8AC3E}">
-        <p14:creationId xmlns:p14="http://schemas.microsoft.com/office/powerpoint/2010/main" val="2408986834"/>
+        <p14:creationId xmlns:p14="http://schemas.microsoft.com/office/powerpoint/2010/main" val="1665724240"/>
       </p:ext>
     </p:extLst>
   </p:cSld>
@@ -955,7 +955,7 @@
           <p:cNvPr id="2" name="Titel 1">
             <a:extLst>
               <a:ext uri="{FF2B5EF4-FFF2-40B4-BE49-F238E27FC236}">
-                <a16:creationId xmlns:a16="http://schemas.microsoft.com/office/drawing/2014/main" id="{CE664BE4-B0C8-87CE-966D-0C04AB7E67B7}"/>
+                <a16:creationId xmlns:a16="http://schemas.microsoft.com/office/drawing/2014/main" id="{A8DCAC43-24CE-2F71-91F5-DBCB57E14E16}"/>
               </a:ext>
             </a:extLst>
           </p:cNvPr>
@@ -992,7 +992,7 @@
           <p:cNvPr id="3" name="Textplatzhalter 2">
             <a:extLst>
               <a:ext uri="{FF2B5EF4-FFF2-40B4-BE49-F238E27FC236}">
-                <a16:creationId xmlns:a16="http://schemas.microsoft.com/office/drawing/2014/main" id="{D6BB9A9C-851D-0397-0FE3-5667417453EE}"/>
+                <a16:creationId xmlns:a16="http://schemas.microsoft.com/office/drawing/2014/main" id="{E3F5EDA7-0FE5-6AB9-052B-8FCD83E68F31}"/>
               </a:ext>
             </a:extLst>
           </p:cNvPr>
@@ -1117,7 +1117,7 @@
           <p:cNvPr id="4" name="Datumsplatzhalter 3">
             <a:extLst>
               <a:ext uri="{FF2B5EF4-FFF2-40B4-BE49-F238E27FC236}">
-                <a16:creationId xmlns:a16="http://schemas.microsoft.com/office/drawing/2014/main" id="{E9E16B5C-D7AE-470B-93DD-EC2AD9603021}"/>
+                <a16:creationId xmlns:a16="http://schemas.microsoft.com/office/drawing/2014/main" id="{1C65864A-AB59-BFD7-A39E-05A303695F9B}"/>
               </a:ext>
             </a:extLst>
           </p:cNvPr>
@@ -1133,7 +1133,7 @@
           <a:bodyPr/>
           <a:lstStyle/>
           <a:p>
-            <a:fld id="{96617B50-F960-4036-8841-4A0CCC737E93}" type="datetimeFigureOut">
+            <a:fld id="{D82672E1-57E8-467C-8345-19D96DC89106}" type="datetimeFigureOut">
               <a:rPr lang="de-DE" smtClean="0"/>
               <a:t>08.10.2026</a:t>
             </a:fld>
@@ -1146,7 +1146,7 @@
           <p:cNvPr id="5" name="Fußzeilenplatzhalter 4">
             <a:extLst>
               <a:ext uri="{FF2B5EF4-FFF2-40B4-BE49-F238E27FC236}">
-                <a16:creationId xmlns:a16="http://schemas.microsoft.com/office/drawing/2014/main" id="{027967B8-0C1A-8D31-BCD1-06B29FD6A70A}"/>
+                <a16:creationId xmlns:a16="http://schemas.microsoft.com/office/drawing/2014/main" id="{9E8E070B-A06C-0F7C-DE09-D658EC1FB252}"/>
               </a:ext>
             </a:extLst>
           </p:cNvPr>
@@ -1171,7 +1171,7 @@
           <p:cNvPr id="6" name="Foliennummernplatzhalter 5">
             <a:extLst>
               <a:ext uri="{FF2B5EF4-FFF2-40B4-BE49-F238E27FC236}">
-                <a16:creationId xmlns:a16="http://schemas.microsoft.com/office/drawing/2014/main" id="{ADA248DA-E8AE-85EE-4178-E6507B803C52}"/>
+                <a16:creationId xmlns:a16="http://schemas.microsoft.com/office/drawing/2014/main" id="{93298EB2-3D6F-CB77-4E51-804FC3835B2F}"/>
               </a:ext>
             </a:extLst>
           </p:cNvPr>
@@ -1187,7 +1187,7 @@
           <a:bodyPr/>
           <a:lstStyle/>
           <a:p>
-            <a:fld id="{697172D1-5880-471A-B115-A902ED1779B8}" type="slidenum">
+            <a:fld id="{772AB598-4194-497E-883B-DA42DB1C224F}" type="slidenum">
               <a:rPr lang="de-DE" smtClean="0"/>
               <a:t>‹Nr.›</a:t>
             </a:fld>
@@ -1198,7 +1198,7 @@
     </p:spTree>
     <p:extLst>
       <p:ext uri="{BB962C8B-B14F-4D97-AF65-F5344CB8AC3E}">
-        <p14:creationId xmlns:p14="http://schemas.microsoft.com/office/powerpoint/2010/main" val="3267963963"/>
+        <p14:creationId xmlns:p14="http://schemas.microsoft.com/office/powerpoint/2010/main" val="130333501"/>
       </p:ext>
     </p:extLst>
   </p:cSld>
@@ -1230,7 +1230,7 @@
           <p:cNvPr id="2" name="Titel 1">
             <a:extLst>
               <a:ext uri="{FF2B5EF4-FFF2-40B4-BE49-F238E27FC236}">
-                <a16:creationId xmlns:a16="http://schemas.microsoft.com/office/drawing/2014/main" id="{26A5DB07-04C0-00BD-C905-EB20FF05A085}"/>
+                <a16:creationId xmlns:a16="http://schemas.microsoft.com/office/drawing/2014/main" id="{E01B35BC-12D3-DD83-2066-7C022C7A9D13}"/>
               </a:ext>
             </a:extLst>
           </p:cNvPr>
@@ -1258,7 +1258,7 @@
           <p:cNvPr id="3" name="Inhaltsplatzhalter 2">
             <a:extLst>
               <a:ext uri="{FF2B5EF4-FFF2-40B4-BE49-F238E27FC236}">
-                <a16:creationId xmlns:a16="http://schemas.microsoft.com/office/drawing/2014/main" id="{6FB32945-9E24-45B1-54CA-B4356D6D2F51}"/>
+                <a16:creationId xmlns:a16="http://schemas.microsoft.com/office/drawing/2014/main" id="{ADB9F2D0-BD06-16D1-F08F-CEA453EF948C}"/>
               </a:ext>
             </a:extLst>
           </p:cNvPr>
@@ -1320,7 +1320,7 @@
           <p:cNvPr id="4" name="Inhaltsplatzhalter 3">
             <a:extLst>
               <a:ext uri="{FF2B5EF4-FFF2-40B4-BE49-F238E27FC236}">
-                <a16:creationId xmlns:a16="http://schemas.microsoft.com/office/drawing/2014/main" id="{27FBABEC-1D0E-95E6-FAA1-FE63A77610DF}"/>
+                <a16:creationId xmlns:a16="http://schemas.microsoft.com/office/drawing/2014/main" id="{7ACC8A19-31BA-8813-EC57-92F5ACD3FFC0}"/>
               </a:ext>
             </a:extLst>
           </p:cNvPr>
@@ -1382,7 +1382,7 @@
           <p:cNvPr id="5" name="Datumsplatzhalter 4">
             <a:extLst>
               <a:ext uri="{FF2B5EF4-FFF2-40B4-BE49-F238E27FC236}">
-                <a16:creationId xmlns:a16="http://schemas.microsoft.com/office/drawing/2014/main" id="{15B01055-0261-6F7B-8C40-F875903FD155}"/>
+                <a16:creationId xmlns:a16="http://schemas.microsoft.com/office/drawing/2014/main" id="{B1838ABE-95DE-B47F-9507-6B88E038D488}"/>
               </a:ext>
             </a:extLst>
           </p:cNvPr>
@@ -1398,7 +1398,7 @@
           <a:bodyPr/>
           <a:lstStyle/>
           <a:p>
-            <a:fld id="{96617B50-F960-4036-8841-4A0CCC737E93}" type="datetimeFigureOut">
+            <a:fld id="{D82672E1-57E8-467C-8345-19D96DC89106}" type="datetimeFigureOut">
               <a:rPr lang="de-DE" smtClean="0"/>
               <a:t>08.10.2026</a:t>
             </a:fld>
@@ -1411,7 +1411,7 @@
           <p:cNvPr id="6" name="Fußzeilenplatzhalter 5">
             <a:extLst>
               <a:ext uri="{FF2B5EF4-FFF2-40B4-BE49-F238E27FC236}">
-                <a16:creationId xmlns:a16="http://schemas.microsoft.com/office/drawing/2014/main" id="{52F258B0-BFCB-DB65-4799-828868F3657A}"/>
+                <a16:creationId xmlns:a16="http://schemas.microsoft.com/office/drawing/2014/main" id="{E7AF847D-4065-1385-8963-12CF8C68CAA8}"/>
               </a:ext>
             </a:extLst>
           </p:cNvPr>
@@ -1436,7 +1436,7 @@
           <p:cNvPr id="7" name="Foliennummernplatzhalter 6">
             <a:extLst>
               <a:ext uri="{FF2B5EF4-FFF2-40B4-BE49-F238E27FC236}">
-                <a16:creationId xmlns:a16="http://schemas.microsoft.com/office/drawing/2014/main" id="{F754F82C-8377-7DF2-3402-835BBA21B45C}"/>
+                <a16:creationId xmlns:a16="http://schemas.microsoft.com/office/drawing/2014/main" id="{23DDE321-EEDB-EBB5-99C7-67619ACE7282}"/>
               </a:ext>
             </a:extLst>
           </p:cNvPr>
@@ -1452,7 +1452,7 @@
           <a:bodyPr/>
           <a:lstStyle/>
           <a:p>
-            <a:fld id="{697172D1-5880-471A-B115-A902ED1779B8}" type="slidenum">
+            <a:fld id="{772AB598-4194-497E-883B-DA42DB1C224F}" type="slidenum">
               <a:rPr lang="de-DE" smtClean="0"/>
               <a:t>‹Nr.›</a:t>
             </a:fld>
@@ -1463,7 +1463,7 @@
     </p:spTree>
     <p:extLst>
       <p:ext uri="{BB962C8B-B14F-4D97-AF65-F5344CB8AC3E}">
-        <p14:creationId xmlns:p14="http://schemas.microsoft.com/office/powerpoint/2010/main" val="2763430856"/>
+        <p14:creationId xmlns:p14="http://schemas.microsoft.com/office/powerpoint/2010/main" val="3824893957"/>
       </p:ext>
     </p:extLst>
   </p:cSld>
@@ -1495,7 +1495,7 @@
           <p:cNvPr id="2" name="Titel 1">
             <a:extLst>
               <a:ext uri="{FF2B5EF4-FFF2-40B4-BE49-F238E27FC236}">
-                <a16:creationId xmlns:a16="http://schemas.microsoft.com/office/drawing/2014/main" id="{788C05CA-A209-E8C6-04EA-CDAACD6EE2F0}"/>
+                <a16:creationId xmlns:a16="http://schemas.microsoft.com/office/drawing/2014/main" id="{82A09356-C21B-AF48-ADCA-BE05C7FC7400}"/>
               </a:ext>
             </a:extLst>
           </p:cNvPr>
@@ -1528,7 +1528,7 @@
           <p:cNvPr id="3" name="Textplatzhalter 2">
             <a:extLst>
               <a:ext uri="{FF2B5EF4-FFF2-40B4-BE49-F238E27FC236}">
-                <a16:creationId xmlns:a16="http://schemas.microsoft.com/office/drawing/2014/main" id="{FB4D4BE5-357C-AADD-B313-887D5832FE75}"/>
+                <a16:creationId xmlns:a16="http://schemas.microsoft.com/office/drawing/2014/main" id="{D3B0E5C1-4FB2-14AF-EEF2-C64AD6A62DA3}"/>
               </a:ext>
             </a:extLst>
           </p:cNvPr>
@@ -1599,7 +1599,7 @@
           <p:cNvPr id="4" name="Inhaltsplatzhalter 3">
             <a:extLst>
               <a:ext uri="{FF2B5EF4-FFF2-40B4-BE49-F238E27FC236}">
-                <a16:creationId xmlns:a16="http://schemas.microsoft.com/office/drawing/2014/main" id="{061F4E1A-2F40-E2D0-7C83-050F1C35983B}"/>
+                <a16:creationId xmlns:a16="http://schemas.microsoft.com/office/drawing/2014/main" id="{D541924E-8FF7-D094-8020-5476FCA031F9}"/>
               </a:ext>
             </a:extLst>
           </p:cNvPr>
@@ -1661,7 +1661,7 @@
           <p:cNvPr id="5" name="Textplatzhalter 4">
             <a:extLst>
               <a:ext uri="{FF2B5EF4-FFF2-40B4-BE49-F238E27FC236}">
-                <a16:creationId xmlns:a16="http://schemas.microsoft.com/office/drawing/2014/main" id="{1BE8E0CA-C7FD-8E24-5EFB-1E2018A10356}"/>
+                <a16:creationId xmlns:a16="http://schemas.microsoft.com/office/drawing/2014/main" id="{AE6349E3-918B-F830-2C3E-A1FC3A5F94D1}"/>
               </a:ext>
             </a:extLst>
           </p:cNvPr>
@@ -1732,7 +1732,7 @@
           <p:cNvPr id="6" name="Inhaltsplatzhalter 5">
             <a:extLst>
               <a:ext uri="{FF2B5EF4-FFF2-40B4-BE49-F238E27FC236}">
-                <a16:creationId xmlns:a16="http://schemas.microsoft.com/office/drawing/2014/main" id="{FD78EDD1-2708-226F-8814-01B537B08549}"/>
+                <a16:creationId xmlns:a16="http://schemas.microsoft.com/office/drawing/2014/main" id="{D1761BAB-12F7-776F-8627-9482D0DFF298}"/>
               </a:ext>
             </a:extLst>
           </p:cNvPr>
@@ -1794,7 +1794,7 @@
           <p:cNvPr id="7" name="Datumsplatzhalter 6">
             <a:extLst>
               <a:ext uri="{FF2B5EF4-FFF2-40B4-BE49-F238E27FC236}">
-                <a16:creationId xmlns:a16="http://schemas.microsoft.com/office/drawing/2014/main" id="{A35CB7B2-0EB0-B7F0-5CA6-B210511735D1}"/>
+                <a16:creationId xmlns:a16="http://schemas.microsoft.com/office/drawing/2014/main" id="{F0033882-A648-5204-E4B2-50CE4BA451CA}"/>
               </a:ext>
             </a:extLst>
           </p:cNvPr>
@@ -1810,7 +1810,7 @@
           <a:bodyPr/>
           <a:lstStyle/>
           <a:p>
-            <a:fld id="{96617B50-F960-4036-8841-4A0CCC737E93}" type="datetimeFigureOut">
+            <a:fld id="{D82672E1-57E8-467C-8345-19D96DC89106}" type="datetimeFigureOut">
               <a:rPr lang="de-DE" smtClean="0"/>
               <a:t>08.10.2026</a:t>
             </a:fld>
@@ -1823,7 +1823,7 @@
           <p:cNvPr id="8" name="Fußzeilenplatzhalter 7">
             <a:extLst>
               <a:ext uri="{FF2B5EF4-FFF2-40B4-BE49-F238E27FC236}">
-                <a16:creationId xmlns:a16="http://schemas.microsoft.com/office/drawing/2014/main" id="{76B7BDE3-C10E-9910-DCDD-37F103CA7025}"/>
+                <a16:creationId xmlns:a16="http://schemas.microsoft.com/office/drawing/2014/main" id="{3F82B9ED-B4F4-06F1-9C01-0B6AA6A6D244}"/>
               </a:ext>
             </a:extLst>
           </p:cNvPr>
@@ -1848,7 +1848,7 @@
           <p:cNvPr id="9" name="Foliennummernplatzhalter 8">
             <a:extLst>
               <a:ext uri="{FF2B5EF4-FFF2-40B4-BE49-F238E27FC236}">
-                <a16:creationId xmlns:a16="http://schemas.microsoft.com/office/drawing/2014/main" id="{D796D464-30EA-9956-B140-F7D67E0C807B}"/>
+                <a16:creationId xmlns:a16="http://schemas.microsoft.com/office/drawing/2014/main" id="{0EAFD78D-92B4-4357-59F5-0124FBC5A470}"/>
               </a:ext>
             </a:extLst>
           </p:cNvPr>
@@ -1864,7 +1864,7 @@
           <a:bodyPr/>
           <a:lstStyle/>
           <a:p>
-            <a:fld id="{697172D1-5880-471A-B115-A902ED1779B8}" type="slidenum">
+            <a:fld id="{772AB598-4194-497E-883B-DA42DB1C224F}" type="slidenum">
               <a:rPr lang="de-DE" smtClean="0"/>
               <a:t>‹Nr.›</a:t>
             </a:fld>
@@ -1875,7 +1875,7 @@
     </p:spTree>
     <p:extLst>
       <p:ext uri="{BB962C8B-B14F-4D97-AF65-F5344CB8AC3E}">
-        <p14:creationId xmlns:p14="http://schemas.microsoft.com/office/powerpoint/2010/main" val="2162393813"/>
+        <p14:creationId xmlns:p14="http://schemas.microsoft.com/office/powerpoint/2010/main" val="1043588039"/>
       </p:ext>
     </p:extLst>
   </p:cSld>
@@ -1907,7 +1907,7 @@
           <p:cNvPr id="2" name="Titel 1">
             <a:extLst>
               <a:ext uri="{FF2B5EF4-FFF2-40B4-BE49-F238E27FC236}">
-                <a16:creationId xmlns:a16="http://schemas.microsoft.com/office/drawing/2014/main" id="{47C9487E-39BE-89DB-2742-95594C7433CF}"/>
+                <a16:creationId xmlns:a16="http://schemas.microsoft.com/office/drawing/2014/main" id="{C2C45D76-A45D-31B9-1300-78D7AAA8D32D}"/>
               </a:ext>
             </a:extLst>
           </p:cNvPr>
@@ -1935,7 +1935,7 @@
           <p:cNvPr id="3" name="Datumsplatzhalter 2">
             <a:extLst>
               <a:ext uri="{FF2B5EF4-FFF2-40B4-BE49-F238E27FC236}">
-                <a16:creationId xmlns:a16="http://schemas.microsoft.com/office/drawing/2014/main" id="{A22DCD6F-871C-FBA5-766C-8278CAF100F1}"/>
+                <a16:creationId xmlns:a16="http://schemas.microsoft.com/office/drawing/2014/main" id="{73A5AC48-A28E-1A64-BCB9-C87FC905D996}"/>
               </a:ext>
             </a:extLst>
           </p:cNvPr>
@@ -1951,7 +1951,7 @@
           <a:bodyPr/>
           <a:lstStyle/>
           <a:p>
-            <a:fld id="{96617B50-F960-4036-8841-4A0CCC737E93}" type="datetimeFigureOut">
+            <a:fld id="{D82672E1-57E8-467C-8345-19D96DC89106}" type="datetimeFigureOut">
               <a:rPr lang="de-DE" smtClean="0"/>
               <a:t>08.10.2026</a:t>
             </a:fld>
@@ -1964,7 +1964,7 @@
           <p:cNvPr id="4" name="Fußzeilenplatzhalter 3">
             <a:extLst>
               <a:ext uri="{FF2B5EF4-FFF2-40B4-BE49-F238E27FC236}">
-                <a16:creationId xmlns:a16="http://schemas.microsoft.com/office/drawing/2014/main" id="{F3091E77-D433-B15E-AEC4-36AD90B51787}"/>
+                <a16:creationId xmlns:a16="http://schemas.microsoft.com/office/drawing/2014/main" id="{2CB033E4-8B6A-3BB0-CD89-B2518C9E6D56}"/>
               </a:ext>
             </a:extLst>
           </p:cNvPr>
@@ -1989,7 +1989,7 @@
           <p:cNvPr id="5" name="Foliennummernplatzhalter 4">
             <a:extLst>
               <a:ext uri="{FF2B5EF4-FFF2-40B4-BE49-F238E27FC236}">
-                <a16:creationId xmlns:a16="http://schemas.microsoft.com/office/drawing/2014/main" id="{E9DCAB97-CFEE-FCEA-07E8-992BA83841CF}"/>
+                <a16:creationId xmlns:a16="http://schemas.microsoft.com/office/drawing/2014/main" id="{A39843A9-2647-D4E5-8DA3-D68E2954789B}"/>
               </a:ext>
             </a:extLst>
           </p:cNvPr>
@@ -2005,7 +2005,7 @@
           <a:bodyPr/>
           <a:lstStyle/>
           <a:p>
-            <a:fld id="{697172D1-5880-471A-B115-A902ED1779B8}" type="slidenum">
+            <a:fld id="{772AB598-4194-497E-883B-DA42DB1C224F}" type="slidenum">
               <a:rPr lang="de-DE" smtClean="0"/>
               <a:t>‹Nr.›</a:t>
             </a:fld>
@@ -2016,7 +2016,7 @@
     </p:spTree>
     <p:extLst>
       <p:ext uri="{BB962C8B-B14F-4D97-AF65-F5344CB8AC3E}">
-        <p14:creationId xmlns:p14="http://schemas.microsoft.com/office/powerpoint/2010/main" val="2172375642"/>
+        <p14:creationId xmlns:p14="http://schemas.microsoft.com/office/powerpoint/2010/main" val="2201946089"/>
       </p:ext>
     </p:extLst>
   </p:cSld>
@@ -2048,7 +2048,7 @@
           <p:cNvPr id="2" name="Datumsplatzhalter 1">
             <a:extLst>
               <a:ext uri="{FF2B5EF4-FFF2-40B4-BE49-F238E27FC236}">
-                <a16:creationId xmlns:a16="http://schemas.microsoft.com/office/drawing/2014/main" id="{A4B254C5-0E5C-1989-1FB0-3D95B1E41C76}"/>
+                <a16:creationId xmlns:a16="http://schemas.microsoft.com/office/drawing/2014/main" id="{B7F90146-6D82-19CB-2CAE-3F0FF49D0973}"/>
               </a:ext>
             </a:extLst>
           </p:cNvPr>
@@ -2064,7 +2064,7 @@
           <a:bodyPr/>
           <a:lstStyle/>
           <a:p>
-            <a:fld id="{96617B50-F960-4036-8841-4A0CCC737E93}" type="datetimeFigureOut">
+            <a:fld id="{D82672E1-57E8-467C-8345-19D96DC89106}" type="datetimeFigureOut">
               <a:rPr lang="de-DE" smtClean="0"/>
               <a:t>08.10.2026</a:t>
             </a:fld>
@@ -2077,7 +2077,7 @@
           <p:cNvPr id="3" name="Fußzeilenplatzhalter 2">
             <a:extLst>
               <a:ext uri="{FF2B5EF4-FFF2-40B4-BE49-F238E27FC236}">
-                <a16:creationId xmlns:a16="http://schemas.microsoft.com/office/drawing/2014/main" id="{158580BE-AAB3-CD83-DA6F-250EB4B7FABE}"/>
+                <a16:creationId xmlns:a16="http://schemas.microsoft.com/office/drawing/2014/main" id="{A1C6AF1D-D3F3-6391-1E02-9200597B2570}"/>
               </a:ext>
             </a:extLst>
           </p:cNvPr>
@@ -2102,7 +2102,7 @@
           <p:cNvPr id="4" name="Foliennummernplatzhalter 3">
             <a:extLst>
               <a:ext uri="{FF2B5EF4-FFF2-40B4-BE49-F238E27FC236}">
-                <a16:creationId xmlns:a16="http://schemas.microsoft.com/office/drawing/2014/main" id="{C159D057-4EBE-7D9F-390F-23348A5DE238}"/>
+                <a16:creationId xmlns:a16="http://schemas.microsoft.com/office/drawing/2014/main" id="{2B5DAC90-537E-6C33-EC90-FE4C527CEC10}"/>
               </a:ext>
             </a:extLst>
           </p:cNvPr>
@@ -2118,7 +2118,7 @@
           <a:bodyPr/>
           <a:lstStyle/>
           <a:p>
-            <a:fld id="{697172D1-5880-471A-B115-A902ED1779B8}" type="slidenum">
+            <a:fld id="{772AB598-4194-497E-883B-DA42DB1C224F}" type="slidenum">
               <a:rPr lang="de-DE" smtClean="0"/>
               <a:t>‹Nr.›</a:t>
             </a:fld>
@@ -2129,7 +2129,7 @@
     </p:spTree>
     <p:extLst>
       <p:ext uri="{BB962C8B-B14F-4D97-AF65-F5344CB8AC3E}">
-        <p14:creationId xmlns:p14="http://schemas.microsoft.com/office/powerpoint/2010/main" val="3870728119"/>
+        <p14:creationId xmlns:p14="http://schemas.microsoft.com/office/powerpoint/2010/main" val="379372588"/>
       </p:ext>
     </p:extLst>
   </p:cSld>
@@ -2161,7 +2161,7 @@
           <p:cNvPr id="2" name="Titel 1">
             <a:extLst>
               <a:ext uri="{FF2B5EF4-FFF2-40B4-BE49-F238E27FC236}">
-                <a16:creationId xmlns:a16="http://schemas.microsoft.com/office/drawing/2014/main" id="{E11E8E7B-0669-0849-00BE-C4DFB9CEA578}"/>
+                <a16:creationId xmlns:a16="http://schemas.microsoft.com/office/drawing/2014/main" id="{5FC5018F-5EB0-A165-A4F6-A0AD7BB4588C}"/>
               </a:ext>
             </a:extLst>
           </p:cNvPr>
@@ -2198,7 +2198,7 @@
           <p:cNvPr id="3" name="Inhaltsplatzhalter 2">
             <a:extLst>
               <a:ext uri="{FF2B5EF4-FFF2-40B4-BE49-F238E27FC236}">
-                <a16:creationId xmlns:a16="http://schemas.microsoft.com/office/drawing/2014/main" id="{E04942F1-3B12-48F2-B09D-3F6AFB48E01B}"/>
+                <a16:creationId xmlns:a16="http://schemas.microsoft.com/office/drawing/2014/main" id="{A78A5C6E-2944-0230-22A2-0E4A57FD6F46}"/>
               </a:ext>
             </a:extLst>
           </p:cNvPr>
@@ -2288,7 +2288,7 @@
           <p:cNvPr id="4" name="Textplatzhalter 3">
             <a:extLst>
               <a:ext uri="{FF2B5EF4-FFF2-40B4-BE49-F238E27FC236}">
-                <a16:creationId xmlns:a16="http://schemas.microsoft.com/office/drawing/2014/main" id="{9E90207B-2D17-1D9B-046F-98480DF43DB0}"/>
+                <a16:creationId xmlns:a16="http://schemas.microsoft.com/office/drawing/2014/main" id="{FACD07DD-3E58-9E26-CBAD-215DF202BA0A}"/>
               </a:ext>
             </a:extLst>
           </p:cNvPr>
@@ -2359,7 +2359,7 @@
           <p:cNvPr id="5" name="Datumsplatzhalter 4">
             <a:extLst>
               <a:ext uri="{FF2B5EF4-FFF2-40B4-BE49-F238E27FC236}">
-                <a16:creationId xmlns:a16="http://schemas.microsoft.com/office/drawing/2014/main" id="{85C97ADE-AC04-6A9E-A294-B315BBB56B36}"/>
+                <a16:creationId xmlns:a16="http://schemas.microsoft.com/office/drawing/2014/main" id="{6418977B-25C7-EA22-9D0C-F2DE71E4E6EA}"/>
               </a:ext>
             </a:extLst>
           </p:cNvPr>
@@ -2375,7 +2375,7 @@
           <a:bodyPr/>
           <a:lstStyle/>
           <a:p>
-            <a:fld id="{96617B50-F960-4036-8841-4A0CCC737E93}" type="datetimeFigureOut">
+            <a:fld id="{D82672E1-57E8-467C-8345-19D96DC89106}" type="datetimeFigureOut">
               <a:rPr lang="de-DE" smtClean="0"/>
               <a:t>08.10.2026</a:t>
             </a:fld>
@@ -2388,7 +2388,7 @@
           <p:cNvPr id="6" name="Fußzeilenplatzhalter 5">
             <a:extLst>
               <a:ext uri="{FF2B5EF4-FFF2-40B4-BE49-F238E27FC236}">
-                <a16:creationId xmlns:a16="http://schemas.microsoft.com/office/drawing/2014/main" id="{24373BB5-D713-7AA5-4C7E-805DD807654C}"/>
+                <a16:creationId xmlns:a16="http://schemas.microsoft.com/office/drawing/2014/main" id="{389B7DCD-3092-D231-6F47-AD32D9E9F30D}"/>
               </a:ext>
             </a:extLst>
           </p:cNvPr>
@@ -2413,7 +2413,7 @@
           <p:cNvPr id="7" name="Foliennummernplatzhalter 6">
             <a:extLst>
               <a:ext uri="{FF2B5EF4-FFF2-40B4-BE49-F238E27FC236}">
-                <a16:creationId xmlns:a16="http://schemas.microsoft.com/office/drawing/2014/main" id="{E1D58A77-771A-1FCA-5EC4-C812F119F44B}"/>
+                <a16:creationId xmlns:a16="http://schemas.microsoft.com/office/drawing/2014/main" id="{78822397-1FF7-B729-E778-2F8566D9DAE7}"/>
               </a:ext>
             </a:extLst>
           </p:cNvPr>
@@ -2429,7 +2429,7 @@
           <a:bodyPr/>
           <a:lstStyle/>
           <a:p>
-            <a:fld id="{697172D1-5880-471A-B115-A902ED1779B8}" type="slidenum">
+            <a:fld id="{772AB598-4194-497E-883B-DA42DB1C224F}" type="slidenum">
               <a:rPr lang="de-DE" smtClean="0"/>
               <a:t>‹Nr.›</a:t>
             </a:fld>
@@ -2440,7 +2440,7 @@
     </p:spTree>
     <p:extLst>
       <p:ext uri="{BB962C8B-B14F-4D97-AF65-F5344CB8AC3E}">
-        <p14:creationId xmlns:p14="http://schemas.microsoft.com/office/powerpoint/2010/main" val="1715618419"/>
+        <p14:creationId xmlns:p14="http://schemas.microsoft.com/office/powerpoint/2010/main" val="3178304274"/>
       </p:ext>
     </p:extLst>
   </p:cSld>
@@ -2472,7 +2472,7 @@
           <p:cNvPr id="2" name="Titel 1">
             <a:extLst>
               <a:ext uri="{FF2B5EF4-FFF2-40B4-BE49-F238E27FC236}">
-                <a16:creationId xmlns:a16="http://schemas.microsoft.com/office/drawing/2014/main" id="{D2729971-2E96-380B-63F3-F953B7692EB4}"/>
+                <a16:creationId xmlns:a16="http://schemas.microsoft.com/office/drawing/2014/main" id="{43703D7C-0884-D5CE-0CFB-D435EF052210}"/>
               </a:ext>
             </a:extLst>
           </p:cNvPr>
@@ -2509,7 +2509,7 @@
           <p:cNvPr id="3" name="Bildplatzhalter 2">
             <a:extLst>
               <a:ext uri="{FF2B5EF4-FFF2-40B4-BE49-F238E27FC236}">
-                <a16:creationId xmlns:a16="http://schemas.microsoft.com/office/drawing/2014/main" id="{F907AF1F-0AD0-65DC-F79C-3E315107F87A}"/>
+                <a16:creationId xmlns:a16="http://schemas.microsoft.com/office/drawing/2014/main" id="{8347B047-DAEF-153A-F74B-C409FBE2A6C0}"/>
               </a:ext>
             </a:extLst>
           </p:cNvPr>
@@ -2576,7 +2576,7 @@
           <p:cNvPr id="4" name="Textplatzhalter 3">
             <a:extLst>
               <a:ext uri="{FF2B5EF4-FFF2-40B4-BE49-F238E27FC236}">
-                <a16:creationId xmlns:a16="http://schemas.microsoft.com/office/drawing/2014/main" id="{C146CD8E-ACBF-18DE-D497-E2AF54F5B376}"/>
+                <a16:creationId xmlns:a16="http://schemas.microsoft.com/office/drawing/2014/main" id="{BC3F9234-E9D8-7839-0B5F-429D6D80EAB6}"/>
               </a:ext>
             </a:extLst>
           </p:cNvPr>
@@ -2647,7 +2647,7 @@
           <p:cNvPr id="5" name="Datumsplatzhalter 4">
             <a:extLst>
               <a:ext uri="{FF2B5EF4-FFF2-40B4-BE49-F238E27FC236}">
-                <a16:creationId xmlns:a16="http://schemas.microsoft.com/office/drawing/2014/main" id="{5F3CAE41-5959-E358-5064-86ABB9BDD966}"/>
+                <a16:creationId xmlns:a16="http://schemas.microsoft.com/office/drawing/2014/main" id="{3E6D6DC4-4986-32F5-C170-91B19AE3FE0A}"/>
               </a:ext>
             </a:extLst>
           </p:cNvPr>
@@ -2663,7 +2663,7 @@
           <a:bodyPr/>
           <a:lstStyle/>
           <a:p>
-            <a:fld id="{96617B50-F960-4036-8841-4A0CCC737E93}" type="datetimeFigureOut">
+            <a:fld id="{D82672E1-57E8-467C-8345-19D96DC89106}" type="datetimeFigureOut">
               <a:rPr lang="de-DE" smtClean="0"/>
               <a:t>08.10.2026</a:t>
             </a:fld>
@@ -2676,7 +2676,7 @@
           <p:cNvPr id="6" name="Fußzeilenplatzhalter 5">
             <a:extLst>
               <a:ext uri="{FF2B5EF4-FFF2-40B4-BE49-F238E27FC236}">
-                <a16:creationId xmlns:a16="http://schemas.microsoft.com/office/drawing/2014/main" id="{84688BD9-B4D8-F31F-B4D3-FA6CEB6DBF59}"/>
+                <a16:creationId xmlns:a16="http://schemas.microsoft.com/office/drawing/2014/main" id="{349E372B-9BAC-7F8D-D771-17E20884580D}"/>
               </a:ext>
             </a:extLst>
           </p:cNvPr>
@@ -2701,7 +2701,7 @@
           <p:cNvPr id="7" name="Foliennummernplatzhalter 6">
             <a:extLst>
               <a:ext uri="{FF2B5EF4-FFF2-40B4-BE49-F238E27FC236}">
-                <a16:creationId xmlns:a16="http://schemas.microsoft.com/office/drawing/2014/main" id="{04600E2E-E756-AD00-B2A2-8DFBD0359D83}"/>
+                <a16:creationId xmlns:a16="http://schemas.microsoft.com/office/drawing/2014/main" id="{08FA9F68-BFBC-4A50-CCB4-C0BC4947EF6C}"/>
               </a:ext>
             </a:extLst>
           </p:cNvPr>
@@ -2717,7 +2717,7 @@
           <a:bodyPr/>
           <a:lstStyle/>
           <a:p>
-            <a:fld id="{697172D1-5880-471A-B115-A902ED1779B8}" type="slidenum">
+            <a:fld id="{772AB598-4194-497E-883B-DA42DB1C224F}" type="slidenum">
               <a:rPr lang="de-DE" smtClean="0"/>
               <a:t>‹Nr.›</a:t>
             </a:fld>
@@ -2728,7 +2728,7 @@
     </p:spTree>
     <p:extLst>
       <p:ext uri="{BB962C8B-B14F-4D97-AF65-F5344CB8AC3E}">
-        <p14:creationId xmlns:p14="http://schemas.microsoft.com/office/powerpoint/2010/main" val="2256953641"/>
+        <p14:creationId xmlns:p14="http://schemas.microsoft.com/office/powerpoint/2010/main" val="1360656699"/>
       </p:ext>
     </p:extLst>
   </p:cSld>
@@ -2765,7 +2765,7 @@
           <p:cNvPr id="2" name="Titelplatzhalter 1">
             <a:extLst>
               <a:ext uri="{FF2B5EF4-FFF2-40B4-BE49-F238E27FC236}">
-                <a16:creationId xmlns:a16="http://schemas.microsoft.com/office/drawing/2014/main" id="{775F9FE3-D83A-F829-7F40-80457556D296}"/>
+                <a16:creationId xmlns:a16="http://schemas.microsoft.com/office/drawing/2014/main" id="{BE920BBF-626E-E65C-99DE-8D00E0DD3942}"/>
               </a:ext>
             </a:extLst>
           </p:cNvPr>
@@ -2803,7 +2803,7 @@
           <p:cNvPr id="3" name="Textplatzhalter 2">
             <a:extLst>
               <a:ext uri="{FF2B5EF4-FFF2-40B4-BE49-F238E27FC236}">
-                <a16:creationId xmlns:a16="http://schemas.microsoft.com/office/drawing/2014/main" id="{4BFEE898-1A84-83AC-446B-9AC8C3D47CDE}"/>
+                <a16:creationId xmlns:a16="http://schemas.microsoft.com/office/drawing/2014/main" id="{7E88E17E-A749-79FF-20EA-975C013B9F82}"/>
               </a:ext>
             </a:extLst>
           </p:cNvPr>
@@ -2870,7 +2870,7 @@
           <p:cNvPr id="4" name="Datumsplatzhalter 3">
             <a:extLst>
               <a:ext uri="{FF2B5EF4-FFF2-40B4-BE49-F238E27FC236}">
-                <a16:creationId xmlns:a16="http://schemas.microsoft.com/office/drawing/2014/main" id="{86C36B49-EA24-E5F4-EAF9-669D0F7983A7}"/>
+                <a16:creationId xmlns:a16="http://schemas.microsoft.com/office/drawing/2014/main" id="{ED0CF892-8484-7629-89B8-2A71BE8039E3}"/>
               </a:ext>
             </a:extLst>
           </p:cNvPr>
@@ -2904,7 +2904,7 @@
             </a:lvl1pPr>
           </a:lstStyle>
           <a:p>
-            <a:fld id="{96617B50-F960-4036-8841-4A0CCC737E93}" type="datetimeFigureOut">
+            <a:fld id="{D82672E1-57E8-467C-8345-19D96DC89106}" type="datetimeFigureOut">
               <a:rPr lang="de-DE" smtClean="0"/>
               <a:t>08.10.2026</a:t>
             </a:fld>
@@ -2917,7 +2917,7 @@
           <p:cNvPr id="5" name="Fußzeilenplatzhalter 4">
             <a:extLst>
               <a:ext uri="{FF2B5EF4-FFF2-40B4-BE49-F238E27FC236}">
-                <a16:creationId xmlns:a16="http://schemas.microsoft.com/office/drawing/2014/main" id="{63F3E071-9493-8CCE-C524-F8E93AE36325}"/>
+                <a16:creationId xmlns:a16="http://schemas.microsoft.com/office/drawing/2014/main" id="{4D93EB86-36DA-7D9D-6ED9-15B3EF981708}"/>
               </a:ext>
             </a:extLst>
           </p:cNvPr>
@@ -2960,7 +2960,7 @@
           <p:cNvPr id="6" name="Foliennummernplatzhalter 5">
             <a:extLst>
               <a:ext uri="{FF2B5EF4-FFF2-40B4-BE49-F238E27FC236}">
-                <a16:creationId xmlns:a16="http://schemas.microsoft.com/office/drawing/2014/main" id="{2CD24CC4-560C-851A-37E3-BB0B8F9D79B4}"/>
+                <a16:creationId xmlns:a16="http://schemas.microsoft.com/office/drawing/2014/main" id="{F049CD69-6621-F146-CE12-3B9EA752BADD}"/>
               </a:ext>
             </a:extLst>
           </p:cNvPr>
@@ -2994,7 +2994,7 @@
             </a:lvl1pPr>
           </a:lstStyle>
           <a:p>
-            <a:fld id="{697172D1-5880-471A-B115-A902ED1779B8}" type="slidenum">
+            <a:fld id="{772AB598-4194-497E-883B-DA42DB1C224F}" type="slidenum">
               <a:rPr lang="de-DE" smtClean="0"/>
               <a:t>‹Nr.›</a:t>
             </a:fld>
@@ -3005,7 +3005,7 @@
     </p:spTree>
     <p:extLst>
       <p:ext uri="{BB962C8B-B14F-4D97-AF65-F5344CB8AC3E}">
-        <p14:creationId xmlns:p14="http://schemas.microsoft.com/office/powerpoint/2010/main" val="738588179"/>
+        <p14:creationId xmlns:p14="http://schemas.microsoft.com/office/powerpoint/2010/main" val="3256341534"/>
       </p:ext>
     </p:extLst>
   </p:cSld>
@@ -3328,7 +3328,7 @@
           <p:cNvPr id="2" name="Gerader Verbinder 1">
             <a:extLst>
               <a:ext uri="{FF2B5EF4-FFF2-40B4-BE49-F238E27FC236}">
-                <a16:creationId xmlns:a16="http://schemas.microsoft.com/office/drawing/2014/main" id="{C0C18268-B3E1-2DC9-ADD8-48EFAFCEE51B}"/>
+                <a16:creationId xmlns:a16="http://schemas.microsoft.com/office/drawing/2014/main" id="{3845D10F-4D81-876A-6805-DF04831D8219}"/>
               </a:ext>
             </a:extLst>
           </p:cNvPr>
@@ -3369,7 +3369,7 @@
           <p:cNvPr id="3" name="Gerader Verbinder 2">
             <a:extLst>
               <a:ext uri="{FF2B5EF4-FFF2-40B4-BE49-F238E27FC236}">
-                <a16:creationId xmlns:a16="http://schemas.microsoft.com/office/drawing/2014/main" id="{6B45A5AB-9A5E-1D90-6AC6-63ACDFC08B2E}"/>
+                <a16:creationId xmlns:a16="http://schemas.microsoft.com/office/drawing/2014/main" id="{64F2B0BB-0BE6-2F68-90DF-0688B7BAB13E}"/>
               </a:ext>
             </a:extLst>
           </p:cNvPr>
@@ -3410,7 +3410,7 @@
           <p:cNvPr id="4" name="Gerader Verbinder 3">
             <a:extLst>
               <a:ext uri="{FF2B5EF4-FFF2-40B4-BE49-F238E27FC236}">
-                <a16:creationId xmlns:a16="http://schemas.microsoft.com/office/drawing/2014/main" id="{C0F2656A-5F0C-AEAF-39C5-3B4F9ED28D96}"/>
+                <a16:creationId xmlns:a16="http://schemas.microsoft.com/office/drawing/2014/main" id="{EC5A7151-7E00-2F07-E36C-A564AED78BAC}"/>
               </a:ext>
             </a:extLst>
           </p:cNvPr>
@@ -3451,7 +3451,7 @@
           <p:cNvPr id="5" name="Gerader Verbinder 4">
             <a:extLst>
               <a:ext uri="{FF2B5EF4-FFF2-40B4-BE49-F238E27FC236}">
-                <a16:creationId xmlns:a16="http://schemas.microsoft.com/office/drawing/2014/main" id="{E58F46CA-43C4-58C8-6717-236B2482051F}"/>
+                <a16:creationId xmlns:a16="http://schemas.microsoft.com/office/drawing/2014/main" id="{6C83A3B6-B0E9-AC8F-633D-547637FF4BB1}"/>
               </a:ext>
             </a:extLst>
           </p:cNvPr>
@@ -3492,7 +3492,7 @@
           <p:cNvPr id="6" name="Gerader Verbinder 5">
             <a:extLst>
               <a:ext uri="{FF2B5EF4-FFF2-40B4-BE49-F238E27FC236}">
-                <a16:creationId xmlns:a16="http://schemas.microsoft.com/office/drawing/2014/main" id="{B7BD3A19-19F9-D403-FF8B-0A5217142EAB}"/>
+                <a16:creationId xmlns:a16="http://schemas.microsoft.com/office/drawing/2014/main" id="{6D1E7A7E-EE20-2A29-5A88-7382C841B1AE}"/>
               </a:ext>
             </a:extLst>
           </p:cNvPr>
@@ -3533,7 +3533,7 @@
           <p:cNvPr id="7" name="Gerader Verbinder 6">
             <a:extLst>
               <a:ext uri="{FF2B5EF4-FFF2-40B4-BE49-F238E27FC236}">
-                <a16:creationId xmlns:a16="http://schemas.microsoft.com/office/drawing/2014/main" id="{2FA42C11-95BA-4CEE-E3BB-27943F672734}"/>
+                <a16:creationId xmlns:a16="http://schemas.microsoft.com/office/drawing/2014/main" id="{AEA75BCF-5B57-7480-11BB-094EE46CFD40}"/>
               </a:ext>
             </a:extLst>
           </p:cNvPr>
@@ -3574,7 +3574,7 @@
           <p:cNvPr id="8" name="Gerader Verbinder 7">
             <a:extLst>
               <a:ext uri="{FF2B5EF4-FFF2-40B4-BE49-F238E27FC236}">
-                <a16:creationId xmlns:a16="http://schemas.microsoft.com/office/drawing/2014/main" id="{8EBD2737-57BE-F403-439A-67A23119C129}"/>
+                <a16:creationId xmlns:a16="http://schemas.microsoft.com/office/drawing/2014/main" id="{5BD12093-F4FA-9766-3A5B-01370F0437AB}"/>
               </a:ext>
             </a:extLst>
           </p:cNvPr>
@@ -3616,7 +3616,7 @@
           <p:cNvPr id="9" name="Gerader Verbinder 8">
             <a:extLst>
               <a:ext uri="{FF2B5EF4-FFF2-40B4-BE49-F238E27FC236}">
-                <a16:creationId xmlns:a16="http://schemas.microsoft.com/office/drawing/2014/main" id="{C2856236-C832-29B4-BBEF-306B67CD69F7}"/>
+                <a16:creationId xmlns:a16="http://schemas.microsoft.com/office/drawing/2014/main" id="{EA7810D1-32C6-A74F-566C-59862D912E5B}"/>
               </a:ext>
             </a:extLst>
           </p:cNvPr>
@@ -3658,7 +3658,7 @@
           <p:cNvPr id="10" name="Gerader Verbinder 9">
             <a:extLst>
               <a:ext uri="{FF2B5EF4-FFF2-40B4-BE49-F238E27FC236}">
-                <a16:creationId xmlns:a16="http://schemas.microsoft.com/office/drawing/2014/main" id="{73677D99-9607-63B4-43CB-5A86D8518462}"/>
+                <a16:creationId xmlns:a16="http://schemas.microsoft.com/office/drawing/2014/main" id="{0612EB82-39B0-15B6-6924-6ADADA4BEF57}"/>
               </a:ext>
             </a:extLst>
           </p:cNvPr>
@@ -3700,7 +3700,7 @@
           <p:cNvPr id="11" name="Gerader Verbinder 10">
             <a:extLst>
               <a:ext uri="{FF2B5EF4-FFF2-40B4-BE49-F238E27FC236}">
-                <a16:creationId xmlns:a16="http://schemas.microsoft.com/office/drawing/2014/main" id="{46AA0DCA-EB4A-86A5-0D92-BAE52FCC555A}"/>
+                <a16:creationId xmlns:a16="http://schemas.microsoft.com/office/drawing/2014/main" id="{960C17E6-B0E8-B419-19B9-975F53F87AF3}"/>
               </a:ext>
             </a:extLst>
           </p:cNvPr>
@@ -3742,7 +3742,7 @@
           <p:cNvPr id="12" name="Gerader Verbinder 11">
             <a:extLst>
               <a:ext uri="{FF2B5EF4-FFF2-40B4-BE49-F238E27FC236}">
-                <a16:creationId xmlns:a16="http://schemas.microsoft.com/office/drawing/2014/main" id="{064120D9-7CCF-A9F7-2BDD-4B9A8085BD44}"/>
+                <a16:creationId xmlns:a16="http://schemas.microsoft.com/office/drawing/2014/main" id="{46E06694-92A9-06F4-0662-D902F4CC241F}"/>
               </a:ext>
             </a:extLst>
           </p:cNvPr>
@@ -3784,7 +3784,7 @@
           <p:cNvPr id="13" name="Gerader Verbinder 12">
             <a:extLst>
               <a:ext uri="{FF2B5EF4-FFF2-40B4-BE49-F238E27FC236}">
-                <a16:creationId xmlns:a16="http://schemas.microsoft.com/office/drawing/2014/main" id="{EE4D596B-E1C4-540A-16AF-FBFD300EFBE6}"/>
+                <a16:creationId xmlns:a16="http://schemas.microsoft.com/office/drawing/2014/main" id="{58B08FF4-F424-6308-2736-4CB5D5B2F973}"/>
               </a:ext>
             </a:extLst>
           </p:cNvPr>
@@ -3826,7 +3826,7 @@
           <p:cNvPr id="14" name="Gerader Verbinder 13">
             <a:extLst>
               <a:ext uri="{FF2B5EF4-FFF2-40B4-BE49-F238E27FC236}">
-                <a16:creationId xmlns:a16="http://schemas.microsoft.com/office/drawing/2014/main" id="{A5B94711-94F5-EB1C-A7E8-2161711CFE3E}"/>
+                <a16:creationId xmlns:a16="http://schemas.microsoft.com/office/drawing/2014/main" id="{6AD9B4AF-FF81-4D7F-F383-B9EFAE329FF6}"/>
               </a:ext>
             </a:extLst>
           </p:cNvPr>
@@ -3868,7 +3868,7 @@
           <p:cNvPr id="15" name="Gerader Verbinder 14">
             <a:extLst>
               <a:ext uri="{FF2B5EF4-FFF2-40B4-BE49-F238E27FC236}">
-                <a16:creationId xmlns:a16="http://schemas.microsoft.com/office/drawing/2014/main" id="{A4268785-AAD2-5F0D-14A4-75F1C14AE82D}"/>
+                <a16:creationId xmlns:a16="http://schemas.microsoft.com/office/drawing/2014/main" id="{52243F4F-8024-89E9-B747-DEFC8E0A001C}"/>
               </a:ext>
             </a:extLst>
           </p:cNvPr>
@@ -3910,7 +3910,7 @@
           <p:cNvPr id="16" name="Gerader Verbinder 15">
             <a:extLst>
               <a:ext uri="{FF2B5EF4-FFF2-40B4-BE49-F238E27FC236}">
-                <a16:creationId xmlns:a16="http://schemas.microsoft.com/office/drawing/2014/main" id="{FCD2134F-4830-4BAC-4FD8-A4468A856F56}"/>
+                <a16:creationId xmlns:a16="http://schemas.microsoft.com/office/drawing/2014/main" id="{4206DD63-E2AE-76C0-02BF-53316C0BA103}"/>
               </a:ext>
             </a:extLst>
           </p:cNvPr>
@@ -3952,7 +3952,7 @@
           <p:cNvPr id="17" name="Gerader Verbinder 16">
             <a:extLst>
               <a:ext uri="{FF2B5EF4-FFF2-40B4-BE49-F238E27FC236}">
-                <a16:creationId xmlns:a16="http://schemas.microsoft.com/office/drawing/2014/main" id="{F38C707C-9EB2-8FAC-CFBA-1D1E2AF035C5}"/>
+                <a16:creationId xmlns:a16="http://schemas.microsoft.com/office/drawing/2014/main" id="{CBD90FF9-9640-45A6-6EAC-6679BF7FCAB5}"/>
               </a:ext>
             </a:extLst>
           </p:cNvPr>
@@ -3994,7 +3994,7 @@
           <p:cNvPr id="18" name="Gerader Verbinder 17">
             <a:extLst>
               <a:ext uri="{FF2B5EF4-FFF2-40B4-BE49-F238E27FC236}">
-                <a16:creationId xmlns:a16="http://schemas.microsoft.com/office/drawing/2014/main" id="{491B29AF-ABBD-F4C4-F53E-B34A51A4AFC6}"/>
+                <a16:creationId xmlns:a16="http://schemas.microsoft.com/office/drawing/2014/main" id="{066424F8-43CE-74F2-BE9C-E4781609E63B}"/>
               </a:ext>
             </a:extLst>
           </p:cNvPr>
@@ -4036,7 +4036,7 @@
           <p:cNvPr id="19" name="Gerader Verbinder 18">
             <a:extLst>
               <a:ext uri="{FF2B5EF4-FFF2-40B4-BE49-F238E27FC236}">
-                <a16:creationId xmlns:a16="http://schemas.microsoft.com/office/drawing/2014/main" id="{C85DDFDC-6458-5D8E-64A8-EC5275BEB09A}"/>
+                <a16:creationId xmlns:a16="http://schemas.microsoft.com/office/drawing/2014/main" id="{5982CBAB-6D44-29C5-9730-D8C910A9040F}"/>
               </a:ext>
             </a:extLst>
           </p:cNvPr>
@@ -4078,7 +4078,7 @@
           <p:cNvPr id="20" name="Rechteck 19">
             <a:extLst>
               <a:ext uri="{FF2B5EF4-FFF2-40B4-BE49-F238E27FC236}">
-                <a16:creationId xmlns:a16="http://schemas.microsoft.com/office/drawing/2014/main" id="{931DE154-AAB9-D911-6FB5-9AE20EE46487}"/>
+                <a16:creationId xmlns:a16="http://schemas.microsoft.com/office/drawing/2014/main" id="{77C082D3-D7A0-9B3A-CB39-BBBFD212CB30}"/>
               </a:ext>
             </a:extLst>
           </p:cNvPr>
@@ -4142,7 +4142,7 @@
           <p:cNvPr id="21" name="Rechteck 20">
             <a:extLst>
               <a:ext uri="{FF2B5EF4-FFF2-40B4-BE49-F238E27FC236}">
-                <a16:creationId xmlns:a16="http://schemas.microsoft.com/office/drawing/2014/main" id="{278F188A-AB40-77A8-EE40-CC96D93375D8}"/>
+                <a16:creationId xmlns:a16="http://schemas.microsoft.com/office/drawing/2014/main" id="{7CB43605-7A8E-9B9B-8661-F98D33B3382A}"/>
               </a:ext>
             </a:extLst>
           </p:cNvPr>
@@ -4206,7 +4206,7 @@
           <p:cNvPr id="22" name="Rechteck 21">
             <a:extLst>
               <a:ext uri="{FF2B5EF4-FFF2-40B4-BE49-F238E27FC236}">
-                <a16:creationId xmlns:a16="http://schemas.microsoft.com/office/drawing/2014/main" id="{3D06AFE3-B843-5ED7-8E35-46FDFEADF12B}"/>
+                <a16:creationId xmlns:a16="http://schemas.microsoft.com/office/drawing/2014/main" id="{5E1C0EA4-6F46-6897-6FAF-A2CF47B13C66}"/>
               </a:ext>
             </a:extLst>
           </p:cNvPr>
@@ -4270,7 +4270,7 @@
           <p:cNvPr id="23" name="Rechteck 22">
             <a:extLst>
               <a:ext uri="{FF2B5EF4-FFF2-40B4-BE49-F238E27FC236}">
-                <a16:creationId xmlns:a16="http://schemas.microsoft.com/office/drawing/2014/main" id="{A028815D-9DF0-888A-2ED4-F29E06D70E6B}"/>
+                <a16:creationId xmlns:a16="http://schemas.microsoft.com/office/drawing/2014/main" id="{4BD5F80D-D6BC-0371-C506-A5CC8FA2BC10}"/>
               </a:ext>
             </a:extLst>
           </p:cNvPr>
@@ -4334,7 +4334,7 @@
           <p:cNvPr id="24" name="Rechteck 23">
             <a:extLst>
               <a:ext uri="{FF2B5EF4-FFF2-40B4-BE49-F238E27FC236}">
-                <a16:creationId xmlns:a16="http://schemas.microsoft.com/office/drawing/2014/main" id="{B9B841A1-B10A-776D-81DD-159A6C20038E}"/>
+                <a16:creationId xmlns:a16="http://schemas.microsoft.com/office/drawing/2014/main" id="{724E7253-9065-8B92-A26E-7718A6CF7821}"/>
               </a:ext>
             </a:extLst>
           </p:cNvPr>
@@ -4396,7 +4396,7 @@
     </p:spTree>
     <p:extLst>
       <p:ext uri="{BB962C8B-B14F-4D97-AF65-F5344CB8AC3E}">
-        <p14:creationId xmlns:p14="http://schemas.microsoft.com/office/powerpoint/2010/main" val="2309847879"/>
+        <p14:creationId xmlns:p14="http://schemas.microsoft.com/office/powerpoint/2010/main" val="2654487889"/>
       </p:ext>
     </p:extLst>
   </p:cSld>
@@ -4428,7 +4428,7 @@
           <p:cNvPr id="2" name="Gerader Verbinder 1">
             <a:extLst>
               <a:ext uri="{FF2B5EF4-FFF2-40B4-BE49-F238E27FC236}">
-                <a16:creationId xmlns:a16="http://schemas.microsoft.com/office/drawing/2014/main" id="{62F72214-AB3F-3CAD-1040-9C1E1ADED23D}"/>
+                <a16:creationId xmlns:a16="http://schemas.microsoft.com/office/drawing/2014/main" id="{C907C381-9359-7E62-E42A-52CA2071F9CA}"/>
               </a:ext>
             </a:extLst>
           </p:cNvPr>
@@ -4471,7 +4471,7 @@
           <p:cNvPr id="3" name="Gerader Verbinder 2">
             <a:extLst>
               <a:ext uri="{FF2B5EF4-FFF2-40B4-BE49-F238E27FC236}">
-                <a16:creationId xmlns:a16="http://schemas.microsoft.com/office/drawing/2014/main" id="{D7E449B5-8234-F26D-A3F2-444AF04E5EAE}"/>
+                <a16:creationId xmlns:a16="http://schemas.microsoft.com/office/drawing/2014/main" id="{58B9F011-99EF-18FF-8E20-F5116D261CF2}"/>
               </a:ext>
             </a:extLst>
           </p:cNvPr>
@@ -4513,7 +4513,7 @@
           <p:cNvPr id="4" name="Gerader Verbinder 3">
             <a:extLst>
               <a:ext uri="{FF2B5EF4-FFF2-40B4-BE49-F238E27FC236}">
-                <a16:creationId xmlns:a16="http://schemas.microsoft.com/office/drawing/2014/main" id="{083C8E63-4D1A-B677-D788-4A1EA05C3AC3}"/>
+                <a16:creationId xmlns:a16="http://schemas.microsoft.com/office/drawing/2014/main" id="{D1871E69-EEA2-283C-1ECC-271800B1C83C}"/>
               </a:ext>
             </a:extLst>
           </p:cNvPr>
@@ -4556,7 +4556,7 @@
           <p:cNvPr id="5" name="Gerader Verbinder 4">
             <a:extLst>
               <a:ext uri="{FF2B5EF4-FFF2-40B4-BE49-F238E27FC236}">
-                <a16:creationId xmlns:a16="http://schemas.microsoft.com/office/drawing/2014/main" id="{DE675FFC-F20E-9715-2DA2-1E23CC0F3412}"/>
+                <a16:creationId xmlns:a16="http://schemas.microsoft.com/office/drawing/2014/main" id="{E34D6D7F-1978-C352-739F-D3F863F93765}"/>
               </a:ext>
             </a:extLst>
           </p:cNvPr>
@@ -4598,7 +4598,7 @@
           <p:cNvPr id="6" name="Gerader Verbinder 5">
             <a:extLst>
               <a:ext uri="{FF2B5EF4-FFF2-40B4-BE49-F238E27FC236}">
-                <a16:creationId xmlns:a16="http://schemas.microsoft.com/office/drawing/2014/main" id="{6B519410-52D4-CAD3-FD50-7AC8CA73BFC1}"/>
+                <a16:creationId xmlns:a16="http://schemas.microsoft.com/office/drawing/2014/main" id="{877E103E-2988-DAE1-046D-D990161E9019}"/>
               </a:ext>
             </a:extLst>
           </p:cNvPr>
@@ -4641,7 +4641,7 @@
           <p:cNvPr id="7" name="Gerader Verbinder 6">
             <a:extLst>
               <a:ext uri="{FF2B5EF4-FFF2-40B4-BE49-F238E27FC236}">
-                <a16:creationId xmlns:a16="http://schemas.microsoft.com/office/drawing/2014/main" id="{10A73743-8790-C280-7972-0D30E0F64296}"/>
+                <a16:creationId xmlns:a16="http://schemas.microsoft.com/office/drawing/2014/main" id="{285CE733-E052-54B5-F895-531D5EC18F01}"/>
               </a:ext>
             </a:extLst>
           </p:cNvPr>
@@ -4683,7 +4683,7 @@
           <p:cNvPr id="8" name="Gerader Verbinder 7">
             <a:extLst>
               <a:ext uri="{FF2B5EF4-FFF2-40B4-BE49-F238E27FC236}">
-                <a16:creationId xmlns:a16="http://schemas.microsoft.com/office/drawing/2014/main" id="{C6FEA7B9-3CD9-473C-EF09-B07B5185BBB1}"/>
+                <a16:creationId xmlns:a16="http://schemas.microsoft.com/office/drawing/2014/main" id="{9B88D880-6B3F-90EC-57C3-844D429D6AF5}"/>
               </a:ext>
             </a:extLst>
           </p:cNvPr>
@@ -4726,7 +4726,7 @@
           <p:cNvPr id="9" name="Gerader Verbinder 8">
             <a:extLst>
               <a:ext uri="{FF2B5EF4-FFF2-40B4-BE49-F238E27FC236}">
-                <a16:creationId xmlns:a16="http://schemas.microsoft.com/office/drawing/2014/main" id="{3954EA31-005C-8232-94B1-E7803C8CD405}"/>
+                <a16:creationId xmlns:a16="http://schemas.microsoft.com/office/drawing/2014/main" id="{5E37BC16-729A-1633-78B9-5B752251389E}"/>
               </a:ext>
             </a:extLst>
           </p:cNvPr>
@@ -4768,7 +4768,7 @@
           <p:cNvPr id="10" name="Gerader Verbinder 9">
             <a:extLst>
               <a:ext uri="{FF2B5EF4-FFF2-40B4-BE49-F238E27FC236}">
-                <a16:creationId xmlns:a16="http://schemas.microsoft.com/office/drawing/2014/main" id="{644CE246-F155-6AE2-070E-9F640B44D990}"/>
+                <a16:creationId xmlns:a16="http://schemas.microsoft.com/office/drawing/2014/main" id="{87315541-8F62-007A-CDAF-5847CD1A85F7}"/>
               </a:ext>
             </a:extLst>
           </p:cNvPr>
@@ -4811,7 +4811,7 @@
           <p:cNvPr id="11" name="Gerader Verbinder 10">
             <a:extLst>
               <a:ext uri="{FF2B5EF4-FFF2-40B4-BE49-F238E27FC236}">
-                <a16:creationId xmlns:a16="http://schemas.microsoft.com/office/drawing/2014/main" id="{431521BD-6CE1-3D21-6B70-BD1DDADED69E}"/>
+                <a16:creationId xmlns:a16="http://schemas.microsoft.com/office/drawing/2014/main" id="{AE773A54-7478-41E0-9BA6-3E746939A8B5}"/>
               </a:ext>
             </a:extLst>
           </p:cNvPr>
@@ -4853,7 +4853,7 @@
           <p:cNvPr id="12" name="Gerader Verbinder 11">
             <a:extLst>
               <a:ext uri="{FF2B5EF4-FFF2-40B4-BE49-F238E27FC236}">
-                <a16:creationId xmlns:a16="http://schemas.microsoft.com/office/drawing/2014/main" id="{D8F4890A-B9DC-359E-0DF7-910E214AD67C}"/>
+                <a16:creationId xmlns:a16="http://schemas.microsoft.com/office/drawing/2014/main" id="{AE3729E3-82B2-3416-4898-94A70ED76A3B}"/>
               </a:ext>
             </a:extLst>
           </p:cNvPr>
@@ -4896,7 +4896,7 @@
           <p:cNvPr id="13" name="Gerader Verbinder 12">
             <a:extLst>
               <a:ext uri="{FF2B5EF4-FFF2-40B4-BE49-F238E27FC236}">
-                <a16:creationId xmlns:a16="http://schemas.microsoft.com/office/drawing/2014/main" id="{4EE39993-CAFF-B31F-E655-4F18D0795F58}"/>
+                <a16:creationId xmlns:a16="http://schemas.microsoft.com/office/drawing/2014/main" id="{C65C76AE-FCE0-058D-F434-F5BCA22778C5}"/>
               </a:ext>
             </a:extLst>
           </p:cNvPr>
@@ -4938,7 +4938,7 @@
           <p:cNvPr id="14" name="Gerader Verbinder 13">
             <a:extLst>
               <a:ext uri="{FF2B5EF4-FFF2-40B4-BE49-F238E27FC236}">
-                <a16:creationId xmlns:a16="http://schemas.microsoft.com/office/drawing/2014/main" id="{2D6DF59E-EAE9-720E-DE94-647DDA35C8C8}"/>
+                <a16:creationId xmlns:a16="http://schemas.microsoft.com/office/drawing/2014/main" id="{E8DCCE50-5253-3594-D61A-407B1994CB81}"/>
               </a:ext>
             </a:extLst>
           </p:cNvPr>
@@ -4981,7 +4981,7 @@
           <p:cNvPr id="15" name="Gerader Verbinder 14">
             <a:extLst>
               <a:ext uri="{FF2B5EF4-FFF2-40B4-BE49-F238E27FC236}">
-                <a16:creationId xmlns:a16="http://schemas.microsoft.com/office/drawing/2014/main" id="{5385B652-7195-C53B-FF23-7BE829F6D812}"/>
+                <a16:creationId xmlns:a16="http://schemas.microsoft.com/office/drawing/2014/main" id="{860DB154-BDDF-398F-C0EB-50EB6C5FF764}"/>
               </a:ext>
             </a:extLst>
           </p:cNvPr>
@@ -5023,7 +5023,7 @@
           <p:cNvPr id="16" name="Gerader Verbinder 15">
             <a:extLst>
               <a:ext uri="{FF2B5EF4-FFF2-40B4-BE49-F238E27FC236}">
-                <a16:creationId xmlns:a16="http://schemas.microsoft.com/office/drawing/2014/main" id="{E0A2BF6E-6C87-B782-3399-2B277E4C8A0F}"/>
+                <a16:creationId xmlns:a16="http://schemas.microsoft.com/office/drawing/2014/main" id="{3B9A5355-A724-3CC3-1EFB-B79C25527101}"/>
               </a:ext>
             </a:extLst>
           </p:cNvPr>
@@ -5066,7 +5066,7 @@
           <p:cNvPr id="17" name="Gerader Verbinder 16">
             <a:extLst>
               <a:ext uri="{FF2B5EF4-FFF2-40B4-BE49-F238E27FC236}">
-                <a16:creationId xmlns:a16="http://schemas.microsoft.com/office/drawing/2014/main" id="{24716FA7-017A-5675-C485-C41755122D35}"/>
+                <a16:creationId xmlns:a16="http://schemas.microsoft.com/office/drawing/2014/main" id="{79B0A7DE-1F8A-B2CD-34BB-8F80606446F2}"/>
               </a:ext>
             </a:extLst>
           </p:cNvPr>
@@ -5108,7 +5108,7 @@
           <p:cNvPr id="18" name="Gerader Verbinder 17">
             <a:extLst>
               <a:ext uri="{FF2B5EF4-FFF2-40B4-BE49-F238E27FC236}">
-                <a16:creationId xmlns:a16="http://schemas.microsoft.com/office/drawing/2014/main" id="{C050CD63-1A34-EAF8-6147-8A0A75988D7B}"/>
+                <a16:creationId xmlns:a16="http://schemas.microsoft.com/office/drawing/2014/main" id="{F1EC0942-0170-1FCA-A024-D25FBB19BB65}"/>
               </a:ext>
             </a:extLst>
           </p:cNvPr>
@@ -5151,7 +5151,7 @@
           <p:cNvPr id="19" name="Gerader Verbinder 18">
             <a:extLst>
               <a:ext uri="{FF2B5EF4-FFF2-40B4-BE49-F238E27FC236}">
-                <a16:creationId xmlns:a16="http://schemas.microsoft.com/office/drawing/2014/main" id="{0D2DCE91-D429-7767-ACD3-4BA347232425}"/>
+                <a16:creationId xmlns:a16="http://schemas.microsoft.com/office/drawing/2014/main" id="{630F9FB5-C2F4-AC0E-410C-555DB454CC26}"/>
               </a:ext>
             </a:extLst>
           </p:cNvPr>
@@ -5193,7 +5193,7 @@
           <p:cNvPr id="20" name="Gerader Verbinder 19">
             <a:extLst>
               <a:ext uri="{FF2B5EF4-FFF2-40B4-BE49-F238E27FC236}">
-                <a16:creationId xmlns:a16="http://schemas.microsoft.com/office/drawing/2014/main" id="{69CACCB4-901B-277B-DC9A-726FB14110AE}"/>
+                <a16:creationId xmlns:a16="http://schemas.microsoft.com/office/drawing/2014/main" id="{F56E3A2A-16BC-4E10-655F-A6006FE83876}"/>
               </a:ext>
             </a:extLst>
           </p:cNvPr>
@@ -5236,7 +5236,7 @@
           <p:cNvPr id="21" name="Gerader Verbinder 20">
             <a:extLst>
               <a:ext uri="{FF2B5EF4-FFF2-40B4-BE49-F238E27FC236}">
-                <a16:creationId xmlns:a16="http://schemas.microsoft.com/office/drawing/2014/main" id="{50E34DC7-AE26-485A-D4E9-C4AE6E690A5C}"/>
+                <a16:creationId xmlns:a16="http://schemas.microsoft.com/office/drawing/2014/main" id="{885D3D63-2559-A0DB-72F0-E6F1B5C0F1AE}"/>
               </a:ext>
             </a:extLst>
           </p:cNvPr>
@@ -5278,7 +5278,7 @@
           <p:cNvPr id="22" name="Gerader Verbinder 21">
             <a:extLst>
               <a:ext uri="{FF2B5EF4-FFF2-40B4-BE49-F238E27FC236}">
-                <a16:creationId xmlns:a16="http://schemas.microsoft.com/office/drawing/2014/main" id="{D851FB9C-AC3E-DFA9-D03B-6F8484F66904}"/>
+                <a16:creationId xmlns:a16="http://schemas.microsoft.com/office/drawing/2014/main" id="{5277911C-439D-7151-E63A-6B1ED14B7BDF}"/>
               </a:ext>
             </a:extLst>
           </p:cNvPr>
@@ -5321,7 +5321,7 @@
           <p:cNvPr id="23" name="Gerader Verbinder 22">
             <a:extLst>
               <a:ext uri="{FF2B5EF4-FFF2-40B4-BE49-F238E27FC236}">
-                <a16:creationId xmlns:a16="http://schemas.microsoft.com/office/drawing/2014/main" id="{1CEBEE97-1EBC-E77B-2CE1-DC260C1AAF41}"/>
+                <a16:creationId xmlns:a16="http://schemas.microsoft.com/office/drawing/2014/main" id="{E831A61F-E9E1-F248-F446-09E156964AC1}"/>
               </a:ext>
             </a:extLst>
           </p:cNvPr>
@@ -5363,7 +5363,7 @@
           <p:cNvPr id="24" name="Gerader Verbinder 23">
             <a:extLst>
               <a:ext uri="{FF2B5EF4-FFF2-40B4-BE49-F238E27FC236}">
-                <a16:creationId xmlns:a16="http://schemas.microsoft.com/office/drawing/2014/main" id="{A912808F-37AF-DDE7-EA61-99B8216C50EF}"/>
+                <a16:creationId xmlns:a16="http://schemas.microsoft.com/office/drawing/2014/main" id="{E3E465D7-02B2-FD7C-DAF5-8C8C3B6245B2}"/>
               </a:ext>
             </a:extLst>
           </p:cNvPr>
@@ -5406,7 +5406,7 @@
           <p:cNvPr id="25" name="Gerader Verbinder 24">
             <a:extLst>
               <a:ext uri="{FF2B5EF4-FFF2-40B4-BE49-F238E27FC236}">
-                <a16:creationId xmlns:a16="http://schemas.microsoft.com/office/drawing/2014/main" id="{F82D7AD5-CB69-206A-F555-3A21EFE66587}"/>
+                <a16:creationId xmlns:a16="http://schemas.microsoft.com/office/drawing/2014/main" id="{F4A8EC35-CD53-1E30-2B13-182699B90736}"/>
               </a:ext>
             </a:extLst>
           </p:cNvPr>
@@ -5448,7 +5448,7 @@
           <p:cNvPr id="26" name="Gerader Verbinder 25">
             <a:extLst>
               <a:ext uri="{FF2B5EF4-FFF2-40B4-BE49-F238E27FC236}">
-                <a16:creationId xmlns:a16="http://schemas.microsoft.com/office/drawing/2014/main" id="{8E5BC65A-30EB-9C89-4375-51B5F19AB7D0}"/>
+                <a16:creationId xmlns:a16="http://schemas.microsoft.com/office/drawing/2014/main" id="{517EE88E-A7A3-0682-2C67-E3BA4F23F488}"/>
               </a:ext>
             </a:extLst>
           </p:cNvPr>
@@ -5491,7 +5491,7 @@
           <p:cNvPr id="27" name="Gerader Verbinder 26">
             <a:extLst>
               <a:ext uri="{FF2B5EF4-FFF2-40B4-BE49-F238E27FC236}">
-                <a16:creationId xmlns:a16="http://schemas.microsoft.com/office/drawing/2014/main" id="{D0AFA0D1-60C6-2465-F758-EB9925F620D4}"/>
+                <a16:creationId xmlns:a16="http://schemas.microsoft.com/office/drawing/2014/main" id="{F17ABCB3-6D58-8678-76AF-949E3E9A6C70}"/>
               </a:ext>
             </a:extLst>
           </p:cNvPr>
@@ -5533,7 +5533,7 @@
           <p:cNvPr id="28" name="Gerader Verbinder 27">
             <a:extLst>
               <a:ext uri="{FF2B5EF4-FFF2-40B4-BE49-F238E27FC236}">
-                <a16:creationId xmlns:a16="http://schemas.microsoft.com/office/drawing/2014/main" id="{CABE15D5-9F61-4970-ADD7-4DC7F849ABFB}"/>
+                <a16:creationId xmlns:a16="http://schemas.microsoft.com/office/drawing/2014/main" id="{7D3564ED-3C31-CFE0-126C-2C554BA2C89B}"/>
               </a:ext>
             </a:extLst>
           </p:cNvPr>
@@ -5576,7 +5576,7 @@
           <p:cNvPr id="29" name="Gerader Verbinder 28">
             <a:extLst>
               <a:ext uri="{FF2B5EF4-FFF2-40B4-BE49-F238E27FC236}">
-                <a16:creationId xmlns:a16="http://schemas.microsoft.com/office/drawing/2014/main" id="{601B176E-5162-050E-CA91-B5974BAAE9F3}"/>
+                <a16:creationId xmlns:a16="http://schemas.microsoft.com/office/drawing/2014/main" id="{C2F699FB-A714-FE4B-4CC6-2EAFFB416F57}"/>
               </a:ext>
             </a:extLst>
           </p:cNvPr>
@@ -5618,7 +5618,7 @@
           <p:cNvPr id="30" name="Gerader Verbinder 29">
             <a:extLst>
               <a:ext uri="{FF2B5EF4-FFF2-40B4-BE49-F238E27FC236}">
-                <a16:creationId xmlns:a16="http://schemas.microsoft.com/office/drawing/2014/main" id="{9809B091-DDA3-B3F3-2829-FCB96C44AFFD}"/>
+                <a16:creationId xmlns:a16="http://schemas.microsoft.com/office/drawing/2014/main" id="{523D18E1-70E0-A3B4-3906-AECA60749E05}"/>
               </a:ext>
             </a:extLst>
           </p:cNvPr>
@@ -5661,7 +5661,7 @@
           <p:cNvPr id="31" name="Gerader Verbinder 30">
             <a:extLst>
               <a:ext uri="{FF2B5EF4-FFF2-40B4-BE49-F238E27FC236}">
-                <a16:creationId xmlns:a16="http://schemas.microsoft.com/office/drawing/2014/main" id="{CE13A7B1-4F40-FBF7-EF14-9EAC4C76FA34}"/>
+                <a16:creationId xmlns:a16="http://schemas.microsoft.com/office/drawing/2014/main" id="{D1C42326-FE6F-FB85-C659-B51473BBD146}"/>
               </a:ext>
             </a:extLst>
           </p:cNvPr>
@@ -5701,7 +5701,7 @@
     </p:spTree>
     <p:extLst>
       <p:ext uri="{BB962C8B-B14F-4D97-AF65-F5344CB8AC3E}">
-        <p14:creationId xmlns:p14="http://schemas.microsoft.com/office/powerpoint/2010/main" val="2289012805"/>
+        <p14:creationId xmlns:p14="http://schemas.microsoft.com/office/powerpoint/2010/main" val="2237413052"/>
       </p:ext>
     </p:extLst>
   </p:cSld>
@@ -5733,7 +5733,7 @@
           <p:cNvPr id="2" name="Stern: 5 Zacken 1">
             <a:extLst>
               <a:ext uri="{FF2B5EF4-FFF2-40B4-BE49-F238E27FC236}">
-                <a16:creationId xmlns:a16="http://schemas.microsoft.com/office/drawing/2014/main" id="{864B363A-7D05-1763-664A-105099DD6E45}"/>
+                <a16:creationId xmlns:a16="http://schemas.microsoft.com/office/drawing/2014/main" id="{982AA6CC-A08F-01BC-1CB0-557E42CE9FF6}"/>
               </a:ext>
             </a:extLst>
           </p:cNvPr>
@@ -5787,7 +5787,7 @@
           <p:cNvPr id="3" name="Ellipse 2">
             <a:extLst>
               <a:ext uri="{FF2B5EF4-FFF2-40B4-BE49-F238E27FC236}">
-                <a16:creationId xmlns:a16="http://schemas.microsoft.com/office/drawing/2014/main" id="{C247D382-C9CB-2B2B-DE82-87929E122CB5}"/>
+                <a16:creationId xmlns:a16="http://schemas.microsoft.com/office/drawing/2014/main" id="{F80D9E88-9041-FD9E-F124-411D8B4143AA}"/>
               </a:ext>
             </a:extLst>
           </p:cNvPr>
@@ -5841,7 +5841,7 @@
           <p:cNvPr id="4" name="Stern: 5 Zacken 3">
             <a:extLst>
               <a:ext uri="{FF2B5EF4-FFF2-40B4-BE49-F238E27FC236}">
-                <a16:creationId xmlns:a16="http://schemas.microsoft.com/office/drawing/2014/main" id="{C19DF971-BF13-6928-94B1-01EEF8B93126}"/>
+                <a16:creationId xmlns:a16="http://schemas.microsoft.com/office/drawing/2014/main" id="{38D4618C-A3A1-1C64-79E8-742FACA418D0}"/>
               </a:ext>
             </a:extLst>
           </p:cNvPr>
@@ -5895,7 +5895,7 @@
           <p:cNvPr id="5" name="Ellipse 4">
             <a:extLst>
               <a:ext uri="{FF2B5EF4-FFF2-40B4-BE49-F238E27FC236}">
-                <a16:creationId xmlns:a16="http://schemas.microsoft.com/office/drawing/2014/main" id="{A4C8415F-6D86-269E-134B-8D68873AB693}"/>
+                <a16:creationId xmlns:a16="http://schemas.microsoft.com/office/drawing/2014/main" id="{F1009AD8-CFFD-46AB-E36F-F73E10026FFB}"/>
               </a:ext>
             </a:extLst>
           </p:cNvPr>
@@ -5949,7 +5949,7 @@
           <p:cNvPr id="6" name="Stern: 5 Zacken 5">
             <a:extLst>
               <a:ext uri="{FF2B5EF4-FFF2-40B4-BE49-F238E27FC236}">
-                <a16:creationId xmlns:a16="http://schemas.microsoft.com/office/drawing/2014/main" id="{D6193DE7-4031-FCB4-010A-B344C737C3B7}"/>
+                <a16:creationId xmlns:a16="http://schemas.microsoft.com/office/drawing/2014/main" id="{9D1D63D5-E295-047E-B5D9-978D2816FC96}"/>
               </a:ext>
             </a:extLst>
           </p:cNvPr>
@@ -6003,7 +6003,7 @@
           <p:cNvPr id="7" name="Ellipse 6">
             <a:extLst>
               <a:ext uri="{FF2B5EF4-FFF2-40B4-BE49-F238E27FC236}">
-                <a16:creationId xmlns:a16="http://schemas.microsoft.com/office/drawing/2014/main" id="{CBE1EFDE-E514-332A-A4BD-EB2A5B571392}"/>
+                <a16:creationId xmlns:a16="http://schemas.microsoft.com/office/drawing/2014/main" id="{C5F323FE-42B9-10FA-B407-F28B808923C5}"/>
               </a:ext>
             </a:extLst>
           </p:cNvPr>
@@ -6055,7 +6055,7 @@
     </p:spTree>
     <p:extLst>
       <p:ext uri="{BB962C8B-B14F-4D97-AF65-F5344CB8AC3E}">
-        <p14:creationId xmlns:p14="http://schemas.microsoft.com/office/powerpoint/2010/main" val="1583916210"/>
+        <p14:creationId xmlns:p14="http://schemas.microsoft.com/office/powerpoint/2010/main" val="4129212176"/>
       </p:ext>
     </p:extLst>
   </p:cSld>
